--- a/CKDSurveillance/PPT/Q759.pptx
+++ b/CKDSurveillance/PPT/Q759.pptx
@@ -13,6 +13,8 @@
     <p:sldId id="308" r:id="rId7"/>
     <p:sldId id="309" r:id="rId8"/>
     <p:sldId id="310" r:id="rId9"/>
+    <p:sldId id="312" r:id="rId10"/>
+    <p:sldId id="313" r:id="rId11"/>
   </p:sldIdLst>
   <p:sldSz cx="12192000" cy="6858000"/>
   <p:notesSz cx="6858000" cy="9144000"/>
@@ -5107,10 +5109,10 @@
         <c:manualLayout>
           <c:xMode val="edge"/>
           <c:yMode val="edge"/>
-          <c:x val="0.10532178477690286"/>
+          <c:x val="4.7544006999125109E-2"/>
           <c:y val="0.71060226495904244"/>
-          <c:w val="0.78690043744531935"/>
-          <c:h val="0.2514742283323575"/>
+          <c:w val="0.94690043744531938"/>
+          <c:h val="0.26258530183727036"/>
         </c:manualLayout>
       </c:layout>
       <c:overlay val="0"/>
@@ -6533,7 +6535,7 @@
                   </a:defRPr>
                 </a:pPr>
                 <a:r>
-                  <a:rPr lang="en-US"/>
+                  <a:rPr lang="en-US" dirty="0"/>
                   <a:t>Adults with CKD Stages 3-5 and ICD-9 or 10 code (%)</a:t>
                 </a:r>
               </a:p>
@@ -6607,6 +6609,16 @@
     </c:plotArea>
     <c:legend>
       <c:legendPos val="b"/>
+      <c:layout>
+        <c:manualLayout>
+          <c:xMode val="edge"/>
+          <c:yMode val="edge"/>
+          <c:x val="4.5994225721784777E-2"/>
+          <c:y val="0.65226902887139104"/>
+          <c:w val="0.9540057742782152"/>
+          <c:h val="0.33106430446194224"/>
+        </c:manualLayout>
+      </c:layout>
       <c:overlay val="0"/>
       <c:spPr>
         <a:noFill/>
@@ -6657,6 +6669,5539 @@
     <a:p>
       <a:pPr>
         <a:defRPr sz="2000">
+          <a:solidFill>
+            <a:schemeClr val="tx1"/>
+          </a:solidFill>
+        </a:defRPr>
+      </a:pPr>
+      <a:endParaRPr lang="en-US"/>
+    </a:p>
+  </c:txPr>
+  <c:externalData r:id="rId3">
+    <c:autoUpdate val="0"/>
+  </c:externalData>
+</c:chartSpace>
+</file>
+
+<file path=ppt/charts/chart8.xml><?xml version="1.0" encoding="utf-8"?>
+<c:chartSpace xmlns:c="http://schemas.openxmlformats.org/drawingml/2006/chart" xmlns:a="http://schemas.openxmlformats.org/drawingml/2006/main" xmlns:r="http://schemas.openxmlformats.org/officeDocument/2006/relationships" xmlns:c16r2="http://schemas.microsoft.com/office/drawing/2015/06/chart">
+  <c:date1904 val="0"/>
+  <c:lang val="en-US"/>
+  <c:roundedCorners val="0"/>
+  <mc:AlternateContent xmlns:mc="http://schemas.openxmlformats.org/markup-compatibility/2006">
+    <mc:Choice xmlns:c14="http://schemas.microsoft.com/office/drawing/2007/8/2/chart" Requires="c14">
+      <c14:style val="102"/>
+    </mc:Choice>
+    <mc:Fallback>
+      <c:style val="2"/>
+    </mc:Fallback>
+  </mc:AlternateContent>
+  <c:chart>
+    <c:autoTitleDeleted val="1"/>
+    <c:plotArea>
+      <c:layout/>
+      <c:lineChart>
+        <c:grouping val="standard"/>
+        <c:varyColors val="0"/>
+        <c:ser>
+          <c:idx val="3"/>
+          <c:order val="2"/>
+          <c:tx>
+            <c:strRef>
+              <c:f>'CKD+ICDbyStage'!$B$5</c:f>
+              <c:strCache>
+                <c:ptCount val="1"/>
+                <c:pt idx="0">
+                  <c:v>CKD Stage 3</c:v>
+                </c:pt>
+              </c:strCache>
+            </c:strRef>
+          </c:tx>
+          <c:spPr>
+            <a:ln w="44450" cap="rnd">
+              <a:solidFill>
+                <a:schemeClr val="accent1"/>
+              </a:solidFill>
+              <a:round/>
+            </a:ln>
+            <a:effectLst/>
+          </c:spPr>
+          <c:marker>
+            <c:symbol val="circle"/>
+            <c:size val="5"/>
+            <c:spPr>
+              <a:solidFill>
+                <a:schemeClr val="accent1"/>
+              </a:solidFill>
+              <a:ln w="9525">
+                <a:solidFill>
+                  <a:schemeClr val="accent1"/>
+                </a:solidFill>
+              </a:ln>
+              <a:effectLst/>
+            </c:spPr>
+          </c:marker>
+          <c:cat>
+            <c:numRef>
+              <c:f>'CKD+ICDbyStage'!$C$1:$Q$1</c:f>
+              <c:numCache>
+                <c:formatCode>General</c:formatCode>
+                <c:ptCount val="15"/>
+                <c:pt idx="0">
+                  <c:v>2009</c:v>
+                </c:pt>
+                <c:pt idx="1">
+                  <c:v>2010</c:v>
+                </c:pt>
+                <c:pt idx="2">
+                  <c:v>2011</c:v>
+                </c:pt>
+                <c:pt idx="3">
+                  <c:v>2012</c:v>
+                </c:pt>
+                <c:pt idx="4">
+                  <c:v>2013</c:v>
+                </c:pt>
+                <c:pt idx="5">
+                  <c:v>2014</c:v>
+                </c:pt>
+                <c:pt idx="6">
+                  <c:v>2015</c:v>
+                </c:pt>
+                <c:pt idx="7">
+                  <c:v>2016</c:v>
+                </c:pt>
+                <c:pt idx="8">
+                  <c:v>2017</c:v>
+                </c:pt>
+                <c:pt idx="9">
+                  <c:v>2018</c:v>
+                </c:pt>
+                <c:pt idx="10">
+                  <c:v>2019</c:v>
+                </c:pt>
+                <c:pt idx="11">
+                  <c:v>2020</c:v>
+                </c:pt>
+                <c:pt idx="12">
+                  <c:v>2021</c:v>
+                </c:pt>
+                <c:pt idx="13">
+                  <c:v>2022</c:v>
+                </c:pt>
+                <c:pt idx="14">
+                  <c:v>2023</c:v>
+                </c:pt>
+              </c:numCache>
+            </c:numRef>
+          </c:cat>
+          <c:val>
+            <c:numRef>
+              <c:f>'CKD+ICDbyStage'!$C$5:$Q$5</c:f>
+              <c:numCache>
+                <c:formatCode>General</c:formatCode>
+                <c:ptCount val="15"/>
+                <c:pt idx="0">
+                  <c:v>28.41</c:v>
+                </c:pt>
+                <c:pt idx="1">
+                  <c:v>29.99</c:v>
+                </c:pt>
+                <c:pt idx="2">
+                  <c:v>33.15</c:v>
+                </c:pt>
+                <c:pt idx="3">
+                  <c:v>33.92</c:v>
+                </c:pt>
+                <c:pt idx="4">
+                  <c:v>34.630000000000003</c:v>
+                </c:pt>
+                <c:pt idx="5">
+                  <c:v>34.950000000000003</c:v>
+                </c:pt>
+                <c:pt idx="6">
+                  <c:v>35.869999999999997</c:v>
+                </c:pt>
+                <c:pt idx="7">
+                  <c:v>28.44</c:v>
+                </c:pt>
+                <c:pt idx="8">
+                  <c:v>28.65</c:v>
+                </c:pt>
+                <c:pt idx="9">
+                  <c:v>28.9</c:v>
+                </c:pt>
+                <c:pt idx="10">
+                  <c:v>28.68</c:v>
+                </c:pt>
+                <c:pt idx="11">
+                  <c:v>26.6</c:v>
+                </c:pt>
+                <c:pt idx="12">
+                  <c:v>32.770000000000003</c:v>
+                </c:pt>
+                <c:pt idx="13">
+                  <c:v>32.119999999999997</c:v>
+                </c:pt>
+                <c:pt idx="14">
+                  <c:v>31.96</c:v>
+                </c:pt>
+              </c:numCache>
+            </c:numRef>
+          </c:val>
+          <c:smooth val="0"/>
+          <c:extLst>
+            <c:ext xmlns:c16="http://schemas.microsoft.com/office/drawing/2014/chart" uri="{C3380CC4-5D6E-409C-BE32-E72D297353CC}">
+              <c16:uniqueId val="{00000001-32AF-404F-B120-39600E387D48}"/>
+            </c:ext>
+          </c:extLst>
+        </c:ser>
+        <c:ser>
+          <c:idx val="6"/>
+          <c:order val="5"/>
+          <c:tx>
+            <c:strRef>
+              <c:f>'CKD+ICDbyStage'!$B$8</c:f>
+              <c:strCache>
+                <c:ptCount val="1"/>
+                <c:pt idx="0">
+                  <c:v>CKD Stage 4</c:v>
+                </c:pt>
+              </c:strCache>
+            </c:strRef>
+          </c:tx>
+          <c:spPr>
+            <a:ln w="44450" cap="rnd">
+              <a:solidFill>
+                <a:srgbClr val="F1975A"/>
+              </a:solidFill>
+              <a:round/>
+            </a:ln>
+            <a:effectLst/>
+          </c:spPr>
+          <c:marker>
+            <c:symbol val="circle"/>
+            <c:size val="5"/>
+            <c:spPr>
+              <a:solidFill>
+                <a:srgbClr val="F1975A"/>
+              </a:solidFill>
+              <a:ln w="9525">
+                <a:solidFill>
+                  <a:srgbClr val="F1975A"/>
+                </a:solidFill>
+              </a:ln>
+              <a:effectLst/>
+            </c:spPr>
+          </c:marker>
+          <c:cat>
+            <c:numRef>
+              <c:f>'CKD+ICDbyStage'!$C$1:$Q$1</c:f>
+              <c:numCache>
+                <c:formatCode>General</c:formatCode>
+                <c:ptCount val="15"/>
+                <c:pt idx="0">
+                  <c:v>2009</c:v>
+                </c:pt>
+                <c:pt idx="1">
+                  <c:v>2010</c:v>
+                </c:pt>
+                <c:pt idx="2">
+                  <c:v>2011</c:v>
+                </c:pt>
+                <c:pt idx="3">
+                  <c:v>2012</c:v>
+                </c:pt>
+                <c:pt idx="4">
+                  <c:v>2013</c:v>
+                </c:pt>
+                <c:pt idx="5">
+                  <c:v>2014</c:v>
+                </c:pt>
+                <c:pt idx="6">
+                  <c:v>2015</c:v>
+                </c:pt>
+                <c:pt idx="7">
+                  <c:v>2016</c:v>
+                </c:pt>
+                <c:pt idx="8">
+                  <c:v>2017</c:v>
+                </c:pt>
+                <c:pt idx="9">
+                  <c:v>2018</c:v>
+                </c:pt>
+                <c:pt idx="10">
+                  <c:v>2019</c:v>
+                </c:pt>
+                <c:pt idx="11">
+                  <c:v>2020</c:v>
+                </c:pt>
+                <c:pt idx="12">
+                  <c:v>2021</c:v>
+                </c:pt>
+                <c:pt idx="13">
+                  <c:v>2022</c:v>
+                </c:pt>
+                <c:pt idx="14">
+                  <c:v>2023</c:v>
+                </c:pt>
+              </c:numCache>
+            </c:numRef>
+          </c:cat>
+          <c:val>
+            <c:numRef>
+              <c:f>'CKD+ICDbyStage'!$C$8:$Q$8</c:f>
+              <c:numCache>
+                <c:formatCode>General</c:formatCode>
+                <c:ptCount val="15"/>
+                <c:pt idx="0">
+                  <c:v>81.16</c:v>
+                </c:pt>
+                <c:pt idx="1">
+                  <c:v>82.94</c:v>
+                </c:pt>
+                <c:pt idx="2">
+                  <c:v>81.84</c:v>
+                </c:pt>
+                <c:pt idx="3">
+                  <c:v>80.12</c:v>
+                </c:pt>
+                <c:pt idx="4">
+                  <c:v>81.400000000000006</c:v>
+                </c:pt>
+                <c:pt idx="5">
+                  <c:v>81.22</c:v>
+                </c:pt>
+                <c:pt idx="6">
+                  <c:v>83.2</c:v>
+                </c:pt>
+                <c:pt idx="7">
+                  <c:v>76.56</c:v>
+                </c:pt>
+                <c:pt idx="8">
+                  <c:v>77.83</c:v>
+                </c:pt>
+                <c:pt idx="9">
+                  <c:v>77.64</c:v>
+                </c:pt>
+                <c:pt idx="10">
+                  <c:v>78.11</c:v>
+                </c:pt>
+                <c:pt idx="11">
+                  <c:v>75.209999999999994</c:v>
+                </c:pt>
+                <c:pt idx="12">
+                  <c:v>78.33</c:v>
+                </c:pt>
+                <c:pt idx="13">
+                  <c:v>76.81</c:v>
+                </c:pt>
+                <c:pt idx="14">
+                  <c:v>75.290000000000006</c:v>
+                </c:pt>
+              </c:numCache>
+            </c:numRef>
+          </c:val>
+          <c:smooth val="0"/>
+          <c:extLst>
+            <c:ext xmlns:c16="http://schemas.microsoft.com/office/drawing/2014/chart" uri="{C3380CC4-5D6E-409C-BE32-E72D297353CC}">
+              <c16:uniqueId val="{00000002-32AF-404F-B120-39600E387D48}"/>
+            </c:ext>
+          </c:extLst>
+        </c:ser>
+        <c:ser>
+          <c:idx val="9"/>
+          <c:order val="8"/>
+          <c:tx>
+            <c:strRef>
+              <c:f>'CKD+ICDbyStage'!$B$11</c:f>
+              <c:strCache>
+                <c:ptCount val="1"/>
+                <c:pt idx="0">
+                  <c:v>CKD Stage 5</c:v>
+                </c:pt>
+              </c:strCache>
+            </c:strRef>
+          </c:tx>
+          <c:spPr>
+            <a:ln w="44450" cap="rnd">
+              <a:solidFill>
+                <a:srgbClr val="B7B7B7"/>
+              </a:solidFill>
+              <a:round/>
+            </a:ln>
+            <a:effectLst/>
+          </c:spPr>
+          <c:marker>
+            <c:symbol val="circle"/>
+            <c:size val="5"/>
+            <c:spPr>
+              <a:solidFill>
+                <a:srgbClr val="B7B7B7"/>
+              </a:solidFill>
+              <a:ln w="9525">
+                <a:solidFill>
+                  <a:srgbClr val="B7B7B7"/>
+                </a:solidFill>
+              </a:ln>
+              <a:effectLst/>
+            </c:spPr>
+          </c:marker>
+          <c:cat>
+            <c:numRef>
+              <c:f>'CKD+ICDbyStage'!$C$1:$Q$1</c:f>
+              <c:numCache>
+                <c:formatCode>General</c:formatCode>
+                <c:ptCount val="15"/>
+                <c:pt idx="0">
+                  <c:v>2009</c:v>
+                </c:pt>
+                <c:pt idx="1">
+                  <c:v>2010</c:v>
+                </c:pt>
+                <c:pt idx="2">
+                  <c:v>2011</c:v>
+                </c:pt>
+                <c:pt idx="3">
+                  <c:v>2012</c:v>
+                </c:pt>
+                <c:pt idx="4">
+                  <c:v>2013</c:v>
+                </c:pt>
+                <c:pt idx="5">
+                  <c:v>2014</c:v>
+                </c:pt>
+                <c:pt idx="6">
+                  <c:v>2015</c:v>
+                </c:pt>
+                <c:pt idx="7">
+                  <c:v>2016</c:v>
+                </c:pt>
+                <c:pt idx="8">
+                  <c:v>2017</c:v>
+                </c:pt>
+                <c:pt idx="9">
+                  <c:v>2018</c:v>
+                </c:pt>
+                <c:pt idx="10">
+                  <c:v>2019</c:v>
+                </c:pt>
+                <c:pt idx="11">
+                  <c:v>2020</c:v>
+                </c:pt>
+                <c:pt idx="12">
+                  <c:v>2021</c:v>
+                </c:pt>
+                <c:pt idx="13">
+                  <c:v>2022</c:v>
+                </c:pt>
+                <c:pt idx="14">
+                  <c:v>2023</c:v>
+                </c:pt>
+              </c:numCache>
+            </c:numRef>
+          </c:cat>
+          <c:val>
+            <c:numRef>
+              <c:f>'CKD+ICDbyStage'!$C$11:$Q$11</c:f>
+              <c:numCache>
+                <c:formatCode>General</c:formatCode>
+                <c:ptCount val="15"/>
+                <c:pt idx="0">
+                  <c:v>90.31</c:v>
+                </c:pt>
+                <c:pt idx="1">
+                  <c:v>90.45</c:v>
+                </c:pt>
+                <c:pt idx="2">
+                  <c:v>91.29</c:v>
+                </c:pt>
+                <c:pt idx="3">
+                  <c:v>91.01</c:v>
+                </c:pt>
+                <c:pt idx="4">
+                  <c:v>92</c:v>
+                </c:pt>
+                <c:pt idx="5">
+                  <c:v>93.22</c:v>
+                </c:pt>
+                <c:pt idx="6">
+                  <c:v>89.72</c:v>
+                </c:pt>
+                <c:pt idx="7">
+                  <c:v>78.45</c:v>
+                </c:pt>
+                <c:pt idx="8">
+                  <c:v>82.09</c:v>
+                </c:pt>
+                <c:pt idx="9">
+                  <c:v>80.599999999999994</c:v>
+                </c:pt>
+                <c:pt idx="10">
+                  <c:v>81.48</c:v>
+                </c:pt>
+                <c:pt idx="11">
+                  <c:v>77.430000000000007</c:v>
+                </c:pt>
+                <c:pt idx="12">
+                  <c:v>74.86</c:v>
+                </c:pt>
+                <c:pt idx="13">
+                  <c:v>73.790000000000006</c:v>
+                </c:pt>
+                <c:pt idx="14">
+                  <c:v>76.180000000000007</c:v>
+                </c:pt>
+              </c:numCache>
+            </c:numRef>
+          </c:val>
+          <c:smooth val="0"/>
+          <c:extLst>
+            <c:ext xmlns:c16="http://schemas.microsoft.com/office/drawing/2014/chart" uri="{C3380CC4-5D6E-409C-BE32-E72D297353CC}">
+              <c16:uniqueId val="{00000003-32AF-404F-B120-39600E387D48}"/>
+            </c:ext>
+          </c:extLst>
+        </c:ser>
+        <c:ser>
+          <c:idx val="0"/>
+          <c:order val="14"/>
+          <c:tx>
+            <c:strRef>
+              <c:f>'CKD+ICDbyStage'!$B$2</c:f>
+              <c:strCache>
+                <c:ptCount val="1"/>
+                <c:pt idx="0">
+                  <c:v>Overall</c:v>
+                </c:pt>
+              </c:strCache>
+              <c:extLst xmlns:c15="http://schemas.microsoft.com/office/drawing/2012/chart"/>
+            </c:strRef>
+          </c:tx>
+          <c:spPr>
+            <a:ln w="44450" cap="rnd">
+              <a:solidFill>
+                <a:schemeClr val="tx1"/>
+              </a:solidFill>
+              <a:prstDash val="sysDash"/>
+              <a:round/>
+            </a:ln>
+            <a:effectLst/>
+          </c:spPr>
+          <c:marker>
+            <c:symbol val="circle"/>
+            <c:size val="5"/>
+            <c:spPr>
+              <a:solidFill>
+                <a:schemeClr val="tx1"/>
+              </a:solidFill>
+              <a:ln w="9525">
+                <a:solidFill>
+                  <a:schemeClr val="tx1"/>
+                </a:solidFill>
+              </a:ln>
+              <a:effectLst/>
+            </c:spPr>
+          </c:marker>
+          <c:cat>
+            <c:numRef>
+              <c:f>'CKD+ICDbyStage'!$C$1:$Q$1</c:f>
+              <c:numCache>
+                <c:formatCode>General</c:formatCode>
+                <c:ptCount val="15"/>
+                <c:pt idx="0">
+                  <c:v>2009</c:v>
+                </c:pt>
+                <c:pt idx="1">
+                  <c:v>2010</c:v>
+                </c:pt>
+                <c:pt idx="2">
+                  <c:v>2011</c:v>
+                </c:pt>
+                <c:pt idx="3">
+                  <c:v>2012</c:v>
+                </c:pt>
+                <c:pt idx="4">
+                  <c:v>2013</c:v>
+                </c:pt>
+                <c:pt idx="5">
+                  <c:v>2014</c:v>
+                </c:pt>
+                <c:pt idx="6">
+                  <c:v>2015</c:v>
+                </c:pt>
+                <c:pt idx="7">
+                  <c:v>2016</c:v>
+                </c:pt>
+                <c:pt idx="8">
+                  <c:v>2017</c:v>
+                </c:pt>
+                <c:pt idx="9">
+                  <c:v>2018</c:v>
+                </c:pt>
+                <c:pt idx="10">
+                  <c:v>2019</c:v>
+                </c:pt>
+                <c:pt idx="11">
+                  <c:v>2020</c:v>
+                </c:pt>
+                <c:pt idx="12">
+                  <c:v>2021</c:v>
+                </c:pt>
+                <c:pt idx="13">
+                  <c:v>2022</c:v>
+                </c:pt>
+                <c:pt idx="14">
+                  <c:v>2023</c:v>
+                </c:pt>
+              </c:numCache>
+              <c:extLst xmlns:c15="http://schemas.microsoft.com/office/drawing/2012/chart"/>
+            </c:numRef>
+          </c:cat>
+          <c:val>
+            <c:numRef>
+              <c:f>'CKD+ICDbyStage'!$C$2:$Q$2</c:f>
+              <c:numCache>
+                <c:formatCode>General</c:formatCode>
+                <c:ptCount val="15"/>
+                <c:pt idx="0">
+                  <c:v>31.92</c:v>
+                </c:pt>
+                <c:pt idx="1">
+                  <c:v>33.619999999999997</c:v>
+                </c:pt>
+                <c:pt idx="2">
+                  <c:v>36.68</c:v>
+                </c:pt>
+                <c:pt idx="3">
+                  <c:v>37.28</c:v>
+                </c:pt>
+                <c:pt idx="4">
+                  <c:v>38.19</c:v>
+                </c:pt>
+                <c:pt idx="5">
+                  <c:v>38.57</c:v>
+                </c:pt>
+                <c:pt idx="6">
+                  <c:v>39.729999999999997</c:v>
+                </c:pt>
+                <c:pt idx="7">
+                  <c:v>31.7</c:v>
+                </c:pt>
+                <c:pt idx="8">
+                  <c:v>31.95</c:v>
+                </c:pt>
+                <c:pt idx="9">
+                  <c:v>32.22</c:v>
+                </c:pt>
+                <c:pt idx="10">
+                  <c:v>32.020000000000003</c:v>
+                </c:pt>
+                <c:pt idx="11">
+                  <c:v>30.05</c:v>
+                </c:pt>
+                <c:pt idx="12">
+                  <c:v>36.04</c:v>
+                </c:pt>
+                <c:pt idx="13">
+                  <c:v>35.340000000000003</c:v>
+                </c:pt>
+                <c:pt idx="14">
+                  <c:v>35.15</c:v>
+                </c:pt>
+              </c:numCache>
+              <c:extLst xmlns:c15="http://schemas.microsoft.com/office/drawing/2012/chart"/>
+            </c:numRef>
+          </c:val>
+          <c:smooth val="0"/>
+          <c:extLst xmlns:c15="http://schemas.microsoft.com/office/drawing/2012/chart">
+            <c:ext xmlns:c16="http://schemas.microsoft.com/office/drawing/2014/chart" uri="{C3380CC4-5D6E-409C-BE32-E72D297353CC}">
+              <c16:uniqueId val="{00000000-32AF-404F-B120-39600E387D48}"/>
+            </c:ext>
+          </c:extLst>
+        </c:ser>
+        <c:dLbls>
+          <c:showLegendKey val="0"/>
+          <c:showVal val="0"/>
+          <c:showCatName val="0"/>
+          <c:showSerName val="0"/>
+          <c:showPercent val="0"/>
+          <c:showBubbleSize val="0"/>
+        </c:dLbls>
+        <c:marker val="1"/>
+        <c:smooth val="0"/>
+        <c:axId val="1440548959"/>
+        <c:axId val="1440549919"/>
+        <c:extLst>
+          <c:ext xmlns:c15="http://schemas.microsoft.com/office/drawing/2012/chart" uri="{02D57815-91ED-43cb-92C2-25804820EDAC}">
+            <c15:filteredLineSeries>
+              <c15:ser>
+                <c:idx val="1"/>
+                <c:order val="0"/>
+                <c:tx>
+                  <c:strRef>
+                    <c:extLst>
+                      <c:ext uri="{02D57815-91ED-43cb-92C2-25804820EDAC}">
+                        <c15:formulaRef>
+                          <c15:sqref>'CKD+ICDbyStage'!$B$3</c15:sqref>
+                        </c15:formulaRef>
+                      </c:ext>
+                    </c:extLst>
+                    <c:strCache>
+                      <c:ptCount val="1"/>
+                      <c:pt idx="0">
+                        <c:v>Overall</c:v>
+                      </c:pt>
+                    </c:strCache>
+                  </c:strRef>
+                </c:tx>
+                <c:spPr>
+                  <a:ln w="28575" cap="rnd">
+                    <a:solidFill>
+                      <a:schemeClr val="accent2"/>
+                    </a:solidFill>
+                    <a:round/>
+                  </a:ln>
+                  <a:effectLst/>
+                </c:spPr>
+                <c:marker>
+                  <c:symbol val="none"/>
+                </c:marker>
+                <c:cat>
+                  <c:numRef>
+                    <c:extLst>
+                      <c:ext uri="{02D57815-91ED-43cb-92C2-25804820EDAC}">
+                        <c15:formulaRef>
+                          <c15:sqref>'CKD+ICDbyStage'!$C$1:$Q$1</c15:sqref>
+                        </c15:formulaRef>
+                      </c:ext>
+                    </c:extLst>
+                    <c:numCache>
+                      <c:formatCode>General</c:formatCode>
+                      <c:ptCount val="15"/>
+                      <c:pt idx="0">
+                        <c:v>2009</c:v>
+                      </c:pt>
+                      <c:pt idx="1">
+                        <c:v>2010</c:v>
+                      </c:pt>
+                      <c:pt idx="2">
+                        <c:v>2011</c:v>
+                      </c:pt>
+                      <c:pt idx="3">
+                        <c:v>2012</c:v>
+                      </c:pt>
+                      <c:pt idx="4">
+                        <c:v>2013</c:v>
+                      </c:pt>
+                      <c:pt idx="5">
+                        <c:v>2014</c:v>
+                      </c:pt>
+                      <c:pt idx="6">
+                        <c:v>2015</c:v>
+                      </c:pt>
+                      <c:pt idx="7">
+                        <c:v>2016</c:v>
+                      </c:pt>
+                      <c:pt idx="8">
+                        <c:v>2017</c:v>
+                      </c:pt>
+                      <c:pt idx="9">
+                        <c:v>2018</c:v>
+                      </c:pt>
+                      <c:pt idx="10">
+                        <c:v>2019</c:v>
+                      </c:pt>
+                      <c:pt idx="11">
+                        <c:v>2020</c:v>
+                      </c:pt>
+                      <c:pt idx="12">
+                        <c:v>2021</c:v>
+                      </c:pt>
+                      <c:pt idx="13">
+                        <c:v>2022</c:v>
+                      </c:pt>
+                      <c:pt idx="14">
+                        <c:v>2023</c:v>
+                      </c:pt>
+                    </c:numCache>
+                  </c:numRef>
+                </c:cat>
+                <c:val>
+                  <c:numRef>
+                    <c:extLst>
+                      <c:ext uri="{02D57815-91ED-43cb-92C2-25804820EDAC}">
+                        <c15:formulaRef>
+                          <c15:sqref>'CKD+ICDbyStage'!$C$3:$Q$3</c15:sqref>
+                        </c15:formulaRef>
+                      </c:ext>
+                    </c:extLst>
+                    <c:numCache>
+                      <c:formatCode>General</c:formatCode>
+                      <c:ptCount val="15"/>
+                      <c:pt idx="0">
+                        <c:v>18447</c:v>
+                      </c:pt>
+                      <c:pt idx="1">
+                        <c:v>18713</c:v>
+                      </c:pt>
+                      <c:pt idx="2">
+                        <c:v>19036</c:v>
+                      </c:pt>
+                      <c:pt idx="3">
+                        <c:v>19740</c:v>
+                      </c:pt>
+                      <c:pt idx="4">
+                        <c:v>19145</c:v>
+                      </c:pt>
+                      <c:pt idx="5">
+                        <c:v>18947</c:v>
+                      </c:pt>
+                      <c:pt idx="6">
+                        <c:v>18952</c:v>
+                      </c:pt>
+                      <c:pt idx="7">
+                        <c:v>15875</c:v>
+                      </c:pt>
+                      <c:pt idx="8">
+                        <c:v>17097</c:v>
+                      </c:pt>
+                      <c:pt idx="9">
+                        <c:v>16220</c:v>
+                      </c:pt>
+                      <c:pt idx="10">
+                        <c:v>16064</c:v>
+                      </c:pt>
+                      <c:pt idx="11">
+                        <c:v>14683</c:v>
+                      </c:pt>
+                      <c:pt idx="12">
+                        <c:v>17271</c:v>
+                      </c:pt>
+                      <c:pt idx="13">
+                        <c:v>15748</c:v>
+                      </c:pt>
+                      <c:pt idx="14">
+                        <c:v>14444</c:v>
+                      </c:pt>
+                    </c:numCache>
+                  </c:numRef>
+                </c:val>
+                <c:smooth val="0"/>
+                <c:extLst>
+                  <c:ext xmlns:c16="http://schemas.microsoft.com/office/drawing/2014/chart" uri="{C3380CC4-5D6E-409C-BE32-E72D297353CC}">
+                    <c16:uniqueId val="{00000004-32AF-404F-B120-39600E387D48}"/>
+                  </c:ext>
+                </c:extLst>
+              </c15:ser>
+            </c15:filteredLineSeries>
+            <c15:filteredLineSeries>
+              <c15:ser>
+                <c:idx val="2"/>
+                <c:order val="1"/>
+                <c:tx>
+                  <c:strRef>
+                    <c:extLst xmlns:c15="http://schemas.microsoft.com/office/drawing/2012/chart">
+                      <c:ext xmlns:c15="http://schemas.microsoft.com/office/drawing/2012/chart" uri="{02D57815-91ED-43cb-92C2-25804820EDAC}">
+                        <c15:formulaRef>
+                          <c15:sqref>'CKD+ICDbyStage'!$B$4</c15:sqref>
+                        </c15:formulaRef>
+                      </c:ext>
+                    </c:extLst>
+                    <c:strCache>
+                      <c:ptCount val="1"/>
+                      <c:pt idx="0">
+                        <c:v>Overall</c:v>
+                      </c:pt>
+                    </c:strCache>
+                  </c:strRef>
+                </c:tx>
+                <c:spPr>
+                  <a:ln w="28575" cap="rnd">
+                    <a:solidFill>
+                      <a:schemeClr val="accent3"/>
+                    </a:solidFill>
+                    <a:round/>
+                  </a:ln>
+                  <a:effectLst/>
+                </c:spPr>
+                <c:marker>
+                  <c:symbol val="none"/>
+                </c:marker>
+                <c:cat>
+                  <c:numRef>
+                    <c:extLst xmlns:c15="http://schemas.microsoft.com/office/drawing/2012/chart">
+                      <c:ext xmlns:c15="http://schemas.microsoft.com/office/drawing/2012/chart" uri="{02D57815-91ED-43cb-92C2-25804820EDAC}">
+                        <c15:formulaRef>
+                          <c15:sqref>'CKD+ICDbyStage'!$C$1:$Q$1</c15:sqref>
+                        </c15:formulaRef>
+                      </c:ext>
+                    </c:extLst>
+                    <c:numCache>
+                      <c:formatCode>General</c:formatCode>
+                      <c:ptCount val="15"/>
+                      <c:pt idx="0">
+                        <c:v>2009</c:v>
+                      </c:pt>
+                      <c:pt idx="1">
+                        <c:v>2010</c:v>
+                      </c:pt>
+                      <c:pt idx="2">
+                        <c:v>2011</c:v>
+                      </c:pt>
+                      <c:pt idx="3">
+                        <c:v>2012</c:v>
+                      </c:pt>
+                      <c:pt idx="4">
+                        <c:v>2013</c:v>
+                      </c:pt>
+                      <c:pt idx="5">
+                        <c:v>2014</c:v>
+                      </c:pt>
+                      <c:pt idx="6">
+                        <c:v>2015</c:v>
+                      </c:pt>
+                      <c:pt idx="7">
+                        <c:v>2016</c:v>
+                      </c:pt>
+                      <c:pt idx="8">
+                        <c:v>2017</c:v>
+                      </c:pt>
+                      <c:pt idx="9">
+                        <c:v>2018</c:v>
+                      </c:pt>
+                      <c:pt idx="10">
+                        <c:v>2019</c:v>
+                      </c:pt>
+                      <c:pt idx="11">
+                        <c:v>2020</c:v>
+                      </c:pt>
+                      <c:pt idx="12">
+                        <c:v>2021</c:v>
+                      </c:pt>
+                      <c:pt idx="13">
+                        <c:v>2022</c:v>
+                      </c:pt>
+                      <c:pt idx="14">
+                        <c:v>2023</c:v>
+                      </c:pt>
+                    </c:numCache>
+                  </c:numRef>
+                </c:cat>
+                <c:val>
+                  <c:numRef>
+                    <c:extLst xmlns:c15="http://schemas.microsoft.com/office/drawing/2012/chart">
+                      <c:ext xmlns:c15="http://schemas.microsoft.com/office/drawing/2012/chart" uri="{02D57815-91ED-43cb-92C2-25804820EDAC}">
+                        <c15:formulaRef>
+                          <c15:sqref>'CKD+ICDbyStage'!$C$4:$Q$4</c15:sqref>
+                        </c15:formulaRef>
+                      </c:ext>
+                    </c:extLst>
+                    <c:numCache>
+                      <c:formatCode>General</c:formatCode>
+                      <c:ptCount val="15"/>
+                      <c:pt idx="0">
+                        <c:v>57797</c:v>
+                      </c:pt>
+                      <c:pt idx="1">
+                        <c:v>55667</c:v>
+                      </c:pt>
+                      <c:pt idx="2">
+                        <c:v>51900</c:v>
+                      </c:pt>
+                      <c:pt idx="3">
+                        <c:v>52948</c:v>
+                      </c:pt>
+                      <c:pt idx="4">
+                        <c:v>50135</c:v>
+                      </c:pt>
+                      <c:pt idx="5">
+                        <c:v>49129</c:v>
+                      </c:pt>
+                      <c:pt idx="6">
+                        <c:v>47698</c:v>
+                      </c:pt>
+                      <c:pt idx="7">
+                        <c:v>50074</c:v>
+                      </c:pt>
+                      <c:pt idx="8">
+                        <c:v>53518</c:v>
+                      </c:pt>
+                      <c:pt idx="9">
+                        <c:v>50341</c:v>
+                      </c:pt>
+                      <c:pt idx="10">
+                        <c:v>50173</c:v>
+                      </c:pt>
+                      <c:pt idx="11">
+                        <c:v>48864</c:v>
+                      </c:pt>
+                      <c:pt idx="12">
+                        <c:v>47920</c:v>
+                      </c:pt>
+                      <c:pt idx="13">
+                        <c:v>44558</c:v>
+                      </c:pt>
+                      <c:pt idx="14">
+                        <c:v>41097</c:v>
+                      </c:pt>
+                    </c:numCache>
+                  </c:numRef>
+                </c:val>
+                <c:smooth val="0"/>
+                <c:extLst xmlns:c15="http://schemas.microsoft.com/office/drawing/2012/chart">
+                  <c:ext xmlns:c16="http://schemas.microsoft.com/office/drawing/2014/chart" uri="{C3380CC4-5D6E-409C-BE32-E72D297353CC}">
+                    <c16:uniqueId val="{00000005-32AF-404F-B120-39600E387D48}"/>
+                  </c:ext>
+                </c:extLst>
+              </c15:ser>
+            </c15:filteredLineSeries>
+            <c15:filteredLineSeries>
+              <c15:ser>
+                <c:idx val="4"/>
+                <c:order val="3"/>
+                <c:tx>
+                  <c:strRef>
+                    <c:extLst xmlns:c15="http://schemas.microsoft.com/office/drawing/2012/chart">
+                      <c:ext xmlns:c15="http://schemas.microsoft.com/office/drawing/2012/chart" uri="{02D57815-91ED-43cb-92C2-25804820EDAC}">
+                        <c15:formulaRef>
+                          <c15:sqref>'CKD+ICDbyStage'!$B$6</c15:sqref>
+                        </c15:formulaRef>
+                      </c:ext>
+                    </c:extLst>
+                    <c:strCache>
+                      <c:ptCount val="1"/>
+                      <c:pt idx="0">
+                        <c:v>CKD Stage 3</c:v>
+                      </c:pt>
+                    </c:strCache>
+                  </c:strRef>
+                </c:tx>
+                <c:spPr>
+                  <a:ln w="28575" cap="rnd">
+                    <a:solidFill>
+                      <a:schemeClr val="accent5"/>
+                    </a:solidFill>
+                    <a:round/>
+                  </a:ln>
+                  <a:effectLst/>
+                </c:spPr>
+                <c:marker>
+                  <c:symbol val="none"/>
+                </c:marker>
+                <c:cat>
+                  <c:numRef>
+                    <c:extLst xmlns:c15="http://schemas.microsoft.com/office/drawing/2012/chart">
+                      <c:ext xmlns:c15="http://schemas.microsoft.com/office/drawing/2012/chart" uri="{02D57815-91ED-43cb-92C2-25804820EDAC}">
+                        <c15:formulaRef>
+                          <c15:sqref>'CKD+ICDbyStage'!$C$1:$Q$1</c15:sqref>
+                        </c15:formulaRef>
+                      </c:ext>
+                    </c:extLst>
+                    <c:numCache>
+                      <c:formatCode>General</c:formatCode>
+                      <c:ptCount val="15"/>
+                      <c:pt idx="0">
+                        <c:v>2009</c:v>
+                      </c:pt>
+                      <c:pt idx="1">
+                        <c:v>2010</c:v>
+                      </c:pt>
+                      <c:pt idx="2">
+                        <c:v>2011</c:v>
+                      </c:pt>
+                      <c:pt idx="3">
+                        <c:v>2012</c:v>
+                      </c:pt>
+                      <c:pt idx="4">
+                        <c:v>2013</c:v>
+                      </c:pt>
+                      <c:pt idx="5">
+                        <c:v>2014</c:v>
+                      </c:pt>
+                      <c:pt idx="6">
+                        <c:v>2015</c:v>
+                      </c:pt>
+                      <c:pt idx="7">
+                        <c:v>2016</c:v>
+                      </c:pt>
+                      <c:pt idx="8">
+                        <c:v>2017</c:v>
+                      </c:pt>
+                      <c:pt idx="9">
+                        <c:v>2018</c:v>
+                      </c:pt>
+                      <c:pt idx="10">
+                        <c:v>2019</c:v>
+                      </c:pt>
+                      <c:pt idx="11">
+                        <c:v>2020</c:v>
+                      </c:pt>
+                      <c:pt idx="12">
+                        <c:v>2021</c:v>
+                      </c:pt>
+                      <c:pt idx="13">
+                        <c:v>2022</c:v>
+                      </c:pt>
+                      <c:pt idx="14">
+                        <c:v>2023</c:v>
+                      </c:pt>
+                    </c:numCache>
+                  </c:numRef>
+                </c:cat>
+                <c:val>
+                  <c:numRef>
+                    <c:extLst xmlns:c15="http://schemas.microsoft.com/office/drawing/2012/chart">
+                      <c:ext xmlns:c15="http://schemas.microsoft.com/office/drawing/2012/chart" uri="{02D57815-91ED-43cb-92C2-25804820EDAC}">
+                        <c15:formulaRef>
+                          <c15:sqref>'CKD+ICDbyStage'!$C$6:$Q$6</c15:sqref>
+                        </c15:formulaRef>
+                      </c:ext>
+                    </c:extLst>
+                    <c:numCache>
+                      <c:formatCode>General</c:formatCode>
+                      <c:ptCount val="15"/>
+                      <c:pt idx="0">
+                        <c:v>15364</c:v>
+                      </c:pt>
+                      <c:pt idx="1">
+                        <c:v>15588</c:v>
+                      </c:pt>
+                      <c:pt idx="2">
+                        <c:v>16016</c:v>
+                      </c:pt>
+                      <c:pt idx="3">
+                        <c:v>16722</c:v>
+                      </c:pt>
+                      <c:pt idx="4">
+                        <c:v>16112</c:v>
+                      </c:pt>
+                      <c:pt idx="5">
+                        <c:v>15915</c:v>
+                      </c:pt>
+                      <c:pt idx="6">
+                        <c:v>15764</c:v>
+                      </c:pt>
+                      <c:pt idx="7">
+                        <c:v>13278</c:v>
+                      </c:pt>
+                      <c:pt idx="8">
+                        <c:v>14316</c:v>
+                      </c:pt>
+                      <c:pt idx="9">
+                        <c:v>13566</c:v>
+                      </c:pt>
+                      <c:pt idx="10">
+                        <c:v>13426</c:v>
+                      </c:pt>
+                      <c:pt idx="11">
+                        <c:v>12079</c:v>
+                      </c:pt>
+                      <c:pt idx="12">
+                        <c:v>14561</c:v>
+                      </c:pt>
+                      <c:pt idx="13">
+                        <c:v>13271</c:v>
+                      </c:pt>
+                      <c:pt idx="14">
+                        <c:v>12169</c:v>
+                      </c:pt>
+                    </c:numCache>
+                  </c:numRef>
+                </c:val>
+                <c:smooth val="0"/>
+                <c:extLst xmlns:c15="http://schemas.microsoft.com/office/drawing/2012/chart">
+                  <c:ext xmlns:c16="http://schemas.microsoft.com/office/drawing/2014/chart" uri="{C3380CC4-5D6E-409C-BE32-E72D297353CC}">
+                    <c16:uniqueId val="{00000006-32AF-404F-B120-39600E387D48}"/>
+                  </c:ext>
+                </c:extLst>
+              </c15:ser>
+            </c15:filteredLineSeries>
+            <c15:filteredLineSeries>
+              <c15:ser>
+                <c:idx val="5"/>
+                <c:order val="4"/>
+                <c:tx>
+                  <c:strRef>
+                    <c:extLst xmlns:c15="http://schemas.microsoft.com/office/drawing/2012/chart">
+                      <c:ext xmlns:c15="http://schemas.microsoft.com/office/drawing/2012/chart" uri="{02D57815-91ED-43cb-92C2-25804820EDAC}">
+                        <c15:formulaRef>
+                          <c15:sqref>'CKD+ICDbyStage'!$B$7</c15:sqref>
+                        </c15:formulaRef>
+                      </c:ext>
+                    </c:extLst>
+                    <c:strCache>
+                      <c:ptCount val="1"/>
+                      <c:pt idx="0">
+                        <c:v>CKD Stage 3</c:v>
+                      </c:pt>
+                    </c:strCache>
+                  </c:strRef>
+                </c:tx>
+                <c:spPr>
+                  <a:ln w="28575" cap="rnd">
+                    <a:solidFill>
+                      <a:schemeClr val="accent6"/>
+                    </a:solidFill>
+                    <a:round/>
+                  </a:ln>
+                  <a:effectLst/>
+                </c:spPr>
+                <c:marker>
+                  <c:symbol val="none"/>
+                </c:marker>
+                <c:cat>
+                  <c:numRef>
+                    <c:extLst xmlns:c15="http://schemas.microsoft.com/office/drawing/2012/chart">
+                      <c:ext xmlns:c15="http://schemas.microsoft.com/office/drawing/2012/chart" uri="{02D57815-91ED-43cb-92C2-25804820EDAC}">
+                        <c15:formulaRef>
+                          <c15:sqref>'CKD+ICDbyStage'!$C$1:$Q$1</c15:sqref>
+                        </c15:formulaRef>
+                      </c:ext>
+                    </c:extLst>
+                    <c:numCache>
+                      <c:formatCode>General</c:formatCode>
+                      <c:ptCount val="15"/>
+                      <c:pt idx="0">
+                        <c:v>2009</c:v>
+                      </c:pt>
+                      <c:pt idx="1">
+                        <c:v>2010</c:v>
+                      </c:pt>
+                      <c:pt idx="2">
+                        <c:v>2011</c:v>
+                      </c:pt>
+                      <c:pt idx="3">
+                        <c:v>2012</c:v>
+                      </c:pt>
+                      <c:pt idx="4">
+                        <c:v>2013</c:v>
+                      </c:pt>
+                      <c:pt idx="5">
+                        <c:v>2014</c:v>
+                      </c:pt>
+                      <c:pt idx="6">
+                        <c:v>2015</c:v>
+                      </c:pt>
+                      <c:pt idx="7">
+                        <c:v>2016</c:v>
+                      </c:pt>
+                      <c:pt idx="8">
+                        <c:v>2017</c:v>
+                      </c:pt>
+                      <c:pt idx="9">
+                        <c:v>2018</c:v>
+                      </c:pt>
+                      <c:pt idx="10">
+                        <c:v>2019</c:v>
+                      </c:pt>
+                      <c:pt idx="11">
+                        <c:v>2020</c:v>
+                      </c:pt>
+                      <c:pt idx="12">
+                        <c:v>2021</c:v>
+                      </c:pt>
+                      <c:pt idx="13">
+                        <c:v>2022</c:v>
+                      </c:pt>
+                      <c:pt idx="14">
+                        <c:v>2023</c:v>
+                      </c:pt>
+                    </c:numCache>
+                  </c:numRef>
+                </c:cat>
+                <c:val>
+                  <c:numRef>
+                    <c:extLst xmlns:c15="http://schemas.microsoft.com/office/drawing/2012/chart">
+                      <c:ext xmlns:c15="http://schemas.microsoft.com/office/drawing/2012/chart" uri="{02D57815-91ED-43cb-92C2-25804820EDAC}">
+                        <c15:formulaRef>
+                          <c15:sqref>'CKD+ICDbyStage'!$C$7:$Q$7</c15:sqref>
+                        </c15:formulaRef>
+                      </c:ext>
+                    </c:extLst>
+                    <c:numCache>
+                      <c:formatCode>General</c:formatCode>
+                      <c:ptCount val="15"/>
+                      <c:pt idx="0">
+                        <c:v>54088</c:v>
+                      </c:pt>
+                      <c:pt idx="1">
+                        <c:v>51972</c:v>
+                      </c:pt>
+                      <c:pt idx="2">
+                        <c:v>48308</c:v>
+                      </c:pt>
+                      <c:pt idx="3">
+                        <c:v>49299</c:v>
+                      </c:pt>
+                      <c:pt idx="4">
+                        <c:v>46528</c:v>
+                      </c:pt>
+                      <c:pt idx="5">
+                        <c:v>45540</c:v>
+                      </c:pt>
+                      <c:pt idx="6">
+                        <c:v>43944</c:v>
+                      </c:pt>
+                      <c:pt idx="7">
+                        <c:v>46695</c:v>
+                      </c:pt>
+                      <c:pt idx="8">
+                        <c:v>49974</c:v>
+                      </c:pt>
+                      <c:pt idx="9">
+                        <c:v>46943</c:v>
+                      </c:pt>
+                      <c:pt idx="10">
+                        <c:v>46818</c:v>
+                      </c:pt>
+                      <c:pt idx="11">
+                        <c:v>45417</c:v>
+                      </c:pt>
+                      <c:pt idx="12">
+                        <c:v>44436</c:v>
+                      </c:pt>
+                      <c:pt idx="13">
+                        <c:v>41313</c:v>
+                      </c:pt>
+                      <c:pt idx="14">
+                        <c:v>38081</c:v>
+                      </c:pt>
+                    </c:numCache>
+                  </c:numRef>
+                </c:val>
+                <c:smooth val="0"/>
+                <c:extLst xmlns:c15="http://schemas.microsoft.com/office/drawing/2012/chart">
+                  <c:ext xmlns:c16="http://schemas.microsoft.com/office/drawing/2014/chart" uri="{C3380CC4-5D6E-409C-BE32-E72D297353CC}">
+                    <c16:uniqueId val="{00000007-32AF-404F-B120-39600E387D48}"/>
+                  </c:ext>
+                </c:extLst>
+              </c15:ser>
+            </c15:filteredLineSeries>
+            <c15:filteredLineSeries>
+              <c15:ser>
+                <c:idx val="7"/>
+                <c:order val="6"/>
+                <c:tx>
+                  <c:strRef>
+                    <c:extLst xmlns:c15="http://schemas.microsoft.com/office/drawing/2012/chart">
+                      <c:ext xmlns:c15="http://schemas.microsoft.com/office/drawing/2012/chart" uri="{02D57815-91ED-43cb-92C2-25804820EDAC}">
+                        <c15:formulaRef>
+                          <c15:sqref>'CKD+ICDbyStage'!$B$9</c15:sqref>
+                        </c15:formulaRef>
+                      </c:ext>
+                    </c:extLst>
+                    <c:strCache>
+                      <c:ptCount val="1"/>
+                      <c:pt idx="0">
+                        <c:v>CKD Stage 4</c:v>
+                      </c:pt>
+                    </c:strCache>
+                  </c:strRef>
+                </c:tx>
+                <c:spPr>
+                  <a:ln w="28575" cap="rnd">
+                    <a:solidFill>
+                      <a:schemeClr val="accent2">
+                        <a:lumMod val="60000"/>
+                      </a:schemeClr>
+                    </a:solidFill>
+                    <a:round/>
+                  </a:ln>
+                  <a:effectLst/>
+                </c:spPr>
+                <c:marker>
+                  <c:symbol val="none"/>
+                </c:marker>
+                <c:cat>
+                  <c:numRef>
+                    <c:extLst xmlns:c15="http://schemas.microsoft.com/office/drawing/2012/chart">
+                      <c:ext xmlns:c15="http://schemas.microsoft.com/office/drawing/2012/chart" uri="{02D57815-91ED-43cb-92C2-25804820EDAC}">
+                        <c15:formulaRef>
+                          <c15:sqref>'CKD+ICDbyStage'!$C$1:$Q$1</c15:sqref>
+                        </c15:formulaRef>
+                      </c:ext>
+                    </c:extLst>
+                    <c:numCache>
+                      <c:formatCode>General</c:formatCode>
+                      <c:ptCount val="15"/>
+                      <c:pt idx="0">
+                        <c:v>2009</c:v>
+                      </c:pt>
+                      <c:pt idx="1">
+                        <c:v>2010</c:v>
+                      </c:pt>
+                      <c:pt idx="2">
+                        <c:v>2011</c:v>
+                      </c:pt>
+                      <c:pt idx="3">
+                        <c:v>2012</c:v>
+                      </c:pt>
+                      <c:pt idx="4">
+                        <c:v>2013</c:v>
+                      </c:pt>
+                      <c:pt idx="5">
+                        <c:v>2014</c:v>
+                      </c:pt>
+                      <c:pt idx="6">
+                        <c:v>2015</c:v>
+                      </c:pt>
+                      <c:pt idx="7">
+                        <c:v>2016</c:v>
+                      </c:pt>
+                      <c:pt idx="8">
+                        <c:v>2017</c:v>
+                      </c:pt>
+                      <c:pt idx="9">
+                        <c:v>2018</c:v>
+                      </c:pt>
+                      <c:pt idx="10">
+                        <c:v>2019</c:v>
+                      </c:pt>
+                      <c:pt idx="11">
+                        <c:v>2020</c:v>
+                      </c:pt>
+                      <c:pt idx="12">
+                        <c:v>2021</c:v>
+                      </c:pt>
+                      <c:pt idx="13">
+                        <c:v>2022</c:v>
+                      </c:pt>
+                      <c:pt idx="14">
+                        <c:v>2023</c:v>
+                      </c:pt>
+                    </c:numCache>
+                  </c:numRef>
+                </c:cat>
+                <c:val>
+                  <c:numRef>
+                    <c:extLst xmlns:c15="http://schemas.microsoft.com/office/drawing/2012/chart">
+                      <c:ext xmlns:c15="http://schemas.microsoft.com/office/drawing/2012/chart" uri="{02D57815-91ED-43cb-92C2-25804820EDAC}">
+                        <c15:formulaRef>
+                          <c15:sqref>'CKD+ICDbyStage'!$C$9:$Q$9</c15:sqref>
+                        </c15:formulaRef>
+                      </c:ext>
+                    </c:extLst>
+                    <c:numCache>
+                      <c:formatCode>General</c:formatCode>
+                      <c:ptCount val="15"/>
+                      <c:pt idx="0">
+                        <c:v>2365</c:v>
+                      </c:pt>
+                      <c:pt idx="1">
+                        <c:v>2396</c:v>
+                      </c:pt>
+                      <c:pt idx="2">
+                        <c:v>2244</c:v>
+                      </c:pt>
+                      <c:pt idx="3">
+                        <c:v>2228</c:v>
+                      </c:pt>
+                      <c:pt idx="4">
+                        <c:v>2193</c:v>
+                      </c:pt>
+                      <c:pt idx="5">
+                        <c:v>2124</c:v>
+                      </c:pt>
+                      <c:pt idx="6">
+                        <c:v>2298</c:v>
+                      </c:pt>
+                      <c:pt idx="7">
+                        <c:v>2182</c:v>
+                      </c:pt>
+                      <c:pt idx="8">
+                        <c:v>2341</c:v>
+                      </c:pt>
+                      <c:pt idx="9">
+                        <c:v>2226</c:v>
+                      </c:pt>
+                      <c:pt idx="10">
+                        <c:v>2220</c:v>
+                      </c:pt>
+                      <c:pt idx="11">
+                        <c:v>2206</c:v>
+                      </c:pt>
+                      <c:pt idx="12">
+                        <c:v>2299</c:v>
+                      </c:pt>
+                      <c:pt idx="13">
+                        <c:v>2097</c:v>
+                      </c:pt>
+                      <c:pt idx="14">
+                        <c:v>1920</c:v>
+                      </c:pt>
+                    </c:numCache>
+                  </c:numRef>
+                </c:val>
+                <c:smooth val="0"/>
+                <c:extLst xmlns:c15="http://schemas.microsoft.com/office/drawing/2012/chart">
+                  <c:ext xmlns:c16="http://schemas.microsoft.com/office/drawing/2014/chart" uri="{C3380CC4-5D6E-409C-BE32-E72D297353CC}">
+                    <c16:uniqueId val="{00000008-32AF-404F-B120-39600E387D48}"/>
+                  </c:ext>
+                </c:extLst>
+              </c15:ser>
+            </c15:filteredLineSeries>
+            <c15:filteredLineSeries>
+              <c15:ser>
+                <c:idx val="8"/>
+                <c:order val="7"/>
+                <c:tx>
+                  <c:strRef>
+                    <c:extLst xmlns:c15="http://schemas.microsoft.com/office/drawing/2012/chart">
+                      <c:ext xmlns:c15="http://schemas.microsoft.com/office/drawing/2012/chart" uri="{02D57815-91ED-43cb-92C2-25804820EDAC}">
+                        <c15:formulaRef>
+                          <c15:sqref>'CKD+ICDbyStage'!$B$10</c15:sqref>
+                        </c15:formulaRef>
+                      </c:ext>
+                    </c:extLst>
+                    <c:strCache>
+                      <c:ptCount val="1"/>
+                      <c:pt idx="0">
+                        <c:v>CKD Stage 4</c:v>
+                      </c:pt>
+                    </c:strCache>
+                  </c:strRef>
+                </c:tx>
+                <c:spPr>
+                  <a:ln w="28575" cap="rnd">
+                    <a:solidFill>
+                      <a:schemeClr val="accent3">
+                        <a:lumMod val="60000"/>
+                      </a:schemeClr>
+                    </a:solidFill>
+                    <a:round/>
+                  </a:ln>
+                  <a:effectLst/>
+                </c:spPr>
+                <c:marker>
+                  <c:symbol val="none"/>
+                </c:marker>
+                <c:cat>
+                  <c:numRef>
+                    <c:extLst xmlns:c15="http://schemas.microsoft.com/office/drawing/2012/chart">
+                      <c:ext xmlns:c15="http://schemas.microsoft.com/office/drawing/2012/chart" uri="{02D57815-91ED-43cb-92C2-25804820EDAC}">
+                        <c15:formulaRef>
+                          <c15:sqref>'CKD+ICDbyStage'!$C$1:$Q$1</c15:sqref>
+                        </c15:formulaRef>
+                      </c:ext>
+                    </c:extLst>
+                    <c:numCache>
+                      <c:formatCode>General</c:formatCode>
+                      <c:ptCount val="15"/>
+                      <c:pt idx="0">
+                        <c:v>2009</c:v>
+                      </c:pt>
+                      <c:pt idx="1">
+                        <c:v>2010</c:v>
+                      </c:pt>
+                      <c:pt idx="2">
+                        <c:v>2011</c:v>
+                      </c:pt>
+                      <c:pt idx="3">
+                        <c:v>2012</c:v>
+                      </c:pt>
+                      <c:pt idx="4">
+                        <c:v>2013</c:v>
+                      </c:pt>
+                      <c:pt idx="5">
+                        <c:v>2014</c:v>
+                      </c:pt>
+                      <c:pt idx="6">
+                        <c:v>2015</c:v>
+                      </c:pt>
+                      <c:pt idx="7">
+                        <c:v>2016</c:v>
+                      </c:pt>
+                      <c:pt idx="8">
+                        <c:v>2017</c:v>
+                      </c:pt>
+                      <c:pt idx="9">
+                        <c:v>2018</c:v>
+                      </c:pt>
+                      <c:pt idx="10">
+                        <c:v>2019</c:v>
+                      </c:pt>
+                      <c:pt idx="11">
+                        <c:v>2020</c:v>
+                      </c:pt>
+                      <c:pt idx="12">
+                        <c:v>2021</c:v>
+                      </c:pt>
+                      <c:pt idx="13">
+                        <c:v>2022</c:v>
+                      </c:pt>
+                      <c:pt idx="14">
+                        <c:v>2023</c:v>
+                      </c:pt>
+                    </c:numCache>
+                  </c:numRef>
+                </c:cat>
+                <c:val>
+                  <c:numRef>
+                    <c:extLst xmlns:c15="http://schemas.microsoft.com/office/drawing/2012/chart">
+                      <c:ext xmlns:c15="http://schemas.microsoft.com/office/drawing/2012/chart" uri="{02D57815-91ED-43cb-92C2-25804820EDAC}">
+                        <c15:formulaRef>
+                          <c15:sqref>'CKD+ICDbyStage'!$C$10:$Q$10</c15:sqref>
+                        </c15:formulaRef>
+                      </c:ext>
+                    </c:extLst>
+                    <c:numCache>
+                      <c:formatCode>General</c:formatCode>
+                      <c:ptCount val="15"/>
+                      <c:pt idx="0">
+                        <c:v>2914</c:v>
+                      </c:pt>
+                      <c:pt idx="1">
+                        <c:v>2889</c:v>
+                      </c:pt>
+                      <c:pt idx="2">
+                        <c:v>2742</c:v>
+                      </c:pt>
+                      <c:pt idx="3">
+                        <c:v>2781</c:v>
+                      </c:pt>
+                      <c:pt idx="4">
+                        <c:v>2694</c:v>
+                      </c:pt>
+                      <c:pt idx="5">
+                        <c:v>2615</c:v>
+                      </c:pt>
+                      <c:pt idx="6">
+                        <c:v>2762</c:v>
+                      </c:pt>
+                      <c:pt idx="7">
+                        <c:v>2850</c:v>
+                      </c:pt>
+                      <c:pt idx="8">
+                        <c:v>3008</c:v>
+                      </c:pt>
+                      <c:pt idx="9">
+                        <c:v>2867</c:v>
+                      </c:pt>
+                      <c:pt idx="10">
+                        <c:v>2842</c:v>
+                      </c:pt>
+                      <c:pt idx="11">
+                        <c:v>2933</c:v>
+                      </c:pt>
+                      <c:pt idx="12">
+                        <c:v>2935</c:v>
+                      </c:pt>
+                      <c:pt idx="13">
+                        <c:v>2730</c:v>
+                      </c:pt>
+                      <c:pt idx="14">
+                        <c:v>2550</c:v>
+                      </c:pt>
+                    </c:numCache>
+                  </c:numRef>
+                </c:val>
+                <c:smooth val="0"/>
+                <c:extLst xmlns:c15="http://schemas.microsoft.com/office/drawing/2012/chart">
+                  <c:ext xmlns:c16="http://schemas.microsoft.com/office/drawing/2014/chart" uri="{C3380CC4-5D6E-409C-BE32-E72D297353CC}">
+                    <c16:uniqueId val="{00000009-32AF-404F-B120-39600E387D48}"/>
+                  </c:ext>
+                </c:extLst>
+              </c15:ser>
+            </c15:filteredLineSeries>
+            <c15:filteredLineSeries>
+              <c15:ser>
+                <c:idx val="10"/>
+                <c:order val="9"/>
+                <c:tx>
+                  <c:strRef>
+                    <c:extLst xmlns:c15="http://schemas.microsoft.com/office/drawing/2012/chart">
+                      <c:ext xmlns:c15="http://schemas.microsoft.com/office/drawing/2012/chart" uri="{02D57815-91ED-43cb-92C2-25804820EDAC}">
+                        <c15:formulaRef>
+                          <c15:sqref>'CKD+ICDbyStage'!$B$12</c15:sqref>
+                        </c15:formulaRef>
+                      </c:ext>
+                    </c:extLst>
+                    <c:strCache>
+                      <c:ptCount val="1"/>
+                      <c:pt idx="0">
+                        <c:v>CKD Stage 5</c:v>
+                      </c:pt>
+                    </c:strCache>
+                  </c:strRef>
+                </c:tx>
+                <c:spPr>
+                  <a:ln w="28575" cap="rnd">
+                    <a:solidFill>
+                      <a:schemeClr val="accent5">
+                        <a:lumMod val="60000"/>
+                      </a:schemeClr>
+                    </a:solidFill>
+                    <a:round/>
+                  </a:ln>
+                  <a:effectLst/>
+                </c:spPr>
+                <c:marker>
+                  <c:symbol val="none"/>
+                </c:marker>
+                <c:cat>
+                  <c:numRef>
+                    <c:extLst xmlns:c15="http://schemas.microsoft.com/office/drawing/2012/chart">
+                      <c:ext xmlns:c15="http://schemas.microsoft.com/office/drawing/2012/chart" uri="{02D57815-91ED-43cb-92C2-25804820EDAC}">
+                        <c15:formulaRef>
+                          <c15:sqref>'CKD+ICDbyStage'!$C$1:$Q$1</c15:sqref>
+                        </c15:formulaRef>
+                      </c:ext>
+                    </c:extLst>
+                    <c:numCache>
+                      <c:formatCode>General</c:formatCode>
+                      <c:ptCount val="15"/>
+                      <c:pt idx="0">
+                        <c:v>2009</c:v>
+                      </c:pt>
+                      <c:pt idx="1">
+                        <c:v>2010</c:v>
+                      </c:pt>
+                      <c:pt idx="2">
+                        <c:v>2011</c:v>
+                      </c:pt>
+                      <c:pt idx="3">
+                        <c:v>2012</c:v>
+                      </c:pt>
+                      <c:pt idx="4">
+                        <c:v>2013</c:v>
+                      </c:pt>
+                      <c:pt idx="5">
+                        <c:v>2014</c:v>
+                      </c:pt>
+                      <c:pt idx="6">
+                        <c:v>2015</c:v>
+                      </c:pt>
+                      <c:pt idx="7">
+                        <c:v>2016</c:v>
+                      </c:pt>
+                      <c:pt idx="8">
+                        <c:v>2017</c:v>
+                      </c:pt>
+                      <c:pt idx="9">
+                        <c:v>2018</c:v>
+                      </c:pt>
+                      <c:pt idx="10">
+                        <c:v>2019</c:v>
+                      </c:pt>
+                      <c:pt idx="11">
+                        <c:v>2020</c:v>
+                      </c:pt>
+                      <c:pt idx="12">
+                        <c:v>2021</c:v>
+                      </c:pt>
+                      <c:pt idx="13">
+                        <c:v>2022</c:v>
+                      </c:pt>
+                      <c:pt idx="14">
+                        <c:v>2023</c:v>
+                      </c:pt>
+                    </c:numCache>
+                  </c:numRef>
+                </c:cat>
+                <c:val>
+                  <c:numRef>
+                    <c:extLst xmlns:c15="http://schemas.microsoft.com/office/drawing/2012/chart">
+                      <c:ext xmlns:c15="http://schemas.microsoft.com/office/drawing/2012/chart" uri="{02D57815-91ED-43cb-92C2-25804820EDAC}">
+                        <c15:formulaRef>
+                          <c15:sqref>'CKD+ICDbyStage'!$C$12:$Q$12</c15:sqref>
+                        </c15:formulaRef>
+                      </c:ext>
+                    </c:extLst>
+                    <c:numCache>
+                      <c:formatCode>General</c:formatCode>
+                      <c:ptCount val="15"/>
+                      <c:pt idx="0">
+                        <c:v>718</c:v>
+                      </c:pt>
+                      <c:pt idx="1">
+                        <c:v>729</c:v>
+                      </c:pt>
+                      <c:pt idx="2">
+                        <c:v>776</c:v>
+                      </c:pt>
+                      <c:pt idx="3">
+                        <c:v>790</c:v>
+                      </c:pt>
+                      <c:pt idx="4">
+                        <c:v>840</c:v>
+                      </c:pt>
+                      <c:pt idx="5">
+                        <c:v>908</c:v>
+                      </c:pt>
+                      <c:pt idx="6">
+                        <c:v>890</c:v>
+                      </c:pt>
+                      <c:pt idx="7">
+                        <c:v>415</c:v>
+                      </c:pt>
+                      <c:pt idx="8">
+                        <c:v>440</c:v>
+                      </c:pt>
+                      <c:pt idx="9">
+                        <c:v>428</c:v>
+                      </c:pt>
+                      <c:pt idx="10">
+                        <c:v>418</c:v>
+                      </c:pt>
+                      <c:pt idx="11">
+                        <c:v>398</c:v>
+                      </c:pt>
+                      <c:pt idx="12">
+                        <c:v>411</c:v>
+                      </c:pt>
+                      <c:pt idx="13">
+                        <c:v>380</c:v>
+                      </c:pt>
+                      <c:pt idx="14">
+                        <c:v>355</c:v>
+                      </c:pt>
+                    </c:numCache>
+                  </c:numRef>
+                </c:val>
+                <c:smooth val="0"/>
+                <c:extLst xmlns:c15="http://schemas.microsoft.com/office/drawing/2012/chart">
+                  <c:ext xmlns:c16="http://schemas.microsoft.com/office/drawing/2014/chart" uri="{C3380CC4-5D6E-409C-BE32-E72D297353CC}">
+                    <c16:uniqueId val="{0000000A-32AF-404F-B120-39600E387D48}"/>
+                  </c:ext>
+                </c:extLst>
+              </c15:ser>
+            </c15:filteredLineSeries>
+            <c15:filteredLineSeries>
+              <c15:ser>
+                <c:idx val="11"/>
+                <c:order val="10"/>
+                <c:tx>
+                  <c:strRef>
+                    <c:extLst xmlns:c15="http://schemas.microsoft.com/office/drawing/2012/chart">
+                      <c:ext xmlns:c15="http://schemas.microsoft.com/office/drawing/2012/chart" uri="{02D57815-91ED-43cb-92C2-25804820EDAC}">
+                        <c15:formulaRef>
+                          <c15:sqref>'CKD+ICDbyStage'!$B$13</c15:sqref>
+                        </c15:formulaRef>
+                      </c:ext>
+                    </c:extLst>
+                    <c:strCache>
+                      <c:ptCount val="1"/>
+                      <c:pt idx="0">
+                        <c:v>CKD Stage 5</c:v>
+                      </c:pt>
+                    </c:strCache>
+                  </c:strRef>
+                </c:tx>
+                <c:spPr>
+                  <a:ln w="28575" cap="rnd">
+                    <a:solidFill>
+                      <a:schemeClr val="accent6">
+                        <a:lumMod val="60000"/>
+                      </a:schemeClr>
+                    </a:solidFill>
+                    <a:round/>
+                  </a:ln>
+                  <a:effectLst/>
+                </c:spPr>
+                <c:marker>
+                  <c:symbol val="none"/>
+                </c:marker>
+                <c:cat>
+                  <c:numRef>
+                    <c:extLst xmlns:c15="http://schemas.microsoft.com/office/drawing/2012/chart">
+                      <c:ext xmlns:c15="http://schemas.microsoft.com/office/drawing/2012/chart" uri="{02D57815-91ED-43cb-92C2-25804820EDAC}">
+                        <c15:formulaRef>
+                          <c15:sqref>'CKD+ICDbyStage'!$C$1:$Q$1</c15:sqref>
+                        </c15:formulaRef>
+                      </c:ext>
+                    </c:extLst>
+                    <c:numCache>
+                      <c:formatCode>General</c:formatCode>
+                      <c:ptCount val="15"/>
+                      <c:pt idx="0">
+                        <c:v>2009</c:v>
+                      </c:pt>
+                      <c:pt idx="1">
+                        <c:v>2010</c:v>
+                      </c:pt>
+                      <c:pt idx="2">
+                        <c:v>2011</c:v>
+                      </c:pt>
+                      <c:pt idx="3">
+                        <c:v>2012</c:v>
+                      </c:pt>
+                      <c:pt idx="4">
+                        <c:v>2013</c:v>
+                      </c:pt>
+                      <c:pt idx="5">
+                        <c:v>2014</c:v>
+                      </c:pt>
+                      <c:pt idx="6">
+                        <c:v>2015</c:v>
+                      </c:pt>
+                      <c:pt idx="7">
+                        <c:v>2016</c:v>
+                      </c:pt>
+                      <c:pt idx="8">
+                        <c:v>2017</c:v>
+                      </c:pt>
+                      <c:pt idx="9">
+                        <c:v>2018</c:v>
+                      </c:pt>
+                      <c:pt idx="10">
+                        <c:v>2019</c:v>
+                      </c:pt>
+                      <c:pt idx="11">
+                        <c:v>2020</c:v>
+                      </c:pt>
+                      <c:pt idx="12">
+                        <c:v>2021</c:v>
+                      </c:pt>
+                      <c:pt idx="13">
+                        <c:v>2022</c:v>
+                      </c:pt>
+                      <c:pt idx="14">
+                        <c:v>2023</c:v>
+                      </c:pt>
+                    </c:numCache>
+                  </c:numRef>
+                </c:cat>
+                <c:val>
+                  <c:numRef>
+                    <c:extLst xmlns:c15="http://schemas.microsoft.com/office/drawing/2012/chart">
+                      <c:ext xmlns:c15="http://schemas.microsoft.com/office/drawing/2012/chart" uri="{02D57815-91ED-43cb-92C2-25804820EDAC}">
+                        <c15:formulaRef>
+                          <c15:sqref>'CKD+ICDbyStage'!$C$13:$Q$13</c15:sqref>
+                        </c15:formulaRef>
+                      </c:ext>
+                    </c:extLst>
+                    <c:numCache>
+                      <c:formatCode>General</c:formatCode>
+                      <c:ptCount val="15"/>
+                      <c:pt idx="0">
+                        <c:v>795</c:v>
+                      </c:pt>
+                      <c:pt idx="1">
+                        <c:v>806</c:v>
+                      </c:pt>
+                      <c:pt idx="2">
+                        <c:v>850</c:v>
+                      </c:pt>
+                      <c:pt idx="3">
+                        <c:v>868</c:v>
+                      </c:pt>
+                      <c:pt idx="4">
+                        <c:v>913</c:v>
+                      </c:pt>
+                      <c:pt idx="5">
+                        <c:v>974</c:v>
+                      </c:pt>
+                      <c:pt idx="6">
+                        <c:v>992</c:v>
+                      </c:pt>
+                      <c:pt idx="7">
+                        <c:v>529</c:v>
+                      </c:pt>
+                      <c:pt idx="8">
+                        <c:v>536</c:v>
+                      </c:pt>
+                      <c:pt idx="9">
+                        <c:v>531</c:v>
+                      </c:pt>
+                      <c:pt idx="10">
+                        <c:v>513</c:v>
+                      </c:pt>
+                      <c:pt idx="11">
+                        <c:v>514</c:v>
+                      </c:pt>
+                      <c:pt idx="12">
+                        <c:v>549</c:v>
+                      </c:pt>
+                      <c:pt idx="13">
+                        <c:v>515</c:v>
+                      </c:pt>
+                      <c:pt idx="14">
+                        <c:v>466</c:v>
+                      </c:pt>
+                    </c:numCache>
+                  </c:numRef>
+                </c:val>
+                <c:smooth val="0"/>
+                <c:extLst xmlns:c15="http://schemas.microsoft.com/office/drawing/2012/chart">
+                  <c:ext xmlns:c16="http://schemas.microsoft.com/office/drawing/2014/chart" uri="{C3380CC4-5D6E-409C-BE32-E72D297353CC}">
+                    <c16:uniqueId val="{0000000B-32AF-404F-B120-39600E387D48}"/>
+                  </c:ext>
+                </c:extLst>
+              </c15:ser>
+            </c15:filteredLineSeries>
+            <c15:filteredLineSeries>
+              <c15:ser>
+                <c:idx val="12"/>
+                <c:order val="11"/>
+                <c:tx>
+                  <c:strRef>
+                    <c:extLst xmlns:c15="http://schemas.microsoft.com/office/drawing/2012/chart">
+                      <c:ext xmlns:c15="http://schemas.microsoft.com/office/drawing/2012/chart" uri="{02D57815-91ED-43cb-92C2-25804820EDAC}">
+                        <c15:formulaRef>
+                          <c15:sqref>'CKD+ICDbyStage'!$B$14</c15:sqref>
+                        </c15:formulaRef>
+                      </c:ext>
+                    </c:extLst>
+                    <c:strCache>
+                      <c:ptCount val="1"/>
+                      <c:pt idx="0">
+                        <c:v>CKD Stage 3</c:v>
+                      </c:pt>
+                    </c:strCache>
+                  </c:strRef>
+                </c:tx>
+                <c:spPr>
+                  <a:ln w="28575" cap="rnd">
+                    <a:solidFill>
+                      <a:schemeClr val="accent1">
+                        <a:lumMod val="80000"/>
+                        <a:lumOff val="20000"/>
+                      </a:schemeClr>
+                    </a:solidFill>
+                    <a:round/>
+                  </a:ln>
+                  <a:effectLst/>
+                </c:spPr>
+                <c:marker>
+                  <c:symbol val="none"/>
+                </c:marker>
+                <c:cat>
+                  <c:numRef>
+                    <c:extLst xmlns:c15="http://schemas.microsoft.com/office/drawing/2012/chart">
+                      <c:ext xmlns:c15="http://schemas.microsoft.com/office/drawing/2012/chart" uri="{02D57815-91ED-43cb-92C2-25804820EDAC}">
+                        <c15:formulaRef>
+                          <c15:sqref>'CKD+ICDbyStage'!$C$1:$Q$1</c15:sqref>
+                        </c15:formulaRef>
+                      </c:ext>
+                    </c:extLst>
+                    <c:numCache>
+                      <c:formatCode>General</c:formatCode>
+                      <c:ptCount val="15"/>
+                      <c:pt idx="0">
+                        <c:v>2009</c:v>
+                      </c:pt>
+                      <c:pt idx="1">
+                        <c:v>2010</c:v>
+                      </c:pt>
+                      <c:pt idx="2">
+                        <c:v>2011</c:v>
+                      </c:pt>
+                      <c:pt idx="3">
+                        <c:v>2012</c:v>
+                      </c:pt>
+                      <c:pt idx="4">
+                        <c:v>2013</c:v>
+                      </c:pt>
+                      <c:pt idx="5">
+                        <c:v>2014</c:v>
+                      </c:pt>
+                      <c:pt idx="6">
+                        <c:v>2015</c:v>
+                      </c:pt>
+                      <c:pt idx="7">
+                        <c:v>2016</c:v>
+                      </c:pt>
+                      <c:pt idx="8">
+                        <c:v>2017</c:v>
+                      </c:pt>
+                      <c:pt idx="9">
+                        <c:v>2018</c:v>
+                      </c:pt>
+                      <c:pt idx="10">
+                        <c:v>2019</c:v>
+                      </c:pt>
+                      <c:pt idx="11">
+                        <c:v>2020</c:v>
+                      </c:pt>
+                      <c:pt idx="12">
+                        <c:v>2021</c:v>
+                      </c:pt>
+                      <c:pt idx="13">
+                        <c:v>2022</c:v>
+                      </c:pt>
+                      <c:pt idx="14">
+                        <c:v>2023</c:v>
+                      </c:pt>
+                    </c:numCache>
+                  </c:numRef>
+                </c:cat>
+                <c:val>
+                  <c:numRef>
+                    <c:extLst xmlns:c15="http://schemas.microsoft.com/office/drawing/2012/chart">
+                      <c:ext xmlns:c15="http://schemas.microsoft.com/office/drawing/2012/chart" uri="{02D57815-91ED-43cb-92C2-25804820EDAC}">
+                        <c15:formulaRef>
+                          <c15:sqref>'CKD+ICDbyStage'!$C$14:$Q$14</c15:sqref>
+                        </c15:formulaRef>
+                      </c:ext>
+                    </c:extLst>
+                    <c:numCache>
+                      <c:formatCode>0.00</c:formatCode>
+                      <c:ptCount val="15"/>
+                      <c:pt idx="0">
+                        <c:v>25.837800000000001</c:v>
+                      </c:pt>
+                      <c:pt idx="1">
+                        <c:v>27.637899999999998</c:v>
+                      </c:pt>
+                      <c:pt idx="2">
+                        <c:v>30.411899999999999</c:v>
+                      </c:pt>
+                      <c:pt idx="3">
+                        <c:v>31.648299999999999</c:v>
+                      </c:pt>
+                      <c:pt idx="4">
+                        <c:v>32.666400000000003</c:v>
+                      </c:pt>
+                      <c:pt idx="5">
+                        <c:v>32.470599999999997</c:v>
+                      </c:pt>
+                      <c:pt idx="6">
+                        <c:v>33.718299999999999</c:v>
+                      </c:pt>
+                      <c:pt idx="7">
+                        <c:v>27.116099999999999</c:v>
+                      </c:pt>
+                      <c:pt idx="8">
+                        <c:v>27.049700000000001</c:v>
+                      </c:pt>
+                      <c:pt idx="9">
+                        <c:v>26.6007</c:v>
+                      </c:pt>
+                      <c:pt idx="10">
+                        <c:v>25.516300000000001</c:v>
+                      </c:pt>
+                      <c:pt idx="11">
+                        <c:v>25.446400000000001</c:v>
+                      </c:pt>
+                      <c:pt idx="12">
+                        <c:v>29.435500000000001</c:v>
+                      </c:pt>
+                      <c:pt idx="13">
+                        <c:v>28.896699999999999</c:v>
+                      </c:pt>
+                      <c:pt idx="14">
+                        <c:v>28.121700000000001</c:v>
+                      </c:pt>
+                    </c:numCache>
+                  </c:numRef>
+                </c:val>
+                <c:smooth val="0"/>
+                <c:extLst xmlns:c15="http://schemas.microsoft.com/office/drawing/2012/chart">
+                  <c:ext xmlns:c16="http://schemas.microsoft.com/office/drawing/2014/chart" uri="{C3380CC4-5D6E-409C-BE32-E72D297353CC}">
+                    <c16:uniqueId val="{0000000C-32AF-404F-B120-39600E387D48}"/>
+                  </c:ext>
+                </c:extLst>
+              </c15:ser>
+            </c15:filteredLineSeries>
+            <c15:filteredLineSeries>
+              <c15:ser>
+                <c:idx val="13"/>
+                <c:order val="12"/>
+                <c:tx>
+                  <c:strRef>
+                    <c:extLst xmlns:c15="http://schemas.microsoft.com/office/drawing/2012/chart">
+                      <c:ext xmlns:c15="http://schemas.microsoft.com/office/drawing/2012/chart" uri="{02D57815-91ED-43cb-92C2-25804820EDAC}">
+                        <c15:formulaRef>
+                          <c15:sqref>'CKD+ICDbyStage'!$B$15</c15:sqref>
+                        </c15:formulaRef>
+                      </c:ext>
+                    </c:extLst>
+                    <c:strCache>
+                      <c:ptCount val="1"/>
+                      <c:pt idx="0">
+                        <c:v>CKD Stage 4</c:v>
+                      </c:pt>
+                    </c:strCache>
+                  </c:strRef>
+                </c:tx>
+                <c:spPr>
+                  <a:ln w="28575" cap="rnd">
+                    <a:solidFill>
+                      <a:schemeClr val="accent2">
+                        <a:lumMod val="80000"/>
+                        <a:lumOff val="20000"/>
+                      </a:schemeClr>
+                    </a:solidFill>
+                    <a:round/>
+                  </a:ln>
+                  <a:effectLst/>
+                </c:spPr>
+                <c:marker>
+                  <c:symbol val="none"/>
+                </c:marker>
+                <c:cat>
+                  <c:numRef>
+                    <c:extLst xmlns:c15="http://schemas.microsoft.com/office/drawing/2012/chart">
+                      <c:ext xmlns:c15="http://schemas.microsoft.com/office/drawing/2012/chart" uri="{02D57815-91ED-43cb-92C2-25804820EDAC}">
+                        <c15:formulaRef>
+                          <c15:sqref>'CKD+ICDbyStage'!$C$1:$Q$1</c15:sqref>
+                        </c15:formulaRef>
+                      </c:ext>
+                    </c:extLst>
+                    <c:numCache>
+                      <c:formatCode>General</c:formatCode>
+                      <c:ptCount val="15"/>
+                      <c:pt idx="0">
+                        <c:v>2009</c:v>
+                      </c:pt>
+                      <c:pt idx="1">
+                        <c:v>2010</c:v>
+                      </c:pt>
+                      <c:pt idx="2">
+                        <c:v>2011</c:v>
+                      </c:pt>
+                      <c:pt idx="3">
+                        <c:v>2012</c:v>
+                      </c:pt>
+                      <c:pt idx="4">
+                        <c:v>2013</c:v>
+                      </c:pt>
+                      <c:pt idx="5">
+                        <c:v>2014</c:v>
+                      </c:pt>
+                      <c:pt idx="6">
+                        <c:v>2015</c:v>
+                      </c:pt>
+                      <c:pt idx="7">
+                        <c:v>2016</c:v>
+                      </c:pt>
+                      <c:pt idx="8">
+                        <c:v>2017</c:v>
+                      </c:pt>
+                      <c:pt idx="9">
+                        <c:v>2018</c:v>
+                      </c:pt>
+                      <c:pt idx="10">
+                        <c:v>2019</c:v>
+                      </c:pt>
+                      <c:pt idx="11">
+                        <c:v>2020</c:v>
+                      </c:pt>
+                      <c:pt idx="12">
+                        <c:v>2021</c:v>
+                      </c:pt>
+                      <c:pt idx="13">
+                        <c:v>2022</c:v>
+                      </c:pt>
+                      <c:pt idx="14">
+                        <c:v>2023</c:v>
+                      </c:pt>
+                    </c:numCache>
+                  </c:numRef>
+                </c:cat>
+                <c:val>
+                  <c:numRef>
+                    <c:extLst xmlns:c15="http://schemas.microsoft.com/office/drawing/2012/chart">
+                      <c:ext xmlns:c15="http://schemas.microsoft.com/office/drawing/2012/chart" uri="{02D57815-91ED-43cb-92C2-25804820EDAC}">
+                        <c15:formulaRef>
+                          <c15:sqref>'CKD+ICDbyStage'!$C$15:$Q$15</c15:sqref>
+                        </c15:formulaRef>
+                      </c:ext>
+                    </c:extLst>
+                    <c:numCache>
+                      <c:formatCode>0.00</c:formatCode>
+                      <c:ptCount val="15"/>
+                      <c:pt idx="0">
+                        <c:v>85.333500000000001</c:v>
+                      </c:pt>
+                      <c:pt idx="1">
+                        <c:v>89.104399999999998</c:v>
+                      </c:pt>
+                      <c:pt idx="2">
+                        <c:v>83.257599999999996</c:v>
+                      </c:pt>
+                      <c:pt idx="3">
+                        <c:v>79.908299999999997</c:v>
+                      </c:pt>
+                      <c:pt idx="4">
+                        <c:v>82.521799999999999</c:v>
+                      </c:pt>
+                      <c:pt idx="5">
+                        <c:v>88.373000000000005</c:v>
+                      </c:pt>
+                      <c:pt idx="6">
+                        <c:v>87.177199999999999</c:v>
+                      </c:pt>
+                      <c:pt idx="7">
+                        <c:v>77.285899999999998</c:v>
+                      </c:pt>
+                      <c:pt idx="8">
+                        <c:v>81.022999999999996</c:v>
+                      </c:pt>
+                      <c:pt idx="9">
+                        <c:v>80.665499999999994</c:v>
+                      </c:pt>
+                      <c:pt idx="10">
+                        <c:v>78.570599999999999</c:v>
+                      </c:pt>
+                      <c:pt idx="11">
+                        <c:v>78.083100000000002</c:v>
+                      </c:pt>
+                      <c:pt idx="12">
+                        <c:v>75.752700000000004</c:v>
+                      </c:pt>
+                      <c:pt idx="13">
+                        <c:v>78.800799999999995</c:v>
+                      </c:pt>
+                      <c:pt idx="14">
+                        <c:v>79.137900000000002</c:v>
+                      </c:pt>
+                    </c:numCache>
+                  </c:numRef>
+                </c:val>
+                <c:smooth val="0"/>
+                <c:extLst xmlns:c15="http://schemas.microsoft.com/office/drawing/2012/chart">
+                  <c:ext xmlns:c16="http://schemas.microsoft.com/office/drawing/2014/chart" uri="{C3380CC4-5D6E-409C-BE32-E72D297353CC}">
+                    <c16:uniqueId val="{0000000D-32AF-404F-B120-39600E387D48}"/>
+                  </c:ext>
+                </c:extLst>
+              </c15:ser>
+            </c15:filteredLineSeries>
+            <c15:filteredLineSeries>
+              <c15:ser>
+                <c:idx val="14"/>
+                <c:order val="13"/>
+                <c:tx>
+                  <c:strRef>
+                    <c:extLst xmlns:c15="http://schemas.microsoft.com/office/drawing/2012/chart">
+                      <c:ext xmlns:c15="http://schemas.microsoft.com/office/drawing/2012/chart" uri="{02D57815-91ED-43cb-92C2-25804820EDAC}">
+                        <c15:formulaRef>
+                          <c15:sqref>'CKD+ICDbyStage'!$B$16</c15:sqref>
+                        </c15:formulaRef>
+                      </c:ext>
+                    </c:extLst>
+                    <c:strCache>
+                      <c:ptCount val="1"/>
+                      <c:pt idx="0">
+                        <c:v>CKD Stage 5</c:v>
+                      </c:pt>
+                    </c:strCache>
+                  </c:strRef>
+                </c:tx>
+                <c:spPr>
+                  <a:ln w="28575" cap="rnd">
+                    <a:solidFill>
+                      <a:schemeClr val="accent3">
+                        <a:lumMod val="80000"/>
+                        <a:lumOff val="20000"/>
+                      </a:schemeClr>
+                    </a:solidFill>
+                    <a:round/>
+                  </a:ln>
+                  <a:effectLst/>
+                </c:spPr>
+                <c:marker>
+                  <c:symbol val="none"/>
+                </c:marker>
+                <c:cat>
+                  <c:numRef>
+                    <c:extLst xmlns:c15="http://schemas.microsoft.com/office/drawing/2012/chart">
+                      <c:ext xmlns:c15="http://schemas.microsoft.com/office/drawing/2012/chart" uri="{02D57815-91ED-43cb-92C2-25804820EDAC}">
+                        <c15:formulaRef>
+                          <c15:sqref>'CKD+ICDbyStage'!$C$1:$Q$1</c15:sqref>
+                        </c15:formulaRef>
+                      </c:ext>
+                    </c:extLst>
+                    <c:numCache>
+                      <c:formatCode>General</c:formatCode>
+                      <c:ptCount val="15"/>
+                      <c:pt idx="0">
+                        <c:v>2009</c:v>
+                      </c:pt>
+                      <c:pt idx="1">
+                        <c:v>2010</c:v>
+                      </c:pt>
+                      <c:pt idx="2">
+                        <c:v>2011</c:v>
+                      </c:pt>
+                      <c:pt idx="3">
+                        <c:v>2012</c:v>
+                      </c:pt>
+                      <c:pt idx="4">
+                        <c:v>2013</c:v>
+                      </c:pt>
+                      <c:pt idx="5">
+                        <c:v>2014</c:v>
+                      </c:pt>
+                      <c:pt idx="6">
+                        <c:v>2015</c:v>
+                      </c:pt>
+                      <c:pt idx="7">
+                        <c:v>2016</c:v>
+                      </c:pt>
+                      <c:pt idx="8">
+                        <c:v>2017</c:v>
+                      </c:pt>
+                      <c:pt idx="9">
+                        <c:v>2018</c:v>
+                      </c:pt>
+                      <c:pt idx="10">
+                        <c:v>2019</c:v>
+                      </c:pt>
+                      <c:pt idx="11">
+                        <c:v>2020</c:v>
+                      </c:pt>
+                      <c:pt idx="12">
+                        <c:v>2021</c:v>
+                      </c:pt>
+                      <c:pt idx="13">
+                        <c:v>2022</c:v>
+                      </c:pt>
+                      <c:pt idx="14">
+                        <c:v>2023</c:v>
+                      </c:pt>
+                    </c:numCache>
+                  </c:numRef>
+                </c:cat>
+                <c:val>
+                  <c:numRef>
+                    <c:extLst xmlns:c15="http://schemas.microsoft.com/office/drawing/2012/chart">
+                      <c:ext xmlns:c15="http://schemas.microsoft.com/office/drawing/2012/chart" uri="{02D57815-91ED-43cb-92C2-25804820EDAC}">
+                        <c15:formulaRef>
+                          <c15:sqref>'CKD+ICDbyStage'!$C$16:$Q$16</c15:sqref>
+                        </c15:formulaRef>
+                      </c:ext>
+                    </c:extLst>
+                    <c:numCache>
+                      <c:formatCode>0.00</c:formatCode>
+                      <c:ptCount val="15"/>
+                      <c:pt idx="0">
+                        <c:v>93.151499999999999</c:v>
+                      </c:pt>
+                      <c:pt idx="1">
+                        <c:v>89.966200000000001</c:v>
+                      </c:pt>
+                      <c:pt idx="2">
+                        <c:v>90.596100000000007</c:v>
+                      </c:pt>
+                      <c:pt idx="3">
+                        <c:v>90.263199999999998</c:v>
+                      </c:pt>
+                      <c:pt idx="4">
+                        <c:v>91.4255</c:v>
+                      </c:pt>
+                      <c:pt idx="5">
+                        <c:v>92.674800000000005</c:v>
+                      </c:pt>
+                      <c:pt idx="6">
+                        <c:v>88.237300000000005</c:v>
+                      </c:pt>
+                      <c:pt idx="7">
+                        <c:v>70.920199999999994</c:v>
+                      </c:pt>
+                      <c:pt idx="8">
+                        <c:v>79.796099999999996</c:v>
+                      </c:pt>
+                      <c:pt idx="9">
+                        <c:v>76.728800000000007</c:v>
+                      </c:pt>
+                      <c:pt idx="10">
+                        <c:v>78.743799999999993</c:v>
+                      </c:pt>
+                      <c:pt idx="11">
+                        <c:v>75.727900000000005</c:v>
+                      </c:pt>
+                      <c:pt idx="12">
+                        <c:v>79.851500000000001</c:v>
+                      </c:pt>
+                      <c:pt idx="13">
+                        <c:v>82.426599999999993</c:v>
+                      </c:pt>
+                      <c:pt idx="14">
+                        <c:v>78.137799999999999</c:v>
+                      </c:pt>
+                    </c:numCache>
+                  </c:numRef>
+                </c:val>
+                <c:smooth val="0"/>
+                <c:extLst xmlns:c15="http://schemas.microsoft.com/office/drawing/2012/chart">
+                  <c:ext xmlns:c16="http://schemas.microsoft.com/office/drawing/2014/chart" uri="{C3380CC4-5D6E-409C-BE32-E72D297353CC}">
+                    <c16:uniqueId val="{0000000E-32AF-404F-B120-39600E387D48}"/>
+                  </c:ext>
+                </c:extLst>
+              </c15:ser>
+            </c15:filteredLineSeries>
+          </c:ext>
+        </c:extLst>
+      </c:lineChart>
+      <c:catAx>
+        <c:axId val="1440548959"/>
+        <c:scaling>
+          <c:orientation val="minMax"/>
+        </c:scaling>
+        <c:delete val="0"/>
+        <c:axPos val="b"/>
+        <c:numFmt formatCode="General" sourceLinked="1"/>
+        <c:majorTickMark val="none"/>
+        <c:minorTickMark val="none"/>
+        <c:tickLblPos val="nextTo"/>
+        <c:spPr>
+          <a:noFill/>
+          <a:ln w="9525" cap="flat" cmpd="sng" algn="ctr">
+            <a:solidFill>
+              <a:schemeClr val="tx1">
+                <a:lumMod val="15000"/>
+                <a:lumOff val="85000"/>
+              </a:schemeClr>
+            </a:solidFill>
+            <a:round/>
+          </a:ln>
+          <a:effectLst/>
+        </c:spPr>
+        <c:txPr>
+          <a:bodyPr rot="-60000000" spcFirstLastPara="1" vertOverflow="ellipsis" vert="horz" wrap="square" anchor="ctr" anchorCtr="1"/>
+          <a:lstStyle/>
+          <a:p>
+            <a:pPr>
+              <a:defRPr sz="2400" b="0" i="0" u="none" strike="noStrike" kern="1200" baseline="0">
+                <a:solidFill>
+                  <a:schemeClr val="tx1"/>
+                </a:solidFill>
+                <a:latin typeface="+mn-lt"/>
+                <a:ea typeface="+mn-ea"/>
+                <a:cs typeface="+mn-cs"/>
+              </a:defRPr>
+            </a:pPr>
+            <a:endParaRPr lang="en-US"/>
+          </a:p>
+        </c:txPr>
+        <c:crossAx val="1440549919"/>
+        <c:crosses val="autoZero"/>
+        <c:auto val="1"/>
+        <c:lblAlgn val="ctr"/>
+        <c:lblOffset val="100"/>
+        <c:tickLblSkip val="2"/>
+        <c:noMultiLvlLbl val="0"/>
+      </c:catAx>
+      <c:valAx>
+        <c:axId val="1440549919"/>
+        <c:scaling>
+          <c:orientation val="minMax"/>
+        </c:scaling>
+        <c:delete val="0"/>
+        <c:axPos val="l"/>
+        <c:majorGridlines>
+          <c:spPr>
+            <a:ln w="9525" cap="flat" cmpd="sng" algn="ctr">
+              <a:solidFill>
+                <a:schemeClr val="tx1">
+                  <a:lumMod val="15000"/>
+                  <a:lumOff val="85000"/>
+                </a:schemeClr>
+              </a:solidFill>
+              <a:round/>
+            </a:ln>
+            <a:effectLst/>
+          </c:spPr>
+        </c:majorGridlines>
+        <c:title>
+          <c:tx>
+            <c:rich>
+              <a:bodyPr rot="-5400000" spcFirstLastPara="1" vertOverflow="ellipsis" vert="horz" wrap="square" anchor="ctr" anchorCtr="1"/>
+              <a:lstStyle/>
+              <a:p>
+                <a:pPr>
+                  <a:defRPr sz="2400" b="0" i="0" u="none" strike="noStrike" kern="1200" baseline="0">
+                    <a:solidFill>
+                      <a:schemeClr val="tx1"/>
+                    </a:solidFill>
+                    <a:latin typeface="+mn-lt"/>
+                    <a:ea typeface="+mn-ea"/>
+                    <a:cs typeface="+mn-cs"/>
+                  </a:defRPr>
+                </a:pPr>
+                <a:r>
+                  <a:rPr lang="en-US" sz="2400" b="0" i="0" baseline="0" dirty="0">
+                    <a:effectLst/>
+                  </a:rPr>
+                  <a:t>Adults with CKD Stages 3-5 and ICD-9 or 10 code (%)</a:t>
+                </a:r>
+                <a:endParaRPr lang="en-US" sz="2400" dirty="0">
+                  <a:effectLst/>
+                </a:endParaRPr>
+              </a:p>
+            </c:rich>
+          </c:tx>
+          <c:overlay val="0"/>
+          <c:spPr>
+            <a:noFill/>
+            <a:ln>
+              <a:noFill/>
+            </a:ln>
+            <a:effectLst/>
+          </c:spPr>
+          <c:txPr>
+            <a:bodyPr rot="-5400000" spcFirstLastPara="1" vertOverflow="ellipsis" vert="horz" wrap="square" anchor="ctr" anchorCtr="1"/>
+            <a:lstStyle/>
+            <a:p>
+              <a:pPr>
+                <a:defRPr sz="2400" b="0" i="0" u="none" strike="noStrike" kern="1200" baseline="0">
+                  <a:solidFill>
+                    <a:schemeClr val="tx1"/>
+                  </a:solidFill>
+                  <a:latin typeface="+mn-lt"/>
+                  <a:ea typeface="+mn-ea"/>
+                  <a:cs typeface="+mn-cs"/>
+                </a:defRPr>
+              </a:pPr>
+              <a:endParaRPr lang="en-US"/>
+            </a:p>
+          </c:txPr>
+        </c:title>
+        <c:numFmt formatCode="General" sourceLinked="1"/>
+        <c:majorTickMark val="none"/>
+        <c:minorTickMark val="none"/>
+        <c:tickLblPos val="nextTo"/>
+        <c:spPr>
+          <a:noFill/>
+          <a:ln>
+            <a:noFill/>
+          </a:ln>
+          <a:effectLst/>
+        </c:spPr>
+        <c:txPr>
+          <a:bodyPr rot="-60000000" spcFirstLastPara="1" vertOverflow="ellipsis" vert="horz" wrap="square" anchor="ctr" anchorCtr="1"/>
+          <a:lstStyle/>
+          <a:p>
+            <a:pPr>
+              <a:defRPr sz="2400" b="0" i="0" u="none" strike="noStrike" kern="1200" baseline="0">
+                <a:solidFill>
+                  <a:schemeClr val="tx1"/>
+                </a:solidFill>
+                <a:latin typeface="+mn-lt"/>
+                <a:ea typeface="+mn-ea"/>
+                <a:cs typeface="+mn-cs"/>
+              </a:defRPr>
+            </a:pPr>
+            <a:endParaRPr lang="en-US"/>
+          </a:p>
+        </c:txPr>
+        <c:crossAx val="1440548959"/>
+        <c:crosses val="autoZero"/>
+        <c:crossBetween val="between"/>
+      </c:valAx>
+      <c:spPr>
+        <a:noFill/>
+        <a:ln>
+          <a:noFill/>
+        </a:ln>
+        <a:effectLst/>
+      </c:spPr>
+    </c:plotArea>
+    <c:legend>
+      <c:legendPos val="b"/>
+      <c:overlay val="0"/>
+      <c:spPr>
+        <a:noFill/>
+        <a:ln>
+          <a:noFill/>
+        </a:ln>
+        <a:effectLst/>
+      </c:spPr>
+      <c:txPr>
+        <a:bodyPr rot="0" spcFirstLastPara="1" vertOverflow="ellipsis" vert="horz" wrap="square" anchor="ctr" anchorCtr="1"/>
+        <a:lstStyle/>
+        <a:p>
+          <a:pPr>
+            <a:defRPr sz="2400" b="0" i="0" u="none" strike="noStrike" kern="1200" baseline="0">
+              <a:solidFill>
+                <a:schemeClr val="tx1"/>
+              </a:solidFill>
+              <a:latin typeface="+mn-lt"/>
+              <a:ea typeface="+mn-ea"/>
+              <a:cs typeface="+mn-cs"/>
+            </a:defRPr>
+          </a:pPr>
+          <a:endParaRPr lang="en-US"/>
+        </a:p>
+      </c:txPr>
+    </c:legend>
+    <c:plotVisOnly val="1"/>
+    <c:dispBlanksAs val="gap"/>
+    <c:showDLblsOverMax val="0"/>
+  </c:chart>
+  <c:spPr>
+    <a:noFill/>
+    <a:ln>
+      <a:noFill/>
+    </a:ln>
+    <a:effectLst/>
+  </c:spPr>
+  <c:txPr>
+    <a:bodyPr/>
+    <a:lstStyle/>
+    <a:p>
+      <a:pPr>
+        <a:defRPr sz="2400">
+          <a:solidFill>
+            <a:schemeClr val="tx1"/>
+          </a:solidFill>
+        </a:defRPr>
+      </a:pPr>
+      <a:endParaRPr lang="en-US"/>
+    </a:p>
+  </c:txPr>
+  <c:externalData r:id="rId3">
+    <c:autoUpdate val="0"/>
+  </c:externalData>
+</c:chartSpace>
+</file>
+
+<file path=ppt/charts/chart9.xml><?xml version="1.0" encoding="utf-8"?>
+<c:chartSpace xmlns:c="http://schemas.openxmlformats.org/drawingml/2006/chart" xmlns:a="http://schemas.openxmlformats.org/drawingml/2006/main" xmlns:r="http://schemas.openxmlformats.org/officeDocument/2006/relationships" xmlns:c16r2="http://schemas.microsoft.com/office/drawing/2015/06/chart">
+  <c:date1904 val="0"/>
+  <c:lang val="en-US"/>
+  <c:roundedCorners val="0"/>
+  <mc:AlternateContent xmlns:mc="http://schemas.openxmlformats.org/markup-compatibility/2006">
+    <mc:Choice xmlns:c14="http://schemas.microsoft.com/office/drawing/2007/8/2/chart" Requires="c14">
+      <c14:style val="102"/>
+    </mc:Choice>
+    <mc:Fallback>
+      <c:style val="2"/>
+    </mc:Fallback>
+  </mc:AlternateContent>
+  <c:chart>
+    <c:autoTitleDeleted val="1"/>
+    <c:plotArea>
+      <c:layout/>
+      <c:lineChart>
+        <c:grouping val="standard"/>
+        <c:varyColors val="0"/>
+        <c:ser>
+          <c:idx val="12"/>
+          <c:order val="12"/>
+          <c:tx>
+            <c:strRef>
+              <c:f>'CKD+ICDbyStage'!$B$14</c:f>
+              <c:strCache>
+                <c:ptCount val="1"/>
+                <c:pt idx="0">
+                  <c:v>CKD Stage 3</c:v>
+                </c:pt>
+              </c:strCache>
+            </c:strRef>
+          </c:tx>
+          <c:spPr>
+            <a:ln w="44450" cap="rnd">
+              <a:solidFill>
+                <a:schemeClr val="accent1"/>
+              </a:solidFill>
+              <a:round/>
+            </a:ln>
+            <a:effectLst/>
+          </c:spPr>
+          <c:marker>
+            <c:symbol val="circle"/>
+            <c:size val="5"/>
+            <c:spPr>
+              <a:solidFill>
+                <a:schemeClr val="accent1"/>
+              </a:solidFill>
+              <a:ln w="9525">
+                <a:solidFill>
+                  <a:schemeClr val="accent1"/>
+                </a:solidFill>
+              </a:ln>
+              <a:effectLst/>
+            </c:spPr>
+          </c:marker>
+          <c:cat>
+            <c:numRef>
+              <c:f>'CKD+ICDbyStage'!$C$1:$Q$1</c:f>
+              <c:numCache>
+                <c:formatCode>General</c:formatCode>
+                <c:ptCount val="15"/>
+                <c:pt idx="0">
+                  <c:v>2009</c:v>
+                </c:pt>
+                <c:pt idx="1">
+                  <c:v>2010</c:v>
+                </c:pt>
+                <c:pt idx="2">
+                  <c:v>2011</c:v>
+                </c:pt>
+                <c:pt idx="3">
+                  <c:v>2012</c:v>
+                </c:pt>
+                <c:pt idx="4">
+                  <c:v>2013</c:v>
+                </c:pt>
+                <c:pt idx="5">
+                  <c:v>2014</c:v>
+                </c:pt>
+                <c:pt idx="6">
+                  <c:v>2015</c:v>
+                </c:pt>
+                <c:pt idx="7">
+                  <c:v>2016</c:v>
+                </c:pt>
+                <c:pt idx="8">
+                  <c:v>2017</c:v>
+                </c:pt>
+                <c:pt idx="9">
+                  <c:v>2018</c:v>
+                </c:pt>
+                <c:pt idx="10">
+                  <c:v>2019</c:v>
+                </c:pt>
+                <c:pt idx="11">
+                  <c:v>2020</c:v>
+                </c:pt>
+                <c:pt idx="12">
+                  <c:v>2021</c:v>
+                </c:pt>
+                <c:pt idx="13">
+                  <c:v>2022</c:v>
+                </c:pt>
+                <c:pt idx="14">
+                  <c:v>2023</c:v>
+                </c:pt>
+              </c:numCache>
+            </c:numRef>
+          </c:cat>
+          <c:val>
+            <c:numRef>
+              <c:f>'CKD+ICDbyStage'!$C$14:$Q$14</c:f>
+              <c:numCache>
+                <c:formatCode>0.00</c:formatCode>
+                <c:ptCount val="15"/>
+                <c:pt idx="0">
+                  <c:v>25.837800000000001</c:v>
+                </c:pt>
+                <c:pt idx="1">
+                  <c:v>27.637899999999998</c:v>
+                </c:pt>
+                <c:pt idx="2">
+                  <c:v>30.411899999999999</c:v>
+                </c:pt>
+                <c:pt idx="3">
+                  <c:v>31.648299999999999</c:v>
+                </c:pt>
+                <c:pt idx="4">
+                  <c:v>32.666400000000003</c:v>
+                </c:pt>
+                <c:pt idx="5">
+                  <c:v>32.470599999999997</c:v>
+                </c:pt>
+                <c:pt idx="6">
+                  <c:v>33.718299999999999</c:v>
+                </c:pt>
+                <c:pt idx="7">
+                  <c:v>27.116099999999999</c:v>
+                </c:pt>
+                <c:pt idx="8">
+                  <c:v>27.049700000000001</c:v>
+                </c:pt>
+                <c:pt idx="9">
+                  <c:v>26.6007</c:v>
+                </c:pt>
+                <c:pt idx="10">
+                  <c:v>25.516300000000001</c:v>
+                </c:pt>
+                <c:pt idx="11">
+                  <c:v>25.446400000000001</c:v>
+                </c:pt>
+                <c:pt idx="12">
+                  <c:v>29.435500000000001</c:v>
+                </c:pt>
+                <c:pt idx="13">
+                  <c:v>28.896699999999999</c:v>
+                </c:pt>
+                <c:pt idx="14">
+                  <c:v>28.121700000000001</c:v>
+                </c:pt>
+              </c:numCache>
+            </c:numRef>
+          </c:val>
+          <c:smooth val="0"/>
+          <c:extLst>
+            <c:ext xmlns:c16="http://schemas.microsoft.com/office/drawing/2014/chart" uri="{C3380CC4-5D6E-409C-BE32-E72D297353CC}">
+              <c16:uniqueId val="{00000000-D441-4359-97DF-2F4C53587EEB}"/>
+            </c:ext>
+          </c:extLst>
+        </c:ser>
+        <c:ser>
+          <c:idx val="13"/>
+          <c:order val="13"/>
+          <c:tx>
+            <c:strRef>
+              <c:f>'CKD+ICDbyStage'!$B$15</c:f>
+              <c:strCache>
+                <c:ptCount val="1"/>
+                <c:pt idx="0">
+                  <c:v>CKD Stage 4</c:v>
+                </c:pt>
+              </c:strCache>
+            </c:strRef>
+          </c:tx>
+          <c:spPr>
+            <a:ln w="44450" cap="rnd">
+              <a:solidFill>
+                <a:srgbClr val="F1975A"/>
+              </a:solidFill>
+              <a:round/>
+            </a:ln>
+            <a:effectLst/>
+          </c:spPr>
+          <c:marker>
+            <c:symbol val="circle"/>
+            <c:size val="5"/>
+            <c:spPr>
+              <a:solidFill>
+                <a:schemeClr val="accent2">
+                  <a:lumMod val="80000"/>
+                  <a:lumOff val="20000"/>
+                </a:schemeClr>
+              </a:solidFill>
+              <a:ln w="9525">
+                <a:solidFill>
+                  <a:schemeClr val="accent2">
+                    <a:lumMod val="80000"/>
+                    <a:lumOff val="20000"/>
+                  </a:schemeClr>
+                </a:solidFill>
+              </a:ln>
+              <a:effectLst/>
+            </c:spPr>
+          </c:marker>
+          <c:cat>
+            <c:numRef>
+              <c:f>'CKD+ICDbyStage'!$C$1:$Q$1</c:f>
+              <c:numCache>
+                <c:formatCode>General</c:formatCode>
+                <c:ptCount val="15"/>
+                <c:pt idx="0">
+                  <c:v>2009</c:v>
+                </c:pt>
+                <c:pt idx="1">
+                  <c:v>2010</c:v>
+                </c:pt>
+                <c:pt idx="2">
+                  <c:v>2011</c:v>
+                </c:pt>
+                <c:pt idx="3">
+                  <c:v>2012</c:v>
+                </c:pt>
+                <c:pt idx="4">
+                  <c:v>2013</c:v>
+                </c:pt>
+                <c:pt idx="5">
+                  <c:v>2014</c:v>
+                </c:pt>
+                <c:pt idx="6">
+                  <c:v>2015</c:v>
+                </c:pt>
+                <c:pt idx="7">
+                  <c:v>2016</c:v>
+                </c:pt>
+                <c:pt idx="8">
+                  <c:v>2017</c:v>
+                </c:pt>
+                <c:pt idx="9">
+                  <c:v>2018</c:v>
+                </c:pt>
+                <c:pt idx="10">
+                  <c:v>2019</c:v>
+                </c:pt>
+                <c:pt idx="11">
+                  <c:v>2020</c:v>
+                </c:pt>
+                <c:pt idx="12">
+                  <c:v>2021</c:v>
+                </c:pt>
+                <c:pt idx="13">
+                  <c:v>2022</c:v>
+                </c:pt>
+                <c:pt idx="14">
+                  <c:v>2023</c:v>
+                </c:pt>
+              </c:numCache>
+            </c:numRef>
+          </c:cat>
+          <c:val>
+            <c:numRef>
+              <c:f>'CKD+ICDbyStage'!$C$15:$Q$15</c:f>
+              <c:numCache>
+                <c:formatCode>0.00</c:formatCode>
+                <c:ptCount val="15"/>
+                <c:pt idx="0">
+                  <c:v>85.333500000000001</c:v>
+                </c:pt>
+                <c:pt idx="1">
+                  <c:v>89.104399999999998</c:v>
+                </c:pt>
+                <c:pt idx="2">
+                  <c:v>83.257599999999996</c:v>
+                </c:pt>
+                <c:pt idx="3">
+                  <c:v>79.908299999999997</c:v>
+                </c:pt>
+                <c:pt idx="4">
+                  <c:v>82.521799999999999</c:v>
+                </c:pt>
+                <c:pt idx="5">
+                  <c:v>88.373000000000005</c:v>
+                </c:pt>
+                <c:pt idx="6">
+                  <c:v>87.177199999999999</c:v>
+                </c:pt>
+                <c:pt idx="7">
+                  <c:v>77.285899999999998</c:v>
+                </c:pt>
+                <c:pt idx="8">
+                  <c:v>81.022999999999996</c:v>
+                </c:pt>
+                <c:pt idx="9">
+                  <c:v>80.665499999999994</c:v>
+                </c:pt>
+                <c:pt idx="10">
+                  <c:v>78.570599999999999</c:v>
+                </c:pt>
+                <c:pt idx="11">
+                  <c:v>78.083100000000002</c:v>
+                </c:pt>
+                <c:pt idx="12">
+                  <c:v>75.752700000000004</c:v>
+                </c:pt>
+                <c:pt idx="13">
+                  <c:v>78.800799999999995</c:v>
+                </c:pt>
+                <c:pt idx="14">
+                  <c:v>79.137900000000002</c:v>
+                </c:pt>
+              </c:numCache>
+            </c:numRef>
+          </c:val>
+          <c:smooth val="0"/>
+          <c:extLst>
+            <c:ext xmlns:c16="http://schemas.microsoft.com/office/drawing/2014/chart" uri="{C3380CC4-5D6E-409C-BE32-E72D297353CC}">
+              <c16:uniqueId val="{00000001-D441-4359-97DF-2F4C53587EEB}"/>
+            </c:ext>
+          </c:extLst>
+        </c:ser>
+        <c:ser>
+          <c:idx val="14"/>
+          <c:order val="14"/>
+          <c:tx>
+            <c:strRef>
+              <c:f>'CKD+ICDbyStage'!$B$16</c:f>
+              <c:strCache>
+                <c:ptCount val="1"/>
+                <c:pt idx="0">
+                  <c:v>CKD Stage 5</c:v>
+                </c:pt>
+              </c:strCache>
+            </c:strRef>
+          </c:tx>
+          <c:spPr>
+            <a:ln w="44450" cap="rnd">
+              <a:solidFill>
+                <a:srgbClr val="B7B7B7"/>
+              </a:solidFill>
+              <a:round/>
+            </a:ln>
+            <a:effectLst/>
+          </c:spPr>
+          <c:marker>
+            <c:symbol val="circle"/>
+            <c:size val="5"/>
+            <c:spPr>
+              <a:solidFill>
+                <a:schemeClr val="accent3">
+                  <a:lumMod val="80000"/>
+                  <a:lumOff val="20000"/>
+                </a:schemeClr>
+              </a:solidFill>
+              <a:ln w="9525">
+                <a:solidFill>
+                  <a:schemeClr val="accent3">
+                    <a:lumMod val="80000"/>
+                    <a:lumOff val="20000"/>
+                  </a:schemeClr>
+                </a:solidFill>
+              </a:ln>
+              <a:effectLst/>
+            </c:spPr>
+          </c:marker>
+          <c:cat>
+            <c:numRef>
+              <c:f>'CKD+ICDbyStage'!$C$1:$Q$1</c:f>
+              <c:numCache>
+                <c:formatCode>General</c:formatCode>
+                <c:ptCount val="15"/>
+                <c:pt idx="0">
+                  <c:v>2009</c:v>
+                </c:pt>
+                <c:pt idx="1">
+                  <c:v>2010</c:v>
+                </c:pt>
+                <c:pt idx="2">
+                  <c:v>2011</c:v>
+                </c:pt>
+                <c:pt idx="3">
+                  <c:v>2012</c:v>
+                </c:pt>
+                <c:pt idx="4">
+                  <c:v>2013</c:v>
+                </c:pt>
+                <c:pt idx="5">
+                  <c:v>2014</c:v>
+                </c:pt>
+                <c:pt idx="6">
+                  <c:v>2015</c:v>
+                </c:pt>
+                <c:pt idx="7">
+                  <c:v>2016</c:v>
+                </c:pt>
+                <c:pt idx="8">
+                  <c:v>2017</c:v>
+                </c:pt>
+                <c:pt idx="9">
+                  <c:v>2018</c:v>
+                </c:pt>
+                <c:pt idx="10">
+                  <c:v>2019</c:v>
+                </c:pt>
+                <c:pt idx="11">
+                  <c:v>2020</c:v>
+                </c:pt>
+                <c:pt idx="12">
+                  <c:v>2021</c:v>
+                </c:pt>
+                <c:pt idx="13">
+                  <c:v>2022</c:v>
+                </c:pt>
+                <c:pt idx="14">
+                  <c:v>2023</c:v>
+                </c:pt>
+              </c:numCache>
+            </c:numRef>
+          </c:cat>
+          <c:val>
+            <c:numRef>
+              <c:f>'CKD+ICDbyStage'!$C$16:$Q$16</c:f>
+              <c:numCache>
+                <c:formatCode>0.00</c:formatCode>
+                <c:ptCount val="15"/>
+                <c:pt idx="0">
+                  <c:v>93.151499999999999</c:v>
+                </c:pt>
+                <c:pt idx="1">
+                  <c:v>89.966200000000001</c:v>
+                </c:pt>
+                <c:pt idx="2">
+                  <c:v>90.596100000000007</c:v>
+                </c:pt>
+                <c:pt idx="3">
+                  <c:v>90.263199999999998</c:v>
+                </c:pt>
+                <c:pt idx="4">
+                  <c:v>91.4255</c:v>
+                </c:pt>
+                <c:pt idx="5">
+                  <c:v>92.674800000000005</c:v>
+                </c:pt>
+                <c:pt idx="6">
+                  <c:v>88.237300000000005</c:v>
+                </c:pt>
+                <c:pt idx="7">
+                  <c:v>70.920199999999994</c:v>
+                </c:pt>
+                <c:pt idx="8">
+                  <c:v>79.796099999999996</c:v>
+                </c:pt>
+                <c:pt idx="9">
+                  <c:v>76.728800000000007</c:v>
+                </c:pt>
+                <c:pt idx="10">
+                  <c:v>78.743799999999993</c:v>
+                </c:pt>
+                <c:pt idx="11">
+                  <c:v>75.727900000000005</c:v>
+                </c:pt>
+                <c:pt idx="12">
+                  <c:v>79.851500000000001</c:v>
+                </c:pt>
+                <c:pt idx="13">
+                  <c:v>82.426599999999993</c:v>
+                </c:pt>
+                <c:pt idx="14">
+                  <c:v>78.137799999999999</c:v>
+                </c:pt>
+              </c:numCache>
+            </c:numRef>
+          </c:val>
+          <c:smooth val="0"/>
+          <c:extLst>
+            <c:ext xmlns:c16="http://schemas.microsoft.com/office/drawing/2014/chart" uri="{C3380CC4-5D6E-409C-BE32-E72D297353CC}">
+              <c16:uniqueId val="{00000002-D441-4359-97DF-2F4C53587EEB}"/>
+            </c:ext>
+          </c:extLst>
+        </c:ser>
+        <c:ser>
+          <c:idx val="15"/>
+          <c:order val="15"/>
+          <c:tx>
+            <c:strRef>
+              <c:f>'CKD+ICDbyStage'!$B$17</c:f>
+              <c:strCache>
+                <c:ptCount val="1"/>
+                <c:pt idx="0">
+                  <c:v>Overall</c:v>
+                </c:pt>
+              </c:strCache>
+            </c:strRef>
+          </c:tx>
+          <c:spPr>
+            <a:ln w="44450" cap="rnd">
+              <a:solidFill>
+                <a:schemeClr val="tx1"/>
+              </a:solidFill>
+              <a:prstDash val="sysDash"/>
+              <a:round/>
+            </a:ln>
+            <a:effectLst/>
+          </c:spPr>
+          <c:marker>
+            <c:symbol val="circle"/>
+            <c:size val="5"/>
+            <c:spPr>
+              <a:solidFill>
+                <a:schemeClr val="tx1"/>
+              </a:solidFill>
+              <a:ln w="9525">
+                <a:solidFill>
+                  <a:schemeClr val="tx1"/>
+                </a:solidFill>
+                <a:prstDash val="sysDash"/>
+              </a:ln>
+              <a:effectLst/>
+            </c:spPr>
+          </c:marker>
+          <c:cat>
+            <c:numRef>
+              <c:f>'CKD+ICDbyStage'!$C$1:$Q$1</c:f>
+              <c:numCache>
+                <c:formatCode>General</c:formatCode>
+                <c:ptCount val="15"/>
+                <c:pt idx="0">
+                  <c:v>2009</c:v>
+                </c:pt>
+                <c:pt idx="1">
+                  <c:v>2010</c:v>
+                </c:pt>
+                <c:pt idx="2">
+                  <c:v>2011</c:v>
+                </c:pt>
+                <c:pt idx="3">
+                  <c:v>2012</c:v>
+                </c:pt>
+                <c:pt idx="4">
+                  <c:v>2013</c:v>
+                </c:pt>
+                <c:pt idx="5">
+                  <c:v>2014</c:v>
+                </c:pt>
+                <c:pt idx="6">
+                  <c:v>2015</c:v>
+                </c:pt>
+                <c:pt idx="7">
+                  <c:v>2016</c:v>
+                </c:pt>
+                <c:pt idx="8">
+                  <c:v>2017</c:v>
+                </c:pt>
+                <c:pt idx="9">
+                  <c:v>2018</c:v>
+                </c:pt>
+                <c:pt idx="10">
+                  <c:v>2019</c:v>
+                </c:pt>
+                <c:pt idx="11">
+                  <c:v>2020</c:v>
+                </c:pt>
+                <c:pt idx="12">
+                  <c:v>2021</c:v>
+                </c:pt>
+                <c:pt idx="13">
+                  <c:v>2022</c:v>
+                </c:pt>
+                <c:pt idx="14">
+                  <c:v>2023</c:v>
+                </c:pt>
+              </c:numCache>
+            </c:numRef>
+          </c:cat>
+          <c:val>
+            <c:numRef>
+              <c:f>'CKD+ICDbyStage'!$C$17:$Q$17</c:f>
+              <c:numCache>
+                <c:formatCode>General</c:formatCode>
+                <c:ptCount val="15"/>
+                <c:pt idx="0">
+                  <c:v>29.73</c:v>
+                </c:pt>
+                <c:pt idx="1">
+                  <c:v>31.65</c:v>
+                </c:pt>
+                <c:pt idx="2">
+                  <c:v>34.69</c:v>
+                </c:pt>
+                <c:pt idx="3">
+                  <c:v>35.270000000000003</c:v>
+                </c:pt>
+                <c:pt idx="4">
+                  <c:v>36.46</c:v>
+                </c:pt>
+                <c:pt idx="5">
+                  <c:v>36.6</c:v>
+                </c:pt>
+                <c:pt idx="6">
+                  <c:v>37.76</c:v>
+                </c:pt>
+                <c:pt idx="7">
+                  <c:v>30.07</c:v>
+                </c:pt>
+                <c:pt idx="8">
+                  <c:v>30.18</c:v>
+                </c:pt>
+                <c:pt idx="9">
+                  <c:v>29.59</c:v>
+                </c:pt>
+                <c:pt idx="10">
+                  <c:v>28.53</c:v>
+                </c:pt>
+                <c:pt idx="11">
+                  <c:v>28.51</c:v>
+                </c:pt>
+                <c:pt idx="12">
+                  <c:v>32.14</c:v>
+                </c:pt>
+                <c:pt idx="13">
+                  <c:v>31.62</c:v>
+                </c:pt>
+                <c:pt idx="14">
+                  <c:v>30.73</c:v>
+                </c:pt>
+              </c:numCache>
+            </c:numRef>
+          </c:val>
+          <c:smooth val="0"/>
+          <c:extLst>
+            <c:ext xmlns:c16="http://schemas.microsoft.com/office/drawing/2014/chart" uri="{C3380CC4-5D6E-409C-BE32-E72D297353CC}">
+              <c16:uniqueId val="{00000003-D441-4359-97DF-2F4C53587EEB}"/>
+            </c:ext>
+          </c:extLst>
+        </c:ser>
+        <c:dLbls>
+          <c:showLegendKey val="0"/>
+          <c:showVal val="0"/>
+          <c:showCatName val="0"/>
+          <c:showSerName val="0"/>
+          <c:showPercent val="0"/>
+          <c:showBubbleSize val="0"/>
+        </c:dLbls>
+        <c:marker val="1"/>
+        <c:smooth val="0"/>
+        <c:axId val="1440548959"/>
+        <c:axId val="1440549919"/>
+        <c:extLst>
+          <c:ext xmlns:c15="http://schemas.microsoft.com/office/drawing/2012/chart" uri="{02D57815-91ED-43cb-92C2-25804820EDAC}">
+            <c15:filteredLineSeries>
+              <c15:ser>
+                <c:idx val="0"/>
+                <c:order val="0"/>
+                <c:tx>
+                  <c:strRef>
+                    <c:extLst>
+                      <c:ext uri="{02D57815-91ED-43cb-92C2-25804820EDAC}">
+                        <c15:formulaRef>
+                          <c15:sqref>'CKD+ICDbyStage'!$B$2</c15:sqref>
+                        </c15:formulaRef>
+                      </c:ext>
+                    </c:extLst>
+                    <c:strCache>
+                      <c:ptCount val="1"/>
+                      <c:pt idx="0">
+                        <c:v>Overall</c:v>
+                      </c:pt>
+                    </c:strCache>
+                  </c:strRef>
+                </c:tx>
+                <c:spPr>
+                  <a:ln w="28575" cap="rnd">
+                    <a:solidFill>
+                      <a:schemeClr val="accent1"/>
+                    </a:solidFill>
+                    <a:round/>
+                  </a:ln>
+                  <a:effectLst/>
+                </c:spPr>
+                <c:marker>
+                  <c:symbol val="none"/>
+                </c:marker>
+                <c:cat>
+                  <c:numRef>
+                    <c:extLst>
+                      <c:ext uri="{02D57815-91ED-43cb-92C2-25804820EDAC}">
+                        <c15:formulaRef>
+                          <c15:sqref>'CKD+ICDbyStage'!$C$1:$Q$1</c15:sqref>
+                        </c15:formulaRef>
+                      </c:ext>
+                    </c:extLst>
+                    <c:numCache>
+                      <c:formatCode>General</c:formatCode>
+                      <c:ptCount val="15"/>
+                      <c:pt idx="0">
+                        <c:v>2009</c:v>
+                      </c:pt>
+                      <c:pt idx="1">
+                        <c:v>2010</c:v>
+                      </c:pt>
+                      <c:pt idx="2">
+                        <c:v>2011</c:v>
+                      </c:pt>
+                      <c:pt idx="3">
+                        <c:v>2012</c:v>
+                      </c:pt>
+                      <c:pt idx="4">
+                        <c:v>2013</c:v>
+                      </c:pt>
+                      <c:pt idx="5">
+                        <c:v>2014</c:v>
+                      </c:pt>
+                      <c:pt idx="6">
+                        <c:v>2015</c:v>
+                      </c:pt>
+                      <c:pt idx="7">
+                        <c:v>2016</c:v>
+                      </c:pt>
+                      <c:pt idx="8">
+                        <c:v>2017</c:v>
+                      </c:pt>
+                      <c:pt idx="9">
+                        <c:v>2018</c:v>
+                      </c:pt>
+                      <c:pt idx="10">
+                        <c:v>2019</c:v>
+                      </c:pt>
+                      <c:pt idx="11">
+                        <c:v>2020</c:v>
+                      </c:pt>
+                      <c:pt idx="12">
+                        <c:v>2021</c:v>
+                      </c:pt>
+                      <c:pt idx="13">
+                        <c:v>2022</c:v>
+                      </c:pt>
+                      <c:pt idx="14">
+                        <c:v>2023</c:v>
+                      </c:pt>
+                    </c:numCache>
+                  </c:numRef>
+                </c:cat>
+                <c:val>
+                  <c:numRef>
+                    <c:extLst>
+                      <c:ext uri="{02D57815-91ED-43cb-92C2-25804820EDAC}">
+                        <c15:formulaRef>
+                          <c15:sqref>'CKD+ICDbyStage'!$C$2:$Q$2</c15:sqref>
+                        </c15:formulaRef>
+                      </c:ext>
+                    </c:extLst>
+                    <c:numCache>
+                      <c:formatCode>General</c:formatCode>
+                      <c:ptCount val="15"/>
+                      <c:pt idx="0">
+                        <c:v>31.92</c:v>
+                      </c:pt>
+                      <c:pt idx="1">
+                        <c:v>33.619999999999997</c:v>
+                      </c:pt>
+                      <c:pt idx="2">
+                        <c:v>36.68</c:v>
+                      </c:pt>
+                      <c:pt idx="3">
+                        <c:v>37.28</c:v>
+                      </c:pt>
+                      <c:pt idx="4">
+                        <c:v>38.19</c:v>
+                      </c:pt>
+                      <c:pt idx="5">
+                        <c:v>38.57</c:v>
+                      </c:pt>
+                      <c:pt idx="6">
+                        <c:v>39.729999999999997</c:v>
+                      </c:pt>
+                      <c:pt idx="7">
+                        <c:v>31.7</c:v>
+                      </c:pt>
+                      <c:pt idx="8">
+                        <c:v>31.95</c:v>
+                      </c:pt>
+                      <c:pt idx="9">
+                        <c:v>32.22</c:v>
+                      </c:pt>
+                      <c:pt idx="10">
+                        <c:v>32.020000000000003</c:v>
+                      </c:pt>
+                      <c:pt idx="11">
+                        <c:v>30.05</c:v>
+                      </c:pt>
+                      <c:pt idx="12">
+                        <c:v>36.04</c:v>
+                      </c:pt>
+                      <c:pt idx="13">
+                        <c:v>35.340000000000003</c:v>
+                      </c:pt>
+                      <c:pt idx="14">
+                        <c:v>35.15</c:v>
+                      </c:pt>
+                    </c:numCache>
+                  </c:numRef>
+                </c:val>
+                <c:smooth val="0"/>
+                <c:extLst>
+                  <c:ext xmlns:c16="http://schemas.microsoft.com/office/drawing/2014/chart" uri="{C3380CC4-5D6E-409C-BE32-E72D297353CC}">
+                    <c16:uniqueId val="{00000004-D441-4359-97DF-2F4C53587EEB}"/>
+                  </c:ext>
+                </c:extLst>
+              </c15:ser>
+            </c15:filteredLineSeries>
+            <c15:filteredLineSeries>
+              <c15:ser>
+                <c:idx val="1"/>
+                <c:order val="1"/>
+                <c:tx>
+                  <c:strRef>
+                    <c:extLst xmlns:c15="http://schemas.microsoft.com/office/drawing/2012/chart">
+                      <c:ext xmlns:c15="http://schemas.microsoft.com/office/drawing/2012/chart" uri="{02D57815-91ED-43cb-92C2-25804820EDAC}">
+                        <c15:formulaRef>
+                          <c15:sqref>'CKD+ICDbyStage'!$B$3</c15:sqref>
+                        </c15:formulaRef>
+                      </c:ext>
+                    </c:extLst>
+                    <c:strCache>
+                      <c:ptCount val="1"/>
+                      <c:pt idx="0">
+                        <c:v>Overall</c:v>
+                      </c:pt>
+                    </c:strCache>
+                  </c:strRef>
+                </c:tx>
+                <c:spPr>
+                  <a:ln w="28575" cap="rnd">
+                    <a:solidFill>
+                      <a:schemeClr val="accent2"/>
+                    </a:solidFill>
+                    <a:round/>
+                  </a:ln>
+                  <a:effectLst/>
+                </c:spPr>
+                <c:marker>
+                  <c:symbol val="none"/>
+                </c:marker>
+                <c:cat>
+                  <c:numRef>
+                    <c:extLst xmlns:c15="http://schemas.microsoft.com/office/drawing/2012/chart">
+                      <c:ext xmlns:c15="http://schemas.microsoft.com/office/drawing/2012/chart" uri="{02D57815-91ED-43cb-92C2-25804820EDAC}">
+                        <c15:formulaRef>
+                          <c15:sqref>'CKD+ICDbyStage'!$C$1:$Q$1</c15:sqref>
+                        </c15:formulaRef>
+                      </c:ext>
+                    </c:extLst>
+                    <c:numCache>
+                      <c:formatCode>General</c:formatCode>
+                      <c:ptCount val="15"/>
+                      <c:pt idx="0">
+                        <c:v>2009</c:v>
+                      </c:pt>
+                      <c:pt idx="1">
+                        <c:v>2010</c:v>
+                      </c:pt>
+                      <c:pt idx="2">
+                        <c:v>2011</c:v>
+                      </c:pt>
+                      <c:pt idx="3">
+                        <c:v>2012</c:v>
+                      </c:pt>
+                      <c:pt idx="4">
+                        <c:v>2013</c:v>
+                      </c:pt>
+                      <c:pt idx="5">
+                        <c:v>2014</c:v>
+                      </c:pt>
+                      <c:pt idx="6">
+                        <c:v>2015</c:v>
+                      </c:pt>
+                      <c:pt idx="7">
+                        <c:v>2016</c:v>
+                      </c:pt>
+                      <c:pt idx="8">
+                        <c:v>2017</c:v>
+                      </c:pt>
+                      <c:pt idx="9">
+                        <c:v>2018</c:v>
+                      </c:pt>
+                      <c:pt idx="10">
+                        <c:v>2019</c:v>
+                      </c:pt>
+                      <c:pt idx="11">
+                        <c:v>2020</c:v>
+                      </c:pt>
+                      <c:pt idx="12">
+                        <c:v>2021</c:v>
+                      </c:pt>
+                      <c:pt idx="13">
+                        <c:v>2022</c:v>
+                      </c:pt>
+                      <c:pt idx="14">
+                        <c:v>2023</c:v>
+                      </c:pt>
+                    </c:numCache>
+                  </c:numRef>
+                </c:cat>
+                <c:val>
+                  <c:numRef>
+                    <c:extLst xmlns:c15="http://schemas.microsoft.com/office/drawing/2012/chart">
+                      <c:ext xmlns:c15="http://schemas.microsoft.com/office/drawing/2012/chart" uri="{02D57815-91ED-43cb-92C2-25804820EDAC}">
+                        <c15:formulaRef>
+                          <c15:sqref>'CKD+ICDbyStage'!$C$3:$Q$3</c15:sqref>
+                        </c15:formulaRef>
+                      </c:ext>
+                    </c:extLst>
+                    <c:numCache>
+                      <c:formatCode>General</c:formatCode>
+                      <c:ptCount val="15"/>
+                      <c:pt idx="0">
+                        <c:v>18447</c:v>
+                      </c:pt>
+                      <c:pt idx="1">
+                        <c:v>18713</c:v>
+                      </c:pt>
+                      <c:pt idx="2">
+                        <c:v>19036</c:v>
+                      </c:pt>
+                      <c:pt idx="3">
+                        <c:v>19740</c:v>
+                      </c:pt>
+                      <c:pt idx="4">
+                        <c:v>19145</c:v>
+                      </c:pt>
+                      <c:pt idx="5">
+                        <c:v>18947</c:v>
+                      </c:pt>
+                      <c:pt idx="6">
+                        <c:v>18952</c:v>
+                      </c:pt>
+                      <c:pt idx="7">
+                        <c:v>15875</c:v>
+                      </c:pt>
+                      <c:pt idx="8">
+                        <c:v>17097</c:v>
+                      </c:pt>
+                      <c:pt idx="9">
+                        <c:v>16220</c:v>
+                      </c:pt>
+                      <c:pt idx="10">
+                        <c:v>16064</c:v>
+                      </c:pt>
+                      <c:pt idx="11">
+                        <c:v>14683</c:v>
+                      </c:pt>
+                      <c:pt idx="12">
+                        <c:v>17271</c:v>
+                      </c:pt>
+                      <c:pt idx="13">
+                        <c:v>15748</c:v>
+                      </c:pt>
+                      <c:pt idx="14">
+                        <c:v>14444</c:v>
+                      </c:pt>
+                    </c:numCache>
+                  </c:numRef>
+                </c:val>
+                <c:smooth val="0"/>
+                <c:extLst xmlns:c15="http://schemas.microsoft.com/office/drawing/2012/chart">
+                  <c:ext xmlns:c16="http://schemas.microsoft.com/office/drawing/2014/chart" uri="{C3380CC4-5D6E-409C-BE32-E72D297353CC}">
+                    <c16:uniqueId val="{00000005-D441-4359-97DF-2F4C53587EEB}"/>
+                  </c:ext>
+                </c:extLst>
+              </c15:ser>
+            </c15:filteredLineSeries>
+            <c15:filteredLineSeries>
+              <c15:ser>
+                <c:idx val="2"/>
+                <c:order val="2"/>
+                <c:tx>
+                  <c:strRef>
+                    <c:extLst xmlns:c15="http://schemas.microsoft.com/office/drawing/2012/chart">
+                      <c:ext xmlns:c15="http://schemas.microsoft.com/office/drawing/2012/chart" uri="{02D57815-91ED-43cb-92C2-25804820EDAC}">
+                        <c15:formulaRef>
+                          <c15:sqref>'CKD+ICDbyStage'!$B$4</c15:sqref>
+                        </c15:formulaRef>
+                      </c:ext>
+                    </c:extLst>
+                    <c:strCache>
+                      <c:ptCount val="1"/>
+                      <c:pt idx="0">
+                        <c:v>Overall</c:v>
+                      </c:pt>
+                    </c:strCache>
+                  </c:strRef>
+                </c:tx>
+                <c:spPr>
+                  <a:ln w="28575" cap="rnd">
+                    <a:solidFill>
+                      <a:schemeClr val="accent3"/>
+                    </a:solidFill>
+                    <a:round/>
+                  </a:ln>
+                  <a:effectLst/>
+                </c:spPr>
+                <c:marker>
+                  <c:symbol val="none"/>
+                </c:marker>
+                <c:cat>
+                  <c:numRef>
+                    <c:extLst xmlns:c15="http://schemas.microsoft.com/office/drawing/2012/chart">
+                      <c:ext xmlns:c15="http://schemas.microsoft.com/office/drawing/2012/chart" uri="{02D57815-91ED-43cb-92C2-25804820EDAC}">
+                        <c15:formulaRef>
+                          <c15:sqref>'CKD+ICDbyStage'!$C$1:$Q$1</c15:sqref>
+                        </c15:formulaRef>
+                      </c:ext>
+                    </c:extLst>
+                    <c:numCache>
+                      <c:formatCode>General</c:formatCode>
+                      <c:ptCount val="15"/>
+                      <c:pt idx="0">
+                        <c:v>2009</c:v>
+                      </c:pt>
+                      <c:pt idx="1">
+                        <c:v>2010</c:v>
+                      </c:pt>
+                      <c:pt idx="2">
+                        <c:v>2011</c:v>
+                      </c:pt>
+                      <c:pt idx="3">
+                        <c:v>2012</c:v>
+                      </c:pt>
+                      <c:pt idx="4">
+                        <c:v>2013</c:v>
+                      </c:pt>
+                      <c:pt idx="5">
+                        <c:v>2014</c:v>
+                      </c:pt>
+                      <c:pt idx="6">
+                        <c:v>2015</c:v>
+                      </c:pt>
+                      <c:pt idx="7">
+                        <c:v>2016</c:v>
+                      </c:pt>
+                      <c:pt idx="8">
+                        <c:v>2017</c:v>
+                      </c:pt>
+                      <c:pt idx="9">
+                        <c:v>2018</c:v>
+                      </c:pt>
+                      <c:pt idx="10">
+                        <c:v>2019</c:v>
+                      </c:pt>
+                      <c:pt idx="11">
+                        <c:v>2020</c:v>
+                      </c:pt>
+                      <c:pt idx="12">
+                        <c:v>2021</c:v>
+                      </c:pt>
+                      <c:pt idx="13">
+                        <c:v>2022</c:v>
+                      </c:pt>
+                      <c:pt idx="14">
+                        <c:v>2023</c:v>
+                      </c:pt>
+                    </c:numCache>
+                  </c:numRef>
+                </c:cat>
+                <c:val>
+                  <c:numRef>
+                    <c:extLst xmlns:c15="http://schemas.microsoft.com/office/drawing/2012/chart">
+                      <c:ext xmlns:c15="http://schemas.microsoft.com/office/drawing/2012/chart" uri="{02D57815-91ED-43cb-92C2-25804820EDAC}">
+                        <c15:formulaRef>
+                          <c15:sqref>'CKD+ICDbyStage'!$C$4:$Q$4</c15:sqref>
+                        </c15:formulaRef>
+                      </c:ext>
+                    </c:extLst>
+                    <c:numCache>
+                      <c:formatCode>General</c:formatCode>
+                      <c:ptCount val="15"/>
+                      <c:pt idx="0">
+                        <c:v>57797</c:v>
+                      </c:pt>
+                      <c:pt idx="1">
+                        <c:v>55667</c:v>
+                      </c:pt>
+                      <c:pt idx="2">
+                        <c:v>51900</c:v>
+                      </c:pt>
+                      <c:pt idx="3">
+                        <c:v>52948</c:v>
+                      </c:pt>
+                      <c:pt idx="4">
+                        <c:v>50135</c:v>
+                      </c:pt>
+                      <c:pt idx="5">
+                        <c:v>49129</c:v>
+                      </c:pt>
+                      <c:pt idx="6">
+                        <c:v>47698</c:v>
+                      </c:pt>
+                      <c:pt idx="7">
+                        <c:v>50074</c:v>
+                      </c:pt>
+                      <c:pt idx="8">
+                        <c:v>53518</c:v>
+                      </c:pt>
+                      <c:pt idx="9">
+                        <c:v>50341</c:v>
+                      </c:pt>
+                      <c:pt idx="10">
+                        <c:v>50173</c:v>
+                      </c:pt>
+                      <c:pt idx="11">
+                        <c:v>48864</c:v>
+                      </c:pt>
+                      <c:pt idx="12">
+                        <c:v>47920</c:v>
+                      </c:pt>
+                      <c:pt idx="13">
+                        <c:v>44558</c:v>
+                      </c:pt>
+                      <c:pt idx="14">
+                        <c:v>41097</c:v>
+                      </c:pt>
+                    </c:numCache>
+                  </c:numRef>
+                </c:val>
+                <c:smooth val="0"/>
+                <c:extLst xmlns:c15="http://schemas.microsoft.com/office/drawing/2012/chart">
+                  <c:ext xmlns:c16="http://schemas.microsoft.com/office/drawing/2014/chart" uri="{C3380CC4-5D6E-409C-BE32-E72D297353CC}">
+                    <c16:uniqueId val="{00000006-D441-4359-97DF-2F4C53587EEB}"/>
+                  </c:ext>
+                </c:extLst>
+              </c15:ser>
+            </c15:filteredLineSeries>
+            <c15:filteredLineSeries>
+              <c15:ser>
+                <c:idx val="3"/>
+                <c:order val="3"/>
+                <c:tx>
+                  <c:strRef>
+                    <c:extLst xmlns:c15="http://schemas.microsoft.com/office/drawing/2012/chart">
+                      <c:ext xmlns:c15="http://schemas.microsoft.com/office/drawing/2012/chart" uri="{02D57815-91ED-43cb-92C2-25804820EDAC}">
+                        <c15:formulaRef>
+                          <c15:sqref>'CKD+ICDbyStage'!$B$5</c15:sqref>
+                        </c15:formulaRef>
+                      </c:ext>
+                    </c:extLst>
+                    <c:strCache>
+                      <c:ptCount val="1"/>
+                      <c:pt idx="0">
+                        <c:v>CKD Stage 3</c:v>
+                      </c:pt>
+                    </c:strCache>
+                  </c:strRef>
+                </c:tx>
+                <c:spPr>
+                  <a:ln w="28575" cap="rnd">
+                    <a:solidFill>
+                      <a:schemeClr val="accent4"/>
+                    </a:solidFill>
+                    <a:round/>
+                  </a:ln>
+                  <a:effectLst/>
+                </c:spPr>
+                <c:marker>
+                  <c:symbol val="circle"/>
+                  <c:size val="5"/>
+                  <c:spPr>
+                    <a:solidFill>
+                      <a:schemeClr val="accent4"/>
+                    </a:solidFill>
+                    <a:ln w="9525">
+                      <a:solidFill>
+                        <a:schemeClr val="accent4"/>
+                      </a:solidFill>
+                    </a:ln>
+                    <a:effectLst/>
+                  </c:spPr>
+                </c:marker>
+                <c:cat>
+                  <c:numRef>
+                    <c:extLst xmlns:c15="http://schemas.microsoft.com/office/drawing/2012/chart">
+                      <c:ext xmlns:c15="http://schemas.microsoft.com/office/drawing/2012/chart" uri="{02D57815-91ED-43cb-92C2-25804820EDAC}">
+                        <c15:formulaRef>
+                          <c15:sqref>'CKD+ICDbyStage'!$C$1:$Q$1</c15:sqref>
+                        </c15:formulaRef>
+                      </c:ext>
+                    </c:extLst>
+                    <c:numCache>
+                      <c:formatCode>General</c:formatCode>
+                      <c:ptCount val="15"/>
+                      <c:pt idx="0">
+                        <c:v>2009</c:v>
+                      </c:pt>
+                      <c:pt idx="1">
+                        <c:v>2010</c:v>
+                      </c:pt>
+                      <c:pt idx="2">
+                        <c:v>2011</c:v>
+                      </c:pt>
+                      <c:pt idx="3">
+                        <c:v>2012</c:v>
+                      </c:pt>
+                      <c:pt idx="4">
+                        <c:v>2013</c:v>
+                      </c:pt>
+                      <c:pt idx="5">
+                        <c:v>2014</c:v>
+                      </c:pt>
+                      <c:pt idx="6">
+                        <c:v>2015</c:v>
+                      </c:pt>
+                      <c:pt idx="7">
+                        <c:v>2016</c:v>
+                      </c:pt>
+                      <c:pt idx="8">
+                        <c:v>2017</c:v>
+                      </c:pt>
+                      <c:pt idx="9">
+                        <c:v>2018</c:v>
+                      </c:pt>
+                      <c:pt idx="10">
+                        <c:v>2019</c:v>
+                      </c:pt>
+                      <c:pt idx="11">
+                        <c:v>2020</c:v>
+                      </c:pt>
+                      <c:pt idx="12">
+                        <c:v>2021</c:v>
+                      </c:pt>
+                      <c:pt idx="13">
+                        <c:v>2022</c:v>
+                      </c:pt>
+                      <c:pt idx="14">
+                        <c:v>2023</c:v>
+                      </c:pt>
+                    </c:numCache>
+                  </c:numRef>
+                </c:cat>
+                <c:val>
+                  <c:numRef>
+                    <c:extLst xmlns:c15="http://schemas.microsoft.com/office/drawing/2012/chart">
+                      <c:ext xmlns:c15="http://schemas.microsoft.com/office/drawing/2012/chart" uri="{02D57815-91ED-43cb-92C2-25804820EDAC}">
+                        <c15:formulaRef>
+                          <c15:sqref>'CKD+ICDbyStage'!$C$5:$Q$5</c15:sqref>
+                        </c15:formulaRef>
+                      </c:ext>
+                    </c:extLst>
+                    <c:numCache>
+                      <c:formatCode>General</c:formatCode>
+                      <c:ptCount val="15"/>
+                      <c:pt idx="0">
+                        <c:v>28.41</c:v>
+                      </c:pt>
+                      <c:pt idx="1">
+                        <c:v>29.99</c:v>
+                      </c:pt>
+                      <c:pt idx="2">
+                        <c:v>33.15</c:v>
+                      </c:pt>
+                      <c:pt idx="3">
+                        <c:v>33.92</c:v>
+                      </c:pt>
+                      <c:pt idx="4">
+                        <c:v>34.630000000000003</c:v>
+                      </c:pt>
+                      <c:pt idx="5">
+                        <c:v>34.950000000000003</c:v>
+                      </c:pt>
+                      <c:pt idx="6">
+                        <c:v>35.869999999999997</c:v>
+                      </c:pt>
+                      <c:pt idx="7">
+                        <c:v>28.44</c:v>
+                      </c:pt>
+                      <c:pt idx="8">
+                        <c:v>28.65</c:v>
+                      </c:pt>
+                      <c:pt idx="9">
+                        <c:v>28.9</c:v>
+                      </c:pt>
+                      <c:pt idx="10">
+                        <c:v>28.68</c:v>
+                      </c:pt>
+                      <c:pt idx="11">
+                        <c:v>26.6</c:v>
+                      </c:pt>
+                      <c:pt idx="12">
+                        <c:v>32.770000000000003</c:v>
+                      </c:pt>
+                      <c:pt idx="13">
+                        <c:v>32.119999999999997</c:v>
+                      </c:pt>
+                      <c:pt idx="14">
+                        <c:v>31.96</c:v>
+                      </c:pt>
+                    </c:numCache>
+                  </c:numRef>
+                </c:val>
+                <c:smooth val="0"/>
+                <c:extLst xmlns:c15="http://schemas.microsoft.com/office/drawing/2012/chart">
+                  <c:ext xmlns:c16="http://schemas.microsoft.com/office/drawing/2014/chart" uri="{C3380CC4-5D6E-409C-BE32-E72D297353CC}">
+                    <c16:uniqueId val="{00000007-D441-4359-97DF-2F4C53587EEB}"/>
+                  </c:ext>
+                </c:extLst>
+              </c15:ser>
+            </c15:filteredLineSeries>
+            <c15:filteredLineSeries>
+              <c15:ser>
+                <c:idx val="4"/>
+                <c:order val="4"/>
+                <c:tx>
+                  <c:strRef>
+                    <c:extLst xmlns:c15="http://schemas.microsoft.com/office/drawing/2012/chart">
+                      <c:ext xmlns:c15="http://schemas.microsoft.com/office/drawing/2012/chart" uri="{02D57815-91ED-43cb-92C2-25804820EDAC}">
+                        <c15:formulaRef>
+                          <c15:sqref>'CKD+ICDbyStage'!$B$6</c15:sqref>
+                        </c15:formulaRef>
+                      </c:ext>
+                    </c:extLst>
+                    <c:strCache>
+                      <c:ptCount val="1"/>
+                      <c:pt idx="0">
+                        <c:v>CKD Stage 3</c:v>
+                      </c:pt>
+                    </c:strCache>
+                  </c:strRef>
+                </c:tx>
+                <c:spPr>
+                  <a:ln w="28575" cap="rnd">
+                    <a:solidFill>
+                      <a:schemeClr val="accent5"/>
+                    </a:solidFill>
+                    <a:round/>
+                  </a:ln>
+                  <a:effectLst/>
+                </c:spPr>
+                <c:marker>
+                  <c:symbol val="none"/>
+                </c:marker>
+                <c:cat>
+                  <c:numRef>
+                    <c:extLst xmlns:c15="http://schemas.microsoft.com/office/drawing/2012/chart">
+                      <c:ext xmlns:c15="http://schemas.microsoft.com/office/drawing/2012/chart" uri="{02D57815-91ED-43cb-92C2-25804820EDAC}">
+                        <c15:formulaRef>
+                          <c15:sqref>'CKD+ICDbyStage'!$C$1:$Q$1</c15:sqref>
+                        </c15:formulaRef>
+                      </c:ext>
+                    </c:extLst>
+                    <c:numCache>
+                      <c:formatCode>General</c:formatCode>
+                      <c:ptCount val="15"/>
+                      <c:pt idx="0">
+                        <c:v>2009</c:v>
+                      </c:pt>
+                      <c:pt idx="1">
+                        <c:v>2010</c:v>
+                      </c:pt>
+                      <c:pt idx="2">
+                        <c:v>2011</c:v>
+                      </c:pt>
+                      <c:pt idx="3">
+                        <c:v>2012</c:v>
+                      </c:pt>
+                      <c:pt idx="4">
+                        <c:v>2013</c:v>
+                      </c:pt>
+                      <c:pt idx="5">
+                        <c:v>2014</c:v>
+                      </c:pt>
+                      <c:pt idx="6">
+                        <c:v>2015</c:v>
+                      </c:pt>
+                      <c:pt idx="7">
+                        <c:v>2016</c:v>
+                      </c:pt>
+                      <c:pt idx="8">
+                        <c:v>2017</c:v>
+                      </c:pt>
+                      <c:pt idx="9">
+                        <c:v>2018</c:v>
+                      </c:pt>
+                      <c:pt idx="10">
+                        <c:v>2019</c:v>
+                      </c:pt>
+                      <c:pt idx="11">
+                        <c:v>2020</c:v>
+                      </c:pt>
+                      <c:pt idx="12">
+                        <c:v>2021</c:v>
+                      </c:pt>
+                      <c:pt idx="13">
+                        <c:v>2022</c:v>
+                      </c:pt>
+                      <c:pt idx="14">
+                        <c:v>2023</c:v>
+                      </c:pt>
+                    </c:numCache>
+                  </c:numRef>
+                </c:cat>
+                <c:val>
+                  <c:numRef>
+                    <c:extLst xmlns:c15="http://schemas.microsoft.com/office/drawing/2012/chart">
+                      <c:ext xmlns:c15="http://schemas.microsoft.com/office/drawing/2012/chart" uri="{02D57815-91ED-43cb-92C2-25804820EDAC}">
+                        <c15:formulaRef>
+                          <c15:sqref>'CKD+ICDbyStage'!$C$6:$Q$6</c15:sqref>
+                        </c15:formulaRef>
+                      </c:ext>
+                    </c:extLst>
+                    <c:numCache>
+                      <c:formatCode>General</c:formatCode>
+                      <c:ptCount val="15"/>
+                      <c:pt idx="0">
+                        <c:v>15364</c:v>
+                      </c:pt>
+                      <c:pt idx="1">
+                        <c:v>15588</c:v>
+                      </c:pt>
+                      <c:pt idx="2">
+                        <c:v>16016</c:v>
+                      </c:pt>
+                      <c:pt idx="3">
+                        <c:v>16722</c:v>
+                      </c:pt>
+                      <c:pt idx="4">
+                        <c:v>16112</c:v>
+                      </c:pt>
+                      <c:pt idx="5">
+                        <c:v>15915</c:v>
+                      </c:pt>
+                      <c:pt idx="6">
+                        <c:v>15764</c:v>
+                      </c:pt>
+                      <c:pt idx="7">
+                        <c:v>13278</c:v>
+                      </c:pt>
+                      <c:pt idx="8">
+                        <c:v>14316</c:v>
+                      </c:pt>
+                      <c:pt idx="9">
+                        <c:v>13566</c:v>
+                      </c:pt>
+                      <c:pt idx="10">
+                        <c:v>13426</c:v>
+                      </c:pt>
+                      <c:pt idx="11">
+                        <c:v>12079</c:v>
+                      </c:pt>
+                      <c:pt idx="12">
+                        <c:v>14561</c:v>
+                      </c:pt>
+                      <c:pt idx="13">
+                        <c:v>13271</c:v>
+                      </c:pt>
+                      <c:pt idx="14">
+                        <c:v>12169</c:v>
+                      </c:pt>
+                    </c:numCache>
+                  </c:numRef>
+                </c:val>
+                <c:smooth val="0"/>
+                <c:extLst xmlns:c15="http://schemas.microsoft.com/office/drawing/2012/chart">
+                  <c:ext xmlns:c16="http://schemas.microsoft.com/office/drawing/2014/chart" uri="{C3380CC4-5D6E-409C-BE32-E72D297353CC}">
+                    <c16:uniqueId val="{00000008-D441-4359-97DF-2F4C53587EEB}"/>
+                  </c:ext>
+                </c:extLst>
+              </c15:ser>
+            </c15:filteredLineSeries>
+            <c15:filteredLineSeries>
+              <c15:ser>
+                <c:idx val="5"/>
+                <c:order val="5"/>
+                <c:tx>
+                  <c:strRef>
+                    <c:extLst xmlns:c15="http://schemas.microsoft.com/office/drawing/2012/chart">
+                      <c:ext xmlns:c15="http://schemas.microsoft.com/office/drawing/2012/chart" uri="{02D57815-91ED-43cb-92C2-25804820EDAC}">
+                        <c15:formulaRef>
+                          <c15:sqref>'CKD+ICDbyStage'!$B$7</c15:sqref>
+                        </c15:formulaRef>
+                      </c:ext>
+                    </c:extLst>
+                    <c:strCache>
+                      <c:ptCount val="1"/>
+                      <c:pt idx="0">
+                        <c:v>CKD Stage 3</c:v>
+                      </c:pt>
+                    </c:strCache>
+                  </c:strRef>
+                </c:tx>
+                <c:spPr>
+                  <a:ln w="28575" cap="rnd">
+                    <a:solidFill>
+                      <a:schemeClr val="accent6"/>
+                    </a:solidFill>
+                    <a:round/>
+                  </a:ln>
+                  <a:effectLst/>
+                </c:spPr>
+                <c:marker>
+                  <c:symbol val="none"/>
+                </c:marker>
+                <c:cat>
+                  <c:numRef>
+                    <c:extLst xmlns:c15="http://schemas.microsoft.com/office/drawing/2012/chart">
+                      <c:ext xmlns:c15="http://schemas.microsoft.com/office/drawing/2012/chart" uri="{02D57815-91ED-43cb-92C2-25804820EDAC}">
+                        <c15:formulaRef>
+                          <c15:sqref>'CKD+ICDbyStage'!$C$1:$Q$1</c15:sqref>
+                        </c15:formulaRef>
+                      </c:ext>
+                    </c:extLst>
+                    <c:numCache>
+                      <c:formatCode>General</c:formatCode>
+                      <c:ptCount val="15"/>
+                      <c:pt idx="0">
+                        <c:v>2009</c:v>
+                      </c:pt>
+                      <c:pt idx="1">
+                        <c:v>2010</c:v>
+                      </c:pt>
+                      <c:pt idx="2">
+                        <c:v>2011</c:v>
+                      </c:pt>
+                      <c:pt idx="3">
+                        <c:v>2012</c:v>
+                      </c:pt>
+                      <c:pt idx="4">
+                        <c:v>2013</c:v>
+                      </c:pt>
+                      <c:pt idx="5">
+                        <c:v>2014</c:v>
+                      </c:pt>
+                      <c:pt idx="6">
+                        <c:v>2015</c:v>
+                      </c:pt>
+                      <c:pt idx="7">
+                        <c:v>2016</c:v>
+                      </c:pt>
+                      <c:pt idx="8">
+                        <c:v>2017</c:v>
+                      </c:pt>
+                      <c:pt idx="9">
+                        <c:v>2018</c:v>
+                      </c:pt>
+                      <c:pt idx="10">
+                        <c:v>2019</c:v>
+                      </c:pt>
+                      <c:pt idx="11">
+                        <c:v>2020</c:v>
+                      </c:pt>
+                      <c:pt idx="12">
+                        <c:v>2021</c:v>
+                      </c:pt>
+                      <c:pt idx="13">
+                        <c:v>2022</c:v>
+                      </c:pt>
+                      <c:pt idx="14">
+                        <c:v>2023</c:v>
+                      </c:pt>
+                    </c:numCache>
+                  </c:numRef>
+                </c:cat>
+                <c:val>
+                  <c:numRef>
+                    <c:extLst xmlns:c15="http://schemas.microsoft.com/office/drawing/2012/chart">
+                      <c:ext xmlns:c15="http://schemas.microsoft.com/office/drawing/2012/chart" uri="{02D57815-91ED-43cb-92C2-25804820EDAC}">
+                        <c15:formulaRef>
+                          <c15:sqref>'CKD+ICDbyStage'!$C$7:$Q$7</c15:sqref>
+                        </c15:formulaRef>
+                      </c:ext>
+                    </c:extLst>
+                    <c:numCache>
+                      <c:formatCode>General</c:formatCode>
+                      <c:ptCount val="15"/>
+                      <c:pt idx="0">
+                        <c:v>54088</c:v>
+                      </c:pt>
+                      <c:pt idx="1">
+                        <c:v>51972</c:v>
+                      </c:pt>
+                      <c:pt idx="2">
+                        <c:v>48308</c:v>
+                      </c:pt>
+                      <c:pt idx="3">
+                        <c:v>49299</c:v>
+                      </c:pt>
+                      <c:pt idx="4">
+                        <c:v>46528</c:v>
+                      </c:pt>
+                      <c:pt idx="5">
+                        <c:v>45540</c:v>
+                      </c:pt>
+                      <c:pt idx="6">
+                        <c:v>43944</c:v>
+                      </c:pt>
+                      <c:pt idx="7">
+                        <c:v>46695</c:v>
+                      </c:pt>
+                      <c:pt idx="8">
+                        <c:v>49974</c:v>
+                      </c:pt>
+                      <c:pt idx="9">
+                        <c:v>46943</c:v>
+                      </c:pt>
+                      <c:pt idx="10">
+                        <c:v>46818</c:v>
+                      </c:pt>
+                      <c:pt idx="11">
+                        <c:v>45417</c:v>
+                      </c:pt>
+                      <c:pt idx="12">
+                        <c:v>44436</c:v>
+                      </c:pt>
+                      <c:pt idx="13">
+                        <c:v>41313</c:v>
+                      </c:pt>
+                      <c:pt idx="14">
+                        <c:v>38081</c:v>
+                      </c:pt>
+                    </c:numCache>
+                  </c:numRef>
+                </c:val>
+                <c:smooth val="0"/>
+                <c:extLst xmlns:c15="http://schemas.microsoft.com/office/drawing/2012/chart">
+                  <c:ext xmlns:c16="http://schemas.microsoft.com/office/drawing/2014/chart" uri="{C3380CC4-5D6E-409C-BE32-E72D297353CC}">
+                    <c16:uniqueId val="{00000009-D441-4359-97DF-2F4C53587EEB}"/>
+                  </c:ext>
+                </c:extLst>
+              </c15:ser>
+            </c15:filteredLineSeries>
+            <c15:filteredLineSeries>
+              <c15:ser>
+                <c:idx val="6"/>
+                <c:order val="6"/>
+                <c:tx>
+                  <c:strRef>
+                    <c:extLst xmlns:c15="http://schemas.microsoft.com/office/drawing/2012/chart">
+                      <c:ext xmlns:c15="http://schemas.microsoft.com/office/drawing/2012/chart" uri="{02D57815-91ED-43cb-92C2-25804820EDAC}">
+                        <c15:formulaRef>
+                          <c15:sqref>'CKD+ICDbyStage'!$B$8</c15:sqref>
+                        </c15:formulaRef>
+                      </c:ext>
+                    </c:extLst>
+                    <c:strCache>
+                      <c:ptCount val="1"/>
+                      <c:pt idx="0">
+                        <c:v>CKD Stage 4</c:v>
+                      </c:pt>
+                    </c:strCache>
+                  </c:strRef>
+                </c:tx>
+                <c:spPr>
+                  <a:ln w="28575" cap="rnd">
+                    <a:solidFill>
+                      <a:schemeClr val="accent1">
+                        <a:lumMod val="60000"/>
+                      </a:schemeClr>
+                    </a:solidFill>
+                    <a:round/>
+                  </a:ln>
+                  <a:effectLst/>
+                </c:spPr>
+                <c:marker>
+                  <c:symbol val="circle"/>
+                  <c:size val="5"/>
+                  <c:spPr>
+                    <a:solidFill>
+                      <a:schemeClr val="accent1">
+                        <a:lumMod val="60000"/>
+                      </a:schemeClr>
+                    </a:solidFill>
+                    <a:ln w="9525">
+                      <a:solidFill>
+                        <a:schemeClr val="accent1">
+                          <a:lumMod val="60000"/>
+                        </a:schemeClr>
+                      </a:solidFill>
+                    </a:ln>
+                    <a:effectLst/>
+                  </c:spPr>
+                </c:marker>
+                <c:cat>
+                  <c:numRef>
+                    <c:extLst xmlns:c15="http://schemas.microsoft.com/office/drawing/2012/chart">
+                      <c:ext xmlns:c15="http://schemas.microsoft.com/office/drawing/2012/chart" uri="{02D57815-91ED-43cb-92C2-25804820EDAC}">
+                        <c15:formulaRef>
+                          <c15:sqref>'CKD+ICDbyStage'!$C$1:$Q$1</c15:sqref>
+                        </c15:formulaRef>
+                      </c:ext>
+                    </c:extLst>
+                    <c:numCache>
+                      <c:formatCode>General</c:formatCode>
+                      <c:ptCount val="15"/>
+                      <c:pt idx="0">
+                        <c:v>2009</c:v>
+                      </c:pt>
+                      <c:pt idx="1">
+                        <c:v>2010</c:v>
+                      </c:pt>
+                      <c:pt idx="2">
+                        <c:v>2011</c:v>
+                      </c:pt>
+                      <c:pt idx="3">
+                        <c:v>2012</c:v>
+                      </c:pt>
+                      <c:pt idx="4">
+                        <c:v>2013</c:v>
+                      </c:pt>
+                      <c:pt idx="5">
+                        <c:v>2014</c:v>
+                      </c:pt>
+                      <c:pt idx="6">
+                        <c:v>2015</c:v>
+                      </c:pt>
+                      <c:pt idx="7">
+                        <c:v>2016</c:v>
+                      </c:pt>
+                      <c:pt idx="8">
+                        <c:v>2017</c:v>
+                      </c:pt>
+                      <c:pt idx="9">
+                        <c:v>2018</c:v>
+                      </c:pt>
+                      <c:pt idx="10">
+                        <c:v>2019</c:v>
+                      </c:pt>
+                      <c:pt idx="11">
+                        <c:v>2020</c:v>
+                      </c:pt>
+                      <c:pt idx="12">
+                        <c:v>2021</c:v>
+                      </c:pt>
+                      <c:pt idx="13">
+                        <c:v>2022</c:v>
+                      </c:pt>
+                      <c:pt idx="14">
+                        <c:v>2023</c:v>
+                      </c:pt>
+                    </c:numCache>
+                  </c:numRef>
+                </c:cat>
+                <c:val>
+                  <c:numRef>
+                    <c:extLst xmlns:c15="http://schemas.microsoft.com/office/drawing/2012/chart">
+                      <c:ext xmlns:c15="http://schemas.microsoft.com/office/drawing/2012/chart" uri="{02D57815-91ED-43cb-92C2-25804820EDAC}">
+                        <c15:formulaRef>
+                          <c15:sqref>'CKD+ICDbyStage'!$C$8:$Q$8</c15:sqref>
+                        </c15:formulaRef>
+                      </c:ext>
+                    </c:extLst>
+                    <c:numCache>
+                      <c:formatCode>General</c:formatCode>
+                      <c:ptCount val="15"/>
+                      <c:pt idx="0">
+                        <c:v>81.16</c:v>
+                      </c:pt>
+                      <c:pt idx="1">
+                        <c:v>82.94</c:v>
+                      </c:pt>
+                      <c:pt idx="2">
+                        <c:v>81.84</c:v>
+                      </c:pt>
+                      <c:pt idx="3">
+                        <c:v>80.12</c:v>
+                      </c:pt>
+                      <c:pt idx="4">
+                        <c:v>81.400000000000006</c:v>
+                      </c:pt>
+                      <c:pt idx="5">
+                        <c:v>81.22</c:v>
+                      </c:pt>
+                      <c:pt idx="6">
+                        <c:v>83.2</c:v>
+                      </c:pt>
+                      <c:pt idx="7">
+                        <c:v>76.56</c:v>
+                      </c:pt>
+                      <c:pt idx="8">
+                        <c:v>77.83</c:v>
+                      </c:pt>
+                      <c:pt idx="9">
+                        <c:v>77.64</c:v>
+                      </c:pt>
+                      <c:pt idx="10">
+                        <c:v>78.11</c:v>
+                      </c:pt>
+                      <c:pt idx="11">
+                        <c:v>75.209999999999994</c:v>
+                      </c:pt>
+                      <c:pt idx="12">
+                        <c:v>78.33</c:v>
+                      </c:pt>
+                      <c:pt idx="13">
+                        <c:v>76.81</c:v>
+                      </c:pt>
+                      <c:pt idx="14">
+                        <c:v>75.290000000000006</c:v>
+                      </c:pt>
+                    </c:numCache>
+                  </c:numRef>
+                </c:val>
+                <c:smooth val="0"/>
+                <c:extLst xmlns:c15="http://schemas.microsoft.com/office/drawing/2012/chart">
+                  <c:ext xmlns:c16="http://schemas.microsoft.com/office/drawing/2014/chart" uri="{C3380CC4-5D6E-409C-BE32-E72D297353CC}">
+                    <c16:uniqueId val="{0000000A-D441-4359-97DF-2F4C53587EEB}"/>
+                  </c:ext>
+                </c:extLst>
+              </c15:ser>
+            </c15:filteredLineSeries>
+            <c15:filteredLineSeries>
+              <c15:ser>
+                <c:idx val="7"/>
+                <c:order val="7"/>
+                <c:tx>
+                  <c:strRef>
+                    <c:extLst xmlns:c15="http://schemas.microsoft.com/office/drawing/2012/chart">
+                      <c:ext xmlns:c15="http://schemas.microsoft.com/office/drawing/2012/chart" uri="{02D57815-91ED-43cb-92C2-25804820EDAC}">
+                        <c15:formulaRef>
+                          <c15:sqref>'CKD+ICDbyStage'!$B$9</c15:sqref>
+                        </c15:formulaRef>
+                      </c:ext>
+                    </c:extLst>
+                    <c:strCache>
+                      <c:ptCount val="1"/>
+                      <c:pt idx="0">
+                        <c:v>CKD Stage 4</c:v>
+                      </c:pt>
+                    </c:strCache>
+                  </c:strRef>
+                </c:tx>
+                <c:spPr>
+                  <a:ln w="28575" cap="rnd">
+                    <a:solidFill>
+                      <a:schemeClr val="accent2">
+                        <a:lumMod val="60000"/>
+                      </a:schemeClr>
+                    </a:solidFill>
+                    <a:round/>
+                  </a:ln>
+                  <a:effectLst/>
+                </c:spPr>
+                <c:marker>
+                  <c:symbol val="none"/>
+                </c:marker>
+                <c:cat>
+                  <c:numRef>
+                    <c:extLst xmlns:c15="http://schemas.microsoft.com/office/drawing/2012/chart">
+                      <c:ext xmlns:c15="http://schemas.microsoft.com/office/drawing/2012/chart" uri="{02D57815-91ED-43cb-92C2-25804820EDAC}">
+                        <c15:formulaRef>
+                          <c15:sqref>'CKD+ICDbyStage'!$C$1:$Q$1</c15:sqref>
+                        </c15:formulaRef>
+                      </c:ext>
+                    </c:extLst>
+                    <c:numCache>
+                      <c:formatCode>General</c:formatCode>
+                      <c:ptCount val="15"/>
+                      <c:pt idx="0">
+                        <c:v>2009</c:v>
+                      </c:pt>
+                      <c:pt idx="1">
+                        <c:v>2010</c:v>
+                      </c:pt>
+                      <c:pt idx="2">
+                        <c:v>2011</c:v>
+                      </c:pt>
+                      <c:pt idx="3">
+                        <c:v>2012</c:v>
+                      </c:pt>
+                      <c:pt idx="4">
+                        <c:v>2013</c:v>
+                      </c:pt>
+                      <c:pt idx="5">
+                        <c:v>2014</c:v>
+                      </c:pt>
+                      <c:pt idx="6">
+                        <c:v>2015</c:v>
+                      </c:pt>
+                      <c:pt idx="7">
+                        <c:v>2016</c:v>
+                      </c:pt>
+                      <c:pt idx="8">
+                        <c:v>2017</c:v>
+                      </c:pt>
+                      <c:pt idx="9">
+                        <c:v>2018</c:v>
+                      </c:pt>
+                      <c:pt idx="10">
+                        <c:v>2019</c:v>
+                      </c:pt>
+                      <c:pt idx="11">
+                        <c:v>2020</c:v>
+                      </c:pt>
+                      <c:pt idx="12">
+                        <c:v>2021</c:v>
+                      </c:pt>
+                      <c:pt idx="13">
+                        <c:v>2022</c:v>
+                      </c:pt>
+                      <c:pt idx="14">
+                        <c:v>2023</c:v>
+                      </c:pt>
+                    </c:numCache>
+                  </c:numRef>
+                </c:cat>
+                <c:val>
+                  <c:numRef>
+                    <c:extLst xmlns:c15="http://schemas.microsoft.com/office/drawing/2012/chart">
+                      <c:ext xmlns:c15="http://schemas.microsoft.com/office/drawing/2012/chart" uri="{02D57815-91ED-43cb-92C2-25804820EDAC}">
+                        <c15:formulaRef>
+                          <c15:sqref>'CKD+ICDbyStage'!$C$9:$Q$9</c15:sqref>
+                        </c15:formulaRef>
+                      </c:ext>
+                    </c:extLst>
+                    <c:numCache>
+                      <c:formatCode>General</c:formatCode>
+                      <c:ptCount val="15"/>
+                      <c:pt idx="0">
+                        <c:v>2365</c:v>
+                      </c:pt>
+                      <c:pt idx="1">
+                        <c:v>2396</c:v>
+                      </c:pt>
+                      <c:pt idx="2">
+                        <c:v>2244</c:v>
+                      </c:pt>
+                      <c:pt idx="3">
+                        <c:v>2228</c:v>
+                      </c:pt>
+                      <c:pt idx="4">
+                        <c:v>2193</c:v>
+                      </c:pt>
+                      <c:pt idx="5">
+                        <c:v>2124</c:v>
+                      </c:pt>
+                      <c:pt idx="6">
+                        <c:v>2298</c:v>
+                      </c:pt>
+                      <c:pt idx="7">
+                        <c:v>2182</c:v>
+                      </c:pt>
+                      <c:pt idx="8">
+                        <c:v>2341</c:v>
+                      </c:pt>
+                      <c:pt idx="9">
+                        <c:v>2226</c:v>
+                      </c:pt>
+                      <c:pt idx="10">
+                        <c:v>2220</c:v>
+                      </c:pt>
+                      <c:pt idx="11">
+                        <c:v>2206</c:v>
+                      </c:pt>
+                      <c:pt idx="12">
+                        <c:v>2299</c:v>
+                      </c:pt>
+                      <c:pt idx="13">
+                        <c:v>2097</c:v>
+                      </c:pt>
+                      <c:pt idx="14">
+                        <c:v>1920</c:v>
+                      </c:pt>
+                    </c:numCache>
+                  </c:numRef>
+                </c:val>
+                <c:smooth val="0"/>
+                <c:extLst xmlns:c15="http://schemas.microsoft.com/office/drawing/2012/chart">
+                  <c:ext xmlns:c16="http://schemas.microsoft.com/office/drawing/2014/chart" uri="{C3380CC4-5D6E-409C-BE32-E72D297353CC}">
+                    <c16:uniqueId val="{0000000B-D441-4359-97DF-2F4C53587EEB}"/>
+                  </c:ext>
+                </c:extLst>
+              </c15:ser>
+            </c15:filteredLineSeries>
+            <c15:filteredLineSeries>
+              <c15:ser>
+                <c:idx val="8"/>
+                <c:order val="8"/>
+                <c:tx>
+                  <c:strRef>
+                    <c:extLst xmlns:c15="http://schemas.microsoft.com/office/drawing/2012/chart">
+                      <c:ext xmlns:c15="http://schemas.microsoft.com/office/drawing/2012/chart" uri="{02D57815-91ED-43cb-92C2-25804820EDAC}">
+                        <c15:formulaRef>
+                          <c15:sqref>'CKD+ICDbyStage'!$B$10</c15:sqref>
+                        </c15:formulaRef>
+                      </c:ext>
+                    </c:extLst>
+                    <c:strCache>
+                      <c:ptCount val="1"/>
+                      <c:pt idx="0">
+                        <c:v>CKD Stage 4</c:v>
+                      </c:pt>
+                    </c:strCache>
+                  </c:strRef>
+                </c:tx>
+                <c:spPr>
+                  <a:ln w="28575" cap="rnd">
+                    <a:solidFill>
+                      <a:schemeClr val="accent3">
+                        <a:lumMod val="60000"/>
+                      </a:schemeClr>
+                    </a:solidFill>
+                    <a:round/>
+                  </a:ln>
+                  <a:effectLst/>
+                </c:spPr>
+                <c:marker>
+                  <c:symbol val="none"/>
+                </c:marker>
+                <c:cat>
+                  <c:numRef>
+                    <c:extLst xmlns:c15="http://schemas.microsoft.com/office/drawing/2012/chart">
+                      <c:ext xmlns:c15="http://schemas.microsoft.com/office/drawing/2012/chart" uri="{02D57815-91ED-43cb-92C2-25804820EDAC}">
+                        <c15:formulaRef>
+                          <c15:sqref>'CKD+ICDbyStage'!$C$1:$Q$1</c15:sqref>
+                        </c15:formulaRef>
+                      </c:ext>
+                    </c:extLst>
+                    <c:numCache>
+                      <c:formatCode>General</c:formatCode>
+                      <c:ptCount val="15"/>
+                      <c:pt idx="0">
+                        <c:v>2009</c:v>
+                      </c:pt>
+                      <c:pt idx="1">
+                        <c:v>2010</c:v>
+                      </c:pt>
+                      <c:pt idx="2">
+                        <c:v>2011</c:v>
+                      </c:pt>
+                      <c:pt idx="3">
+                        <c:v>2012</c:v>
+                      </c:pt>
+                      <c:pt idx="4">
+                        <c:v>2013</c:v>
+                      </c:pt>
+                      <c:pt idx="5">
+                        <c:v>2014</c:v>
+                      </c:pt>
+                      <c:pt idx="6">
+                        <c:v>2015</c:v>
+                      </c:pt>
+                      <c:pt idx="7">
+                        <c:v>2016</c:v>
+                      </c:pt>
+                      <c:pt idx="8">
+                        <c:v>2017</c:v>
+                      </c:pt>
+                      <c:pt idx="9">
+                        <c:v>2018</c:v>
+                      </c:pt>
+                      <c:pt idx="10">
+                        <c:v>2019</c:v>
+                      </c:pt>
+                      <c:pt idx="11">
+                        <c:v>2020</c:v>
+                      </c:pt>
+                      <c:pt idx="12">
+                        <c:v>2021</c:v>
+                      </c:pt>
+                      <c:pt idx="13">
+                        <c:v>2022</c:v>
+                      </c:pt>
+                      <c:pt idx="14">
+                        <c:v>2023</c:v>
+                      </c:pt>
+                    </c:numCache>
+                  </c:numRef>
+                </c:cat>
+                <c:val>
+                  <c:numRef>
+                    <c:extLst xmlns:c15="http://schemas.microsoft.com/office/drawing/2012/chart">
+                      <c:ext xmlns:c15="http://schemas.microsoft.com/office/drawing/2012/chart" uri="{02D57815-91ED-43cb-92C2-25804820EDAC}">
+                        <c15:formulaRef>
+                          <c15:sqref>'CKD+ICDbyStage'!$C$10:$Q$10</c15:sqref>
+                        </c15:formulaRef>
+                      </c:ext>
+                    </c:extLst>
+                    <c:numCache>
+                      <c:formatCode>General</c:formatCode>
+                      <c:ptCount val="15"/>
+                      <c:pt idx="0">
+                        <c:v>2914</c:v>
+                      </c:pt>
+                      <c:pt idx="1">
+                        <c:v>2889</c:v>
+                      </c:pt>
+                      <c:pt idx="2">
+                        <c:v>2742</c:v>
+                      </c:pt>
+                      <c:pt idx="3">
+                        <c:v>2781</c:v>
+                      </c:pt>
+                      <c:pt idx="4">
+                        <c:v>2694</c:v>
+                      </c:pt>
+                      <c:pt idx="5">
+                        <c:v>2615</c:v>
+                      </c:pt>
+                      <c:pt idx="6">
+                        <c:v>2762</c:v>
+                      </c:pt>
+                      <c:pt idx="7">
+                        <c:v>2850</c:v>
+                      </c:pt>
+                      <c:pt idx="8">
+                        <c:v>3008</c:v>
+                      </c:pt>
+                      <c:pt idx="9">
+                        <c:v>2867</c:v>
+                      </c:pt>
+                      <c:pt idx="10">
+                        <c:v>2842</c:v>
+                      </c:pt>
+                      <c:pt idx="11">
+                        <c:v>2933</c:v>
+                      </c:pt>
+                      <c:pt idx="12">
+                        <c:v>2935</c:v>
+                      </c:pt>
+                      <c:pt idx="13">
+                        <c:v>2730</c:v>
+                      </c:pt>
+                      <c:pt idx="14">
+                        <c:v>2550</c:v>
+                      </c:pt>
+                    </c:numCache>
+                  </c:numRef>
+                </c:val>
+                <c:smooth val="0"/>
+                <c:extLst xmlns:c15="http://schemas.microsoft.com/office/drawing/2012/chart">
+                  <c:ext xmlns:c16="http://schemas.microsoft.com/office/drawing/2014/chart" uri="{C3380CC4-5D6E-409C-BE32-E72D297353CC}">
+                    <c16:uniqueId val="{0000000C-D441-4359-97DF-2F4C53587EEB}"/>
+                  </c:ext>
+                </c:extLst>
+              </c15:ser>
+            </c15:filteredLineSeries>
+            <c15:filteredLineSeries>
+              <c15:ser>
+                <c:idx val="9"/>
+                <c:order val="9"/>
+                <c:tx>
+                  <c:strRef>
+                    <c:extLst xmlns:c15="http://schemas.microsoft.com/office/drawing/2012/chart">
+                      <c:ext xmlns:c15="http://schemas.microsoft.com/office/drawing/2012/chart" uri="{02D57815-91ED-43cb-92C2-25804820EDAC}">
+                        <c15:formulaRef>
+                          <c15:sqref>'CKD+ICDbyStage'!$B$11</c15:sqref>
+                        </c15:formulaRef>
+                      </c:ext>
+                    </c:extLst>
+                    <c:strCache>
+                      <c:ptCount val="1"/>
+                      <c:pt idx="0">
+                        <c:v>CKD Stage 5</c:v>
+                      </c:pt>
+                    </c:strCache>
+                  </c:strRef>
+                </c:tx>
+                <c:spPr>
+                  <a:ln w="28575" cap="rnd">
+                    <a:solidFill>
+                      <a:schemeClr val="accent4">
+                        <a:lumMod val="60000"/>
+                      </a:schemeClr>
+                    </a:solidFill>
+                    <a:round/>
+                  </a:ln>
+                  <a:effectLst/>
+                </c:spPr>
+                <c:marker>
+                  <c:symbol val="circle"/>
+                  <c:size val="5"/>
+                  <c:spPr>
+                    <a:solidFill>
+                      <a:schemeClr val="accent4">
+                        <a:lumMod val="60000"/>
+                      </a:schemeClr>
+                    </a:solidFill>
+                    <a:ln w="9525">
+                      <a:solidFill>
+                        <a:schemeClr val="accent4">
+                          <a:lumMod val="60000"/>
+                        </a:schemeClr>
+                      </a:solidFill>
+                    </a:ln>
+                    <a:effectLst/>
+                  </c:spPr>
+                </c:marker>
+                <c:cat>
+                  <c:numRef>
+                    <c:extLst xmlns:c15="http://schemas.microsoft.com/office/drawing/2012/chart">
+                      <c:ext xmlns:c15="http://schemas.microsoft.com/office/drawing/2012/chart" uri="{02D57815-91ED-43cb-92C2-25804820EDAC}">
+                        <c15:formulaRef>
+                          <c15:sqref>'CKD+ICDbyStage'!$C$1:$Q$1</c15:sqref>
+                        </c15:formulaRef>
+                      </c:ext>
+                    </c:extLst>
+                    <c:numCache>
+                      <c:formatCode>General</c:formatCode>
+                      <c:ptCount val="15"/>
+                      <c:pt idx="0">
+                        <c:v>2009</c:v>
+                      </c:pt>
+                      <c:pt idx="1">
+                        <c:v>2010</c:v>
+                      </c:pt>
+                      <c:pt idx="2">
+                        <c:v>2011</c:v>
+                      </c:pt>
+                      <c:pt idx="3">
+                        <c:v>2012</c:v>
+                      </c:pt>
+                      <c:pt idx="4">
+                        <c:v>2013</c:v>
+                      </c:pt>
+                      <c:pt idx="5">
+                        <c:v>2014</c:v>
+                      </c:pt>
+                      <c:pt idx="6">
+                        <c:v>2015</c:v>
+                      </c:pt>
+                      <c:pt idx="7">
+                        <c:v>2016</c:v>
+                      </c:pt>
+                      <c:pt idx="8">
+                        <c:v>2017</c:v>
+                      </c:pt>
+                      <c:pt idx="9">
+                        <c:v>2018</c:v>
+                      </c:pt>
+                      <c:pt idx="10">
+                        <c:v>2019</c:v>
+                      </c:pt>
+                      <c:pt idx="11">
+                        <c:v>2020</c:v>
+                      </c:pt>
+                      <c:pt idx="12">
+                        <c:v>2021</c:v>
+                      </c:pt>
+                      <c:pt idx="13">
+                        <c:v>2022</c:v>
+                      </c:pt>
+                      <c:pt idx="14">
+                        <c:v>2023</c:v>
+                      </c:pt>
+                    </c:numCache>
+                  </c:numRef>
+                </c:cat>
+                <c:val>
+                  <c:numRef>
+                    <c:extLst xmlns:c15="http://schemas.microsoft.com/office/drawing/2012/chart">
+                      <c:ext xmlns:c15="http://schemas.microsoft.com/office/drawing/2012/chart" uri="{02D57815-91ED-43cb-92C2-25804820EDAC}">
+                        <c15:formulaRef>
+                          <c15:sqref>'CKD+ICDbyStage'!$C$11:$Q$11</c15:sqref>
+                        </c15:formulaRef>
+                      </c:ext>
+                    </c:extLst>
+                    <c:numCache>
+                      <c:formatCode>General</c:formatCode>
+                      <c:ptCount val="15"/>
+                      <c:pt idx="0">
+                        <c:v>90.31</c:v>
+                      </c:pt>
+                      <c:pt idx="1">
+                        <c:v>90.45</c:v>
+                      </c:pt>
+                      <c:pt idx="2">
+                        <c:v>91.29</c:v>
+                      </c:pt>
+                      <c:pt idx="3">
+                        <c:v>91.01</c:v>
+                      </c:pt>
+                      <c:pt idx="4">
+                        <c:v>92</c:v>
+                      </c:pt>
+                      <c:pt idx="5">
+                        <c:v>93.22</c:v>
+                      </c:pt>
+                      <c:pt idx="6">
+                        <c:v>89.72</c:v>
+                      </c:pt>
+                      <c:pt idx="7">
+                        <c:v>78.45</c:v>
+                      </c:pt>
+                      <c:pt idx="8">
+                        <c:v>82.09</c:v>
+                      </c:pt>
+                      <c:pt idx="9">
+                        <c:v>80.599999999999994</c:v>
+                      </c:pt>
+                      <c:pt idx="10">
+                        <c:v>81.48</c:v>
+                      </c:pt>
+                      <c:pt idx="11">
+                        <c:v>77.430000000000007</c:v>
+                      </c:pt>
+                      <c:pt idx="12">
+                        <c:v>74.86</c:v>
+                      </c:pt>
+                      <c:pt idx="13">
+                        <c:v>73.790000000000006</c:v>
+                      </c:pt>
+                      <c:pt idx="14">
+                        <c:v>76.180000000000007</c:v>
+                      </c:pt>
+                    </c:numCache>
+                  </c:numRef>
+                </c:val>
+                <c:smooth val="0"/>
+                <c:extLst xmlns:c15="http://schemas.microsoft.com/office/drawing/2012/chart">
+                  <c:ext xmlns:c16="http://schemas.microsoft.com/office/drawing/2014/chart" uri="{C3380CC4-5D6E-409C-BE32-E72D297353CC}">
+                    <c16:uniqueId val="{0000000D-D441-4359-97DF-2F4C53587EEB}"/>
+                  </c:ext>
+                </c:extLst>
+              </c15:ser>
+            </c15:filteredLineSeries>
+            <c15:filteredLineSeries>
+              <c15:ser>
+                <c:idx val="10"/>
+                <c:order val="10"/>
+                <c:tx>
+                  <c:strRef>
+                    <c:extLst xmlns:c15="http://schemas.microsoft.com/office/drawing/2012/chart">
+                      <c:ext xmlns:c15="http://schemas.microsoft.com/office/drawing/2012/chart" uri="{02D57815-91ED-43cb-92C2-25804820EDAC}">
+                        <c15:formulaRef>
+                          <c15:sqref>'CKD+ICDbyStage'!$B$12</c15:sqref>
+                        </c15:formulaRef>
+                      </c:ext>
+                    </c:extLst>
+                    <c:strCache>
+                      <c:ptCount val="1"/>
+                      <c:pt idx="0">
+                        <c:v>CKD Stage 5</c:v>
+                      </c:pt>
+                    </c:strCache>
+                  </c:strRef>
+                </c:tx>
+                <c:spPr>
+                  <a:ln w="28575" cap="rnd">
+                    <a:solidFill>
+                      <a:schemeClr val="accent5">
+                        <a:lumMod val="60000"/>
+                      </a:schemeClr>
+                    </a:solidFill>
+                    <a:round/>
+                  </a:ln>
+                  <a:effectLst/>
+                </c:spPr>
+                <c:marker>
+                  <c:symbol val="none"/>
+                </c:marker>
+                <c:cat>
+                  <c:numRef>
+                    <c:extLst xmlns:c15="http://schemas.microsoft.com/office/drawing/2012/chart">
+                      <c:ext xmlns:c15="http://schemas.microsoft.com/office/drawing/2012/chart" uri="{02D57815-91ED-43cb-92C2-25804820EDAC}">
+                        <c15:formulaRef>
+                          <c15:sqref>'CKD+ICDbyStage'!$C$1:$Q$1</c15:sqref>
+                        </c15:formulaRef>
+                      </c:ext>
+                    </c:extLst>
+                    <c:numCache>
+                      <c:formatCode>General</c:formatCode>
+                      <c:ptCount val="15"/>
+                      <c:pt idx="0">
+                        <c:v>2009</c:v>
+                      </c:pt>
+                      <c:pt idx="1">
+                        <c:v>2010</c:v>
+                      </c:pt>
+                      <c:pt idx="2">
+                        <c:v>2011</c:v>
+                      </c:pt>
+                      <c:pt idx="3">
+                        <c:v>2012</c:v>
+                      </c:pt>
+                      <c:pt idx="4">
+                        <c:v>2013</c:v>
+                      </c:pt>
+                      <c:pt idx="5">
+                        <c:v>2014</c:v>
+                      </c:pt>
+                      <c:pt idx="6">
+                        <c:v>2015</c:v>
+                      </c:pt>
+                      <c:pt idx="7">
+                        <c:v>2016</c:v>
+                      </c:pt>
+                      <c:pt idx="8">
+                        <c:v>2017</c:v>
+                      </c:pt>
+                      <c:pt idx="9">
+                        <c:v>2018</c:v>
+                      </c:pt>
+                      <c:pt idx="10">
+                        <c:v>2019</c:v>
+                      </c:pt>
+                      <c:pt idx="11">
+                        <c:v>2020</c:v>
+                      </c:pt>
+                      <c:pt idx="12">
+                        <c:v>2021</c:v>
+                      </c:pt>
+                      <c:pt idx="13">
+                        <c:v>2022</c:v>
+                      </c:pt>
+                      <c:pt idx="14">
+                        <c:v>2023</c:v>
+                      </c:pt>
+                    </c:numCache>
+                  </c:numRef>
+                </c:cat>
+                <c:val>
+                  <c:numRef>
+                    <c:extLst xmlns:c15="http://schemas.microsoft.com/office/drawing/2012/chart">
+                      <c:ext xmlns:c15="http://schemas.microsoft.com/office/drawing/2012/chart" uri="{02D57815-91ED-43cb-92C2-25804820EDAC}">
+                        <c15:formulaRef>
+                          <c15:sqref>'CKD+ICDbyStage'!$C$12:$Q$12</c15:sqref>
+                        </c15:formulaRef>
+                      </c:ext>
+                    </c:extLst>
+                    <c:numCache>
+                      <c:formatCode>General</c:formatCode>
+                      <c:ptCount val="15"/>
+                      <c:pt idx="0">
+                        <c:v>718</c:v>
+                      </c:pt>
+                      <c:pt idx="1">
+                        <c:v>729</c:v>
+                      </c:pt>
+                      <c:pt idx="2">
+                        <c:v>776</c:v>
+                      </c:pt>
+                      <c:pt idx="3">
+                        <c:v>790</c:v>
+                      </c:pt>
+                      <c:pt idx="4">
+                        <c:v>840</c:v>
+                      </c:pt>
+                      <c:pt idx="5">
+                        <c:v>908</c:v>
+                      </c:pt>
+                      <c:pt idx="6">
+                        <c:v>890</c:v>
+                      </c:pt>
+                      <c:pt idx="7">
+                        <c:v>415</c:v>
+                      </c:pt>
+                      <c:pt idx="8">
+                        <c:v>440</c:v>
+                      </c:pt>
+                      <c:pt idx="9">
+                        <c:v>428</c:v>
+                      </c:pt>
+                      <c:pt idx="10">
+                        <c:v>418</c:v>
+                      </c:pt>
+                      <c:pt idx="11">
+                        <c:v>398</c:v>
+                      </c:pt>
+                      <c:pt idx="12">
+                        <c:v>411</c:v>
+                      </c:pt>
+                      <c:pt idx="13">
+                        <c:v>380</c:v>
+                      </c:pt>
+                      <c:pt idx="14">
+                        <c:v>355</c:v>
+                      </c:pt>
+                    </c:numCache>
+                  </c:numRef>
+                </c:val>
+                <c:smooth val="0"/>
+                <c:extLst xmlns:c15="http://schemas.microsoft.com/office/drawing/2012/chart">
+                  <c:ext xmlns:c16="http://schemas.microsoft.com/office/drawing/2014/chart" uri="{C3380CC4-5D6E-409C-BE32-E72D297353CC}">
+                    <c16:uniqueId val="{0000000E-D441-4359-97DF-2F4C53587EEB}"/>
+                  </c:ext>
+                </c:extLst>
+              </c15:ser>
+            </c15:filteredLineSeries>
+            <c15:filteredLineSeries>
+              <c15:ser>
+                <c:idx val="11"/>
+                <c:order val="11"/>
+                <c:tx>
+                  <c:strRef>
+                    <c:extLst xmlns:c15="http://schemas.microsoft.com/office/drawing/2012/chart">
+                      <c:ext xmlns:c15="http://schemas.microsoft.com/office/drawing/2012/chart" uri="{02D57815-91ED-43cb-92C2-25804820EDAC}">
+                        <c15:formulaRef>
+                          <c15:sqref>'CKD+ICDbyStage'!$B$13</c15:sqref>
+                        </c15:formulaRef>
+                      </c:ext>
+                    </c:extLst>
+                    <c:strCache>
+                      <c:ptCount val="1"/>
+                      <c:pt idx="0">
+                        <c:v>CKD Stage 5</c:v>
+                      </c:pt>
+                    </c:strCache>
+                  </c:strRef>
+                </c:tx>
+                <c:spPr>
+                  <a:ln w="28575" cap="rnd">
+                    <a:solidFill>
+                      <a:schemeClr val="accent6">
+                        <a:lumMod val="60000"/>
+                      </a:schemeClr>
+                    </a:solidFill>
+                    <a:round/>
+                  </a:ln>
+                  <a:effectLst/>
+                </c:spPr>
+                <c:marker>
+                  <c:symbol val="none"/>
+                </c:marker>
+                <c:cat>
+                  <c:numRef>
+                    <c:extLst xmlns:c15="http://schemas.microsoft.com/office/drawing/2012/chart">
+                      <c:ext xmlns:c15="http://schemas.microsoft.com/office/drawing/2012/chart" uri="{02D57815-91ED-43cb-92C2-25804820EDAC}">
+                        <c15:formulaRef>
+                          <c15:sqref>'CKD+ICDbyStage'!$C$1:$Q$1</c15:sqref>
+                        </c15:formulaRef>
+                      </c:ext>
+                    </c:extLst>
+                    <c:numCache>
+                      <c:formatCode>General</c:formatCode>
+                      <c:ptCount val="15"/>
+                      <c:pt idx="0">
+                        <c:v>2009</c:v>
+                      </c:pt>
+                      <c:pt idx="1">
+                        <c:v>2010</c:v>
+                      </c:pt>
+                      <c:pt idx="2">
+                        <c:v>2011</c:v>
+                      </c:pt>
+                      <c:pt idx="3">
+                        <c:v>2012</c:v>
+                      </c:pt>
+                      <c:pt idx="4">
+                        <c:v>2013</c:v>
+                      </c:pt>
+                      <c:pt idx="5">
+                        <c:v>2014</c:v>
+                      </c:pt>
+                      <c:pt idx="6">
+                        <c:v>2015</c:v>
+                      </c:pt>
+                      <c:pt idx="7">
+                        <c:v>2016</c:v>
+                      </c:pt>
+                      <c:pt idx="8">
+                        <c:v>2017</c:v>
+                      </c:pt>
+                      <c:pt idx="9">
+                        <c:v>2018</c:v>
+                      </c:pt>
+                      <c:pt idx="10">
+                        <c:v>2019</c:v>
+                      </c:pt>
+                      <c:pt idx="11">
+                        <c:v>2020</c:v>
+                      </c:pt>
+                      <c:pt idx="12">
+                        <c:v>2021</c:v>
+                      </c:pt>
+                      <c:pt idx="13">
+                        <c:v>2022</c:v>
+                      </c:pt>
+                      <c:pt idx="14">
+                        <c:v>2023</c:v>
+                      </c:pt>
+                    </c:numCache>
+                  </c:numRef>
+                </c:cat>
+                <c:val>
+                  <c:numRef>
+                    <c:extLst xmlns:c15="http://schemas.microsoft.com/office/drawing/2012/chart">
+                      <c:ext xmlns:c15="http://schemas.microsoft.com/office/drawing/2012/chart" uri="{02D57815-91ED-43cb-92C2-25804820EDAC}">
+                        <c15:formulaRef>
+                          <c15:sqref>'CKD+ICDbyStage'!$C$13:$Q$13</c15:sqref>
+                        </c15:formulaRef>
+                      </c:ext>
+                    </c:extLst>
+                    <c:numCache>
+                      <c:formatCode>General</c:formatCode>
+                      <c:ptCount val="15"/>
+                      <c:pt idx="0">
+                        <c:v>795</c:v>
+                      </c:pt>
+                      <c:pt idx="1">
+                        <c:v>806</c:v>
+                      </c:pt>
+                      <c:pt idx="2">
+                        <c:v>850</c:v>
+                      </c:pt>
+                      <c:pt idx="3">
+                        <c:v>868</c:v>
+                      </c:pt>
+                      <c:pt idx="4">
+                        <c:v>913</c:v>
+                      </c:pt>
+                      <c:pt idx="5">
+                        <c:v>974</c:v>
+                      </c:pt>
+                      <c:pt idx="6">
+                        <c:v>992</c:v>
+                      </c:pt>
+                      <c:pt idx="7">
+                        <c:v>529</c:v>
+                      </c:pt>
+                      <c:pt idx="8">
+                        <c:v>536</c:v>
+                      </c:pt>
+                      <c:pt idx="9">
+                        <c:v>531</c:v>
+                      </c:pt>
+                      <c:pt idx="10">
+                        <c:v>513</c:v>
+                      </c:pt>
+                      <c:pt idx="11">
+                        <c:v>514</c:v>
+                      </c:pt>
+                      <c:pt idx="12">
+                        <c:v>549</c:v>
+                      </c:pt>
+                      <c:pt idx="13">
+                        <c:v>515</c:v>
+                      </c:pt>
+                      <c:pt idx="14">
+                        <c:v>466</c:v>
+                      </c:pt>
+                    </c:numCache>
+                  </c:numRef>
+                </c:val>
+                <c:smooth val="0"/>
+                <c:extLst xmlns:c15="http://schemas.microsoft.com/office/drawing/2012/chart">
+                  <c:ext xmlns:c16="http://schemas.microsoft.com/office/drawing/2014/chart" uri="{C3380CC4-5D6E-409C-BE32-E72D297353CC}">
+                    <c16:uniqueId val="{0000000F-D441-4359-97DF-2F4C53587EEB}"/>
+                  </c:ext>
+                </c:extLst>
+              </c15:ser>
+            </c15:filteredLineSeries>
+          </c:ext>
+        </c:extLst>
+      </c:lineChart>
+      <c:catAx>
+        <c:axId val="1440548959"/>
+        <c:scaling>
+          <c:orientation val="minMax"/>
+        </c:scaling>
+        <c:delete val="0"/>
+        <c:axPos val="b"/>
+        <c:numFmt formatCode="General" sourceLinked="1"/>
+        <c:majorTickMark val="none"/>
+        <c:minorTickMark val="none"/>
+        <c:tickLblPos val="nextTo"/>
+        <c:spPr>
+          <a:noFill/>
+          <a:ln w="9525" cap="flat" cmpd="sng" algn="ctr">
+            <a:solidFill>
+              <a:schemeClr val="tx1">
+                <a:lumMod val="15000"/>
+                <a:lumOff val="85000"/>
+              </a:schemeClr>
+            </a:solidFill>
+            <a:round/>
+          </a:ln>
+          <a:effectLst/>
+        </c:spPr>
+        <c:txPr>
+          <a:bodyPr rot="-60000000" spcFirstLastPara="1" vertOverflow="ellipsis" vert="horz" wrap="square" anchor="ctr" anchorCtr="1"/>
+          <a:lstStyle/>
+          <a:p>
+            <a:pPr>
+              <a:defRPr sz="2400" b="0" i="0" u="none" strike="noStrike" kern="1200" baseline="0">
+                <a:solidFill>
+                  <a:schemeClr val="tx1"/>
+                </a:solidFill>
+                <a:latin typeface="+mn-lt"/>
+                <a:ea typeface="+mn-ea"/>
+                <a:cs typeface="+mn-cs"/>
+              </a:defRPr>
+            </a:pPr>
+            <a:endParaRPr lang="en-US"/>
+          </a:p>
+        </c:txPr>
+        <c:crossAx val="1440549919"/>
+        <c:crosses val="autoZero"/>
+        <c:auto val="1"/>
+        <c:lblAlgn val="ctr"/>
+        <c:lblOffset val="100"/>
+        <c:tickLblSkip val="2"/>
+        <c:noMultiLvlLbl val="0"/>
+      </c:catAx>
+      <c:valAx>
+        <c:axId val="1440549919"/>
+        <c:scaling>
+          <c:orientation val="minMax"/>
+        </c:scaling>
+        <c:delete val="0"/>
+        <c:axPos val="l"/>
+        <c:majorGridlines>
+          <c:spPr>
+            <a:ln w="9525" cap="flat" cmpd="sng" algn="ctr">
+              <a:solidFill>
+                <a:schemeClr val="tx1">
+                  <a:lumMod val="15000"/>
+                  <a:lumOff val="85000"/>
+                </a:schemeClr>
+              </a:solidFill>
+              <a:round/>
+            </a:ln>
+            <a:effectLst/>
+          </c:spPr>
+        </c:majorGridlines>
+        <c:title>
+          <c:tx>
+            <c:rich>
+              <a:bodyPr rot="-5400000" spcFirstLastPara="1" vertOverflow="ellipsis" vert="horz" wrap="square" anchor="ctr" anchorCtr="1"/>
+              <a:lstStyle/>
+              <a:p>
+                <a:pPr>
+                  <a:defRPr sz="2400" b="0" i="0" u="none" strike="noStrike" kern="1200" baseline="0">
+                    <a:solidFill>
+                      <a:schemeClr val="tx1"/>
+                    </a:solidFill>
+                    <a:latin typeface="+mn-lt"/>
+                    <a:ea typeface="+mn-ea"/>
+                    <a:cs typeface="+mn-cs"/>
+                  </a:defRPr>
+                </a:pPr>
+                <a:r>
+                  <a:rPr lang="en-US"/>
+                  <a:t>Adults with CKD Stages 3-5 and ICD-9 or 10 code (%)</a:t>
+                </a:r>
+              </a:p>
+            </c:rich>
+          </c:tx>
+          <c:overlay val="0"/>
+          <c:spPr>
+            <a:noFill/>
+            <a:ln>
+              <a:noFill/>
+            </a:ln>
+            <a:effectLst/>
+          </c:spPr>
+          <c:txPr>
+            <a:bodyPr rot="-5400000" spcFirstLastPara="1" vertOverflow="ellipsis" vert="horz" wrap="square" anchor="ctr" anchorCtr="1"/>
+            <a:lstStyle/>
+            <a:p>
+              <a:pPr>
+                <a:defRPr sz="2400" b="0" i="0" u="none" strike="noStrike" kern="1200" baseline="0">
+                  <a:solidFill>
+                    <a:schemeClr val="tx1"/>
+                  </a:solidFill>
+                  <a:latin typeface="+mn-lt"/>
+                  <a:ea typeface="+mn-ea"/>
+                  <a:cs typeface="+mn-cs"/>
+                </a:defRPr>
+              </a:pPr>
+              <a:endParaRPr lang="en-US"/>
+            </a:p>
+          </c:txPr>
+        </c:title>
+        <c:numFmt formatCode="0" sourceLinked="0"/>
+        <c:majorTickMark val="none"/>
+        <c:minorTickMark val="none"/>
+        <c:tickLblPos val="nextTo"/>
+        <c:spPr>
+          <a:noFill/>
+          <a:ln>
+            <a:noFill/>
+          </a:ln>
+          <a:effectLst/>
+        </c:spPr>
+        <c:txPr>
+          <a:bodyPr rot="-60000000" spcFirstLastPara="1" vertOverflow="ellipsis" vert="horz" wrap="square" anchor="ctr" anchorCtr="1"/>
+          <a:lstStyle/>
+          <a:p>
+            <a:pPr>
+              <a:defRPr sz="2400" b="0" i="0" u="none" strike="noStrike" kern="1200" baseline="0">
+                <a:solidFill>
+                  <a:schemeClr val="tx1"/>
+                </a:solidFill>
+                <a:latin typeface="+mn-lt"/>
+                <a:ea typeface="+mn-ea"/>
+                <a:cs typeface="+mn-cs"/>
+              </a:defRPr>
+            </a:pPr>
+            <a:endParaRPr lang="en-US"/>
+          </a:p>
+        </c:txPr>
+        <c:crossAx val="1440548959"/>
+        <c:crosses val="autoZero"/>
+        <c:crossBetween val="between"/>
+      </c:valAx>
+      <c:spPr>
+        <a:noFill/>
+        <a:ln>
+          <a:noFill/>
+        </a:ln>
+        <a:effectLst/>
+      </c:spPr>
+    </c:plotArea>
+    <c:legend>
+      <c:legendPos val="b"/>
+      <c:overlay val="0"/>
+      <c:spPr>
+        <a:noFill/>
+        <a:ln>
+          <a:noFill/>
+        </a:ln>
+        <a:effectLst/>
+      </c:spPr>
+      <c:txPr>
+        <a:bodyPr rot="0" spcFirstLastPara="1" vertOverflow="ellipsis" vert="horz" wrap="square" anchor="ctr" anchorCtr="1"/>
+        <a:lstStyle/>
+        <a:p>
+          <a:pPr>
+            <a:defRPr sz="2400" b="0" i="0" u="none" strike="noStrike" kern="1200" baseline="0">
+              <a:solidFill>
+                <a:schemeClr val="tx1"/>
+              </a:solidFill>
+              <a:latin typeface="+mn-lt"/>
+              <a:ea typeface="+mn-ea"/>
+              <a:cs typeface="+mn-cs"/>
+            </a:defRPr>
+          </a:pPr>
+          <a:endParaRPr lang="en-US"/>
+        </a:p>
+      </c:txPr>
+    </c:legend>
+    <c:plotVisOnly val="1"/>
+    <c:dispBlanksAs val="gap"/>
+    <c:showDLblsOverMax val="0"/>
+  </c:chart>
+  <c:spPr>
+    <a:noFill/>
+    <a:ln>
+      <a:noFill/>
+    </a:ln>
+    <a:effectLst/>
+  </c:spPr>
+  <c:txPr>
+    <a:bodyPr/>
+    <a:lstStyle/>
+    <a:p>
+      <a:pPr>
+        <a:defRPr sz="2400">
           <a:solidFill>
             <a:schemeClr val="tx1"/>
           </a:solidFill>
@@ -6951,6 +12496,86 @@
 </cs:colorStyle>
 </file>
 
+<file path=ppt/charts/colors8.xml><?xml version="1.0" encoding="utf-8"?>
+<cs:colorStyle xmlns:cs="http://schemas.microsoft.com/office/drawing/2012/chartStyle" xmlns:a="http://schemas.openxmlformats.org/drawingml/2006/main" meth="cycle" id="10">
+  <a:schemeClr val="accent1"/>
+  <a:schemeClr val="accent2"/>
+  <a:schemeClr val="accent3"/>
+  <a:schemeClr val="accent4"/>
+  <a:schemeClr val="accent5"/>
+  <a:schemeClr val="accent6"/>
+  <cs:variation/>
+  <cs:variation>
+    <a:lumMod val="60000"/>
+  </cs:variation>
+  <cs:variation>
+    <a:lumMod val="80000"/>
+    <a:lumOff val="20000"/>
+  </cs:variation>
+  <cs:variation>
+    <a:lumMod val="80000"/>
+  </cs:variation>
+  <cs:variation>
+    <a:lumMod val="60000"/>
+    <a:lumOff val="40000"/>
+  </cs:variation>
+  <cs:variation>
+    <a:lumMod val="50000"/>
+  </cs:variation>
+  <cs:variation>
+    <a:lumMod val="70000"/>
+    <a:lumOff val="30000"/>
+  </cs:variation>
+  <cs:variation>
+    <a:lumMod val="70000"/>
+  </cs:variation>
+  <cs:variation>
+    <a:lumMod val="50000"/>
+    <a:lumOff val="50000"/>
+  </cs:variation>
+</cs:colorStyle>
+</file>
+
+<file path=ppt/charts/colors9.xml><?xml version="1.0" encoding="utf-8"?>
+<cs:colorStyle xmlns:cs="http://schemas.microsoft.com/office/drawing/2012/chartStyle" xmlns:a="http://schemas.openxmlformats.org/drawingml/2006/main" meth="cycle" id="10">
+  <a:schemeClr val="accent1"/>
+  <a:schemeClr val="accent2"/>
+  <a:schemeClr val="accent3"/>
+  <a:schemeClr val="accent4"/>
+  <a:schemeClr val="accent5"/>
+  <a:schemeClr val="accent6"/>
+  <cs:variation/>
+  <cs:variation>
+    <a:lumMod val="60000"/>
+  </cs:variation>
+  <cs:variation>
+    <a:lumMod val="80000"/>
+    <a:lumOff val="20000"/>
+  </cs:variation>
+  <cs:variation>
+    <a:lumMod val="80000"/>
+  </cs:variation>
+  <cs:variation>
+    <a:lumMod val="60000"/>
+    <a:lumOff val="40000"/>
+  </cs:variation>
+  <cs:variation>
+    <a:lumMod val="50000"/>
+  </cs:variation>
+  <cs:variation>
+    <a:lumMod val="70000"/>
+    <a:lumOff val="30000"/>
+  </cs:variation>
+  <cs:variation>
+    <a:lumMod val="70000"/>
+  </cs:variation>
+  <cs:variation>
+    <a:lumMod val="50000"/>
+    <a:lumOff val="50000"/>
+  </cs:variation>
+</cs:colorStyle>
+</file>
+
 <file path=ppt/charts/style1.xml><?xml version="1.0" encoding="utf-8"?>
 <cs:chartStyle xmlns:cs="http://schemas.microsoft.com/office/drawing/2012/chartStyle" xmlns:a="http://schemas.openxmlformats.org/drawingml/2006/main" id="332">
   <cs:axisTitle>
@@ -10119,6 +15744,1038 @@
       <a:schemeClr val="tx1"/>
     </cs:fontRef>
     <cs:spPr>
+      <a:ln w="9525">
+        <a:solidFill>
+          <a:schemeClr val="phClr"/>
+        </a:solidFill>
+      </a:ln>
+    </cs:spPr>
+  </cs:dataPointMarker>
+  <cs:dataPointMarkerLayout symbol="circle" size="5"/>
+  <cs:dataPointWireframe>
+    <cs:lnRef idx="0">
+      <cs:styleClr val="auto"/>
+    </cs:lnRef>
+    <cs:fillRef idx="1"/>
+    <cs:effectRef idx="0"/>
+    <cs:fontRef idx="minor">
+      <a:schemeClr val="tx1"/>
+    </cs:fontRef>
+    <cs:spPr>
+      <a:ln w="9525" cap="rnd">
+        <a:solidFill>
+          <a:schemeClr val="phClr"/>
+        </a:solidFill>
+        <a:round/>
+      </a:ln>
+    </cs:spPr>
+  </cs:dataPointWireframe>
+  <cs:dataTable>
+    <cs:lnRef idx="0"/>
+    <cs:fillRef idx="0"/>
+    <cs:effectRef idx="0"/>
+    <cs:fontRef idx="minor">
+      <a:schemeClr val="tx1">
+        <a:lumMod val="65000"/>
+        <a:lumOff val="35000"/>
+      </a:schemeClr>
+    </cs:fontRef>
+    <cs:spPr>
+      <a:noFill/>
+      <a:ln w="9525" cap="flat" cmpd="sng" algn="ctr">
+        <a:solidFill>
+          <a:schemeClr val="tx1">
+            <a:lumMod val="15000"/>
+            <a:lumOff val="85000"/>
+          </a:schemeClr>
+        </a:solidFill>
+        <a:round/>
+      </a:ln>
+    </cs:spPr>
+    <cs:defRPr sz="900" kern="1200"/>
+  </cs:dataTable>
+  <cs:downBar>
+    <cs:lnRef idx="0"/>
+    <cs:fillRef idx="0"/>
+    <cs:effectRef idx="0"/>
+    <cs:fontRef idx="minor">
+      <a:schemeClr val="dk1"/>
+    </cs:fontRef>
+    <cs:spPr>
+      <a:solidFill>
+        <a:schemeClr val="dk1">
+          <a:lumMod val="65000"/>
+          <a:lumOff val="35000"/>
+        </a:schemeClr>
+      </a:solidFill>
+      <a:ln w="9525">
+        <a:solidFill>
+          <a:schemeClr val="tx1">
+            <a:lumMod val="65000"/>
+            <a:lumOff val="35000"/>
+          </a:schemeClr>
+        </a:solidFill>
+      </a:ln>
+    </cs:spPr>
+  </cs:downBar>
+  <cs:dropLine>
+    <cs:lnRef idx="0"/>
+    <cs:fillRef idx="0"/>
+    <cs:effectRef idx="0"/>
+    <cs:fontRef idx="minor">
+      <a:schemeClr val="tx1"/>
+    </cs:fontRef>
+    <cs:spPr>
+      <a:ln w="9525" cap="flat" cmpd="sng" algn="ctr">
+        <a:solidFill>
+          <a:schemeClr val="tx1">
+            <a:lumMod val="35000"/>
+            <a:lumOff val="65000"/>
+          </a:schemeClr>
+        </a:solidFill>
+        <a:round/>
+      </a:ln>
+    </cs:spPr>
+  </cs:dropLine>
+  <cs:errorBar>
+    <cs:lnRef idx="0"/>
+    <cs:fillRef idx="0"/>
+    <cs:effectRef idx="0"/>
+    <cs:fontRef idx="minor">
+      <a:schemeClr val="tx1"/>
+    </cs:fontRef>
+    <cs:spPr>
+      <a:ln w="9525" cap="flat" cmpd="sng" algn="ctr">
+        <a:solidFill>
+          <a:schemeClr val="tx1">
+            <a:lumMod val="65000"/>
+            <a:lumOff val="35000"/>
+          </a:schemeClr>
+        </a:solidFill>
+        <a:round/>
+      </a:ln>
+    </cs:spPr>
+  </cs:errorBar>
+  <cs:floor>
+    <cs:lnRef idx="0"/>
+    <cs:fillRef idx="0"/>
+    <cs:effectRef idx="0"/>
+    <cs:fontRef idx="minor">
+      <a:schemeClr val="tx1"/>
+    </cs:fontRef>
+    <cs:spPr>
+      <a:noFill/>
+      <a:ln>
+        <a:noFill/>
+      </a:ln>
+    </cs:spPr>
+  </cs:floor>
+  <cs:gridlineMajor>
+    <cs:lnRef idx="0"/>
+    <cs:fillRef idx="0"/>
+    <cs:effectRef idx="0"/>
+    <cs:fontRef idx="minor">
+      <a:schemeClr val="tx1"/>
+    </cs:fontRef>
+    <cs:spPr>
+      <a:ln w="9525" cap="flat" cmpd="sng" algn="ctr">
+        <a:solidFill>
+          <a:schemeClr val="tx1">
+            <a:lumMod val="15000"/>
+            <a:lumOff val="85000"/>
+          </a:schemeClr>
+        </a:solidFill>
+        <a:round/>
+      </a:ln>
+    </cs:spPr>
+  </cs:gridlineMajor>
+  <cs:gridlineMinor>
+    <cs:lnRef idx="0"/>
+    <cs:fillRef idx="0"/>
+    <cs:effectRef idx="0"/>
+    <cs:fontRef idx="minor">
+      <a:schemeClr val="tx1"/>
+    </cs:fontRef>
+    <cs:spPr>
+      <a:ln w="9525" cap="flat" cmpd="sng" algn="ctr">
+        <a:solidFill>
+          <a:schemeClr val="tx1">
+            <a:lumMod val="5000"/>
+            <a:lumOff val="95000"/>
+          </a:schemeClr>
+        </a:solidFill>
+        <a:round/>
+      </a:ln>
+    </cs:spPr>
+  </cs:gridlineMinor>
+  <cs:hiLoLine>
+    <cs:lnRef idx="0"/>
+    <cs:fillRef idx="0"/>
+    <cs:effectRef idx="0"/>
+    <cs:fontRef idx="minor">
+      <a:schemeClr val="tx1"/>
+    </cs:fontRef>
+    <cs:spPr>
+      <a:ln w="9525" cap="flat" cmpd="sng" algn="ctr">
+        <a:solidFill>
+          <a:schemeClr val="tx1">
+            <a:lumMod val="75000"/>
+            <a:lumOff val="25000"/>
+          </a:schemeClr>
+        </a:solidFill>
+        <a:round/>
+      </a:ln>
+    </cs:spPr>
+  </cs:hiLoLine>
+  <cs:leaderLine>
+    <cs:lnRef idx="0"/>
+    <cs:fillRef idx="0"/>
+    <cs:effectRef idx="0"/>
+    <cs:fontRef idx="minor">
+      <a:schemeClr val="tx1"/>
+    </cs:fontRef>
+    <cs:spPr>
+      <a:ln w="9525" cap="flat" cmpd="sng" algn="ctr">
+        <a:solidFill>
+          <a:schemeClr val="tx1">
+            <a:lumMod val="35000"/>
+            <a:lumOff val="65000"/>
+          </a:schemeClr>
+        </a:solidFill>
+        <a:round/>
+      </a:ln>
+    </cs:spPr>
+  </cs:leaderLine>
+  <cs:legend>
+    <cs:lnRef idx="0"/>
+    <cs:fillRef idx="0"/>
+    <cs:effectRef idx="0"/>
+    <cs:fontRef idx="minor">
+      <a:schemeClr val="tx1">
+        <a:lumMod val="65000"/>
+        <a:lumOff val="35000"/>
+      </a:schemeClr>
+    </cs:fontRef>
+    <cs:defRPr sz="900" kern="1200"/>
+  </cs:legend>
+  <cs:plotArea mods="allowNoFillOverride allowNoLineOverride">
+    <cs:lnRef idx="0"/>
+    <cs:fillRef idx="0"/>
+    <cs:effectRef idx="0"/>
+    <cs:fontRef idx="minor">
+      <a:schemeClr val="tx1"/>
+    </cs:fontRef>
+  </cs:plotArea>
+  <cs:plotArea3D mods="allowNoFillOverride allowNoLineOverride">
+    <cs:lnRef idx="0"/>
+    <cs:fillRef idx="0"/>
+    <cs:effectRef idx="0"/>
+    <cs:fontRef idx="minor">
+      <a:schemeClr val="tx1"/>
+    </cs:fontRef>
+  </cs:plotArea3D>
+  <cs:seriesAxis>
+    <cs:lnRef idx="0"/>
+    <cs:fillRef idx="0"/>
+    <cs:effectRef idx="0"/>
+    <cs:fontRef idx="minor">
+      <a:schemeClr val="tx1">
+        <a:lumMod val="65000"/>
+        <a:lumOff val="35000"/>
+      </a:schemeClr>
+    </cs:fontRef>
+    <cs:defRPr sz="900" kern="1200"/>
+  </cs:seriesAxis>
+  <cs:seriesLine>
+    <cs:lnRef idx="0"/>
+    <cs:fillRef idx="0"/>
+    <cs:effectRef idx="0"/>
+    <cs:fontRef idx="minor">
+      <a:schemeClr val="tx1"/>
+    </cs:fontRef>
+    <cs:spPr>
+      <a:ln w="9525" cap="flat" cmpd="sng" algn="ctr">
+        <a:solidFill>
+          <a:schemeClr val="tx1">
+            <a:lumMod val="35000"/>
+            <a:lumOff val="65000"/>
+          </a:schemeClr>
+        </a:solidFill>
+        <a:round/>
+      </a:ln>
+    </cs:spPr>
+  </cs:seriesLine>
+  <cs:title>
+    <cs:lnRef idx="0"/>
+    <cs:fillRef idx="0"/>
+    <cs:effectRef idx="0"/>
+    <cs:fontRef idx="minor">
+      <a:schemeClr val="tx1">
+        <a:lumMod val="65000"/>
+        <a:lumOff val="35000"/>
+      </a:schemeClr>
+    </cs:fontRef>
+    <cs:defRPr sz="1400" b="0" kern="1200" spc="0" baseline="0"/>
+  </cs:title>
+  <cs:trendline>
+    <cs:lnRef idx="0">
+      <cs:styleClr val="auto"/>
+    </cs:lnRef>
+    <cs:fillRef idx="0"/>
+    <cs:effectRef idx="0"/>
+    <cs:fontRef idx="minor">
+      <a:schemeClr val="tx1"/>
+    </cs:fontRef>
+    <cs:spPr>
+      <a:ln w="19050" cap="rnd">
+        <a:solidFill>
+          <a:schemeClr val="phClr"/>
+        </a:solidFill>
+        <a:prstDash val="sysDot"/>
+      </a:ln>
+    </cs:spPr>
+  </cs:trendline>
+  <cs:trendlineLabel>
+    <cs:lnRef idx="0"/>
+    <cs:fillRef idx="0"/>
+    <cs:effectRef idx="0"/>
+    <cs:fontRef idx="minor">
+      <a:schemeClr val="tx1">
+        <a:lumMod val="65000"/>
+        <a:lumOff val="35000"/>
+      </a:schemeClr>
+    </cs:fontRef>
+    <cs:defRPr sz="900" kern="1200"/>
+  </cs:trendlineLabel>
+  <cs:upBar>
+    <cs:lnRef idx="0"/>
+    <cs:fillRef idx="0"/>
+    <cs:effectRef idx="0"/>
+    <cs:fontRef idx="minor">
+      <a:schemeClr val="dk1"/>
+    </cs:fontRef>
+    <cs:spPr>
+      <a:solidFill>
+        <a:schemeClr val="lt1"/>
+      </a:solidFill>
+      <a:ln w="9525">
+        <a:solidFill>
+          <a:schemeClr val="tx1">
+            <a:lumMod val="15000"/>
+            <a:lumOff val="85000"/>
+          </a:schemeClr>
+        </a:solidFill>
+      </a:ln>
+    </cs:spPr>
+  </cs:upBar>
+  <cs:valueAxis>
+    <cs:lnRef idx="0"/>
+    <cs:fillRef idx="0"/>
+    <cs:effectRef idx="0"/>
+    <cs:fontRef idx="minor">
+      <a:schemeClr val="tx1">
+        <a:lumMod val="65000"/>
+        <a:lumOff val="35000"/>
+      </a:schemeClr>
+    </cs:fontRef>
+    <cs:defRPr sz="900" kern="1200"/>
+  </cs:valueAxis>
+  <cs:wall>
+    <cs:lnRef idx="0"/>
+    <cs:fillRef idx="0"/>
+    <cs:effectRef idx="0"/>
+    <cs:fontRef idx="minor">
+      <a:schemeClr val="tx1"/>
+    </cs:fontRef>
+    <cs:spPr>
+      <a:noFill/>
+      <a:ln>
+        <a:noFill/>
+      </a:ln>
+    </cs:spPr>
+  </cs:wall>
+</cs:chartStyle>
+</file>
+
+<file path=ppt/charts/style8.xml><?xml version="1.0" encoding="utf-8"?>
+<cs:chartStyle xmlns:cs="http://schemas.microsoft.com/office/drawing/2012/chartStyle" xmlns:a="http://schemas.openxmlformats.org/drawingml/2006/main" id="227">
+  <cs:axisTitle>
+    <cs:lnRef idx="0"/>
+    <cs:fillRef idx="0"/>
+    <cs:effectRef idx="0"/>
+    <cs:fontRef idx="minor">
+      <a:schemeClr val="tx1">
+        <a:lumMod val="65000"/>
+        <a:lumOff val="35000"/>
+      </a:schemeClr>
+    </cs:fontRef>
+    <cs:defRPr sz="1000" kern="1200"/>
+  </cs:axisTitle>
+  <cs:categoryAxis>
+    <cs:lnRef idx="0"/>
+    <cs:fillRef idx="0"/>
+    <cs:effectRef idx="0"/>
+    <cs:fontRef idx="minor">
+      <a:schemeClr val="tx1">
+        <a:lumMod val="65000"/>
+        <a:lumOff val="35000"/>
+      </a:schemeClr>
+    </cs:fontRef>
+    <cs:spPr>
+      <a:ln w="9525" cap="flat" cmpd="sng" algn="ctr">
+        <a:solidFill>
+          <a:schemeClr val="tx1">
+            <a:lumMod val="15000"/>
+            <a:lumOff val="85000"/>
+          </a:schemeClr>
+        </a:solidFill>
+        <a:round/>
+      </a:ln>
+    </cs:spPr>
+    <cs:defRPr sz="900" kern="1200"/>
+  </cs:categoryAxis>
+  <cs:chartArea mods="allowNoFillOverride allowNoLineOverride">
+    <cs:lnRef idx="0"/>
+    <cs:fillRef idx="0"/>
+    <cs:effectRef idx="0"/>
+    <cs:fontRef idx="minor">
+      <a:schemeClr val="tx1"/>
+    </cs:fontRef>
+    <cs:spPr>
+      <a:solidFill>
+        <a:schemeClr val="bg1"/>
+      </a:solidFill>
+      <a:ln w="9525" cap="flat" cmpd="sng" algn="ctr">
+        <a:solidFill>
+          <a:schemeClr val="tx1">
+            <a:lumMod val="15000"/>
+            <a:lumOff val="85000"/>
+          </a:schemeClr>
+        </a:solidFill>
+        <a:round/>
+      </a:ln>
+    </cs:spPr>
+    <cs:defRPr sz="1000" kern="1200"/>
+  </cs:chartArea>
+  <cs:dataLabel>
+    <cs:lnRef idx="0"/>
+    <cs:fillRef idx="0"/>
+    <cs:effectRef idx="0"/>
+    <cs:fontRef idx="minor">
+      <a:schemeClr val="tx1">
+        <a:lumMod val="75000"/>
+        <a:lumOff val="25000"/>
+      </a:schemeClr>
+    </cs:fontRef>
+    <cs:defRPr sz="900" kern="1200"/>
+  </cs:dataLabel>
+  <cs:dataLabelCallout>
+    <cs:lnRef idx="0"/>
+    <cs:fillRef idx="0"/>
+    <cs:effectRef idx="0"/>
+    <cs:fontRef idx="minor">
+      <a:schemeClr val="dk1">
+        <a:lumMod val="65000"/>
+        <a:lumOff val="35000"/>
+      </a:schemeClr>
+    </cs:fontRef>
+    <cs:spPr>
+      <a:solidFill>
+        <a:schemeClr val="lt1"/>
+      </a:solidFill>
+      <a:ln>
+        <a:solidFill>
+          <a:schemeClr val="dk1">
+            <a:lumMod val="25000"/>
+            <a:lumOff val="75000"/>
+          </a:schemeClr>
+        </a:solidFill>
+      </a:ln>
+    </cs:spPr>
+    <cs:defRPr sz="900" kern="1200"/>
+    <cs:bodyPr rot="0" spcFirstLastPara="1" vertOverflow="clip" horzOverflow="clip" vert="horz" wrap="square" lIns="36576" tIns="18288" rIns="36576" bIns="18288" anchor="ctr" anchorCtr="1">
+      <a:spAutoFit/>
+    </cs:bodyPr>
+  </cs:dataLabelCallout>
+  <cs:dataPoint>
+    <cs:lnRef idx="0"/>
+    <cs:fillRef idx="1">
+      <cs:styleClr val="auto"/>
+    </cs:fillRef>
+    <cs:effectRef idx="0"/>
+    <cs:fontRef idx="minor">
+      <a:schemeClr val="tx1"/>
+    </cs:fontRef>
+    <cs:spPr>
+      <a:solidFill>
+        <a:schemeClr val="phClr"/>
+      </a:solidFill>
+    </cs:spPr>
+  </cs:dataPoint>
+  <cs:dataPoint3D>
+    <cs:lnRef idx="0"/>
+    <cs:fillRef idx="1">
+      <cs:styleClr val="auto"/>
+    </cs:fillRef>
+    <cs:effectRef idx="0"/>
+    <cs:fontRef idx="minor">
+      <a:schemeClr val="tx1"/>
+    </cs:fontRef>
+    <cs:spPr>
+      <a:solidFill>
+        <a:schemeClr val="phClr"/>
+      </a:solidFill>
+    </cs:spPr>
+  </cs:dataPoint3D>
+  <cs:dataPointLine>
+    <cs:lnRef idx="0">
+      <cs:styleClr val="auto"/>
+    </cs:lnRef>
+    <cs:fillRef idx="1"/>
+    <cs:effectRef idx="0"/>
+    <cs:fontRef idx="minor">
+      <a:schemeClr val="tx1"/>
+    </cs:fontRef>
+    <cs:spPr>
+      <a:ln w="28575" cap="rnd">
+        <a:solidFill>
+          <a:schemeClr val="phClr"/>
+        </a:solidFill>
+        <a:round/>
+      </a:ln>
+    </cs:spPr>
+  </cs:dataPointLine>
+  <cs:dataPointMarker>
+    <cs:lnRef idx="0">
+      <cs:styleClr val="auto"/>
+    </cs:lnRef>
+    <cs:fillRef idx="1">
+      <cs:styleClr val="auto"/>
+    </cs:fillRef>
+    <cs:effectRef idx="0"/>
+    <cs:fontRef idx="minor">
+      <a:schemeClr val="tx1"/>
+    </cs:fontRef>
+    <cs:spPr>
+      <a:solidFill>
+        <a:schemeClr val="phClr"/>
+      </a:solidFill>
+      <a:ln w="9525">
+        <a:solidFill>
+          <a:schemeClr val="phClr"/>
+        </a:solidFill>
+      </a:ln>
+    </cs:spPr>
+  </cs:dataPointMarker>
+  <cs:dataPointMarkerLayout symbol="circle" size="5"/>
+  <cs:dataPointWireframe>
+    <cs:lnRef idx="0">
+      <cs:styleClr val="auto"/>
+    </cs:lnRef>
+    <cs:fillRef idx="1"/>
+    <cs:effectRef idx="0"/>
+    <cs:fontRef idx="minor">
+      <a:schemeClr val="tx1"/>
+    </cs:fontRef>
+    <cs:spPr>
+      <a:ln w="9525" cap="rnd">
+        <a:solidFill>
+          <a:schemeClr val="phClr"/>
+        </a:solidFill>
+        <a:round/>
+      </a:ln>
+    </cs:spPr>
+  </cs:dataPointWireframe>
+  <cs:dataTable>
+    <cs:lnRef idx="0"/>
+    <cs:fillRef idx="0"/>
+    <cs:effectRef idx="0"/>
+    <cs:fontRef idx="minor">
+      <a:schemeClr val="tx1">
+        <a:lumMod val="65000"/>
+        <a:lumOff val="35000"/>
+      </a:schemeClr>
+    </cs:fontRef>
+    <cs:spPr>
+      <a:noFill/>
+      <a:ln w="9525" cap="flat" cmpd="sng" algn="ctr">
+        <a:solidFill>
+          <a:schemeClr val="tx1">
+            <a:lumMod val="15000"/>
+            <a:lumOff val="85000"/>
+          </a:schemeClr>
+        </a:solidFill>
+        <a:round/>
+      </a:ln>
+    </cs:spPr>
+    <cs:defRPr sz="900" kern="1200"/>
+  </cs:dataTable>
+  <cs:downBar>
+    <cs:lnRef idx="0"/>
+    <cs:fillRef idx="0"/>
+    <cs:effectRef idx="0"/>
+    <cs:fontRef idx="minor">
+      <a:schemeClr val="dk1"/>
+    </cs:fontRef>
+    <cs:spPr>
+      <a:solidFill>
+        <a:schemeClr val="dk1">
+          <a:lumMod val="65000"/>
+          <a:lumOff val="35000"/>
+        </a:schemeClr>
+      </a:solidFill>
+      <a:ln w="9525">
+        <a:solidFill>
+          <a:schemeClr val="tx1">
+            <a:lumMod val="65000"/>
+            <a:lumOff val="35000"/>
+          </a:schemeClr>
+        </a:solidFill>
+      </a:ln>
+    </cs:spPr>
+  </cs:downBar>
+  <cs:dropLine>
+    <cs:lnRef idx="0"/>
+    <cs:fillRef idx="0"/>
+    <cs:effectRef idx="0"/>
+    <cs:fontRef idx="minor">
+      <a:schemeClr val="tx1"/>
+    </cs:fontRef>
+    <cs:spPr>
+      <a:ln w="9525" cap="flat" cmpd="sng" algn="ctr">
+        <a:solidFill>
+          <a:schemeClr val="tx1">
+            <a:lumMod val="35000"/>
+            <a:lumOff val="65000"/>
+          </a:schemeClr>
+        </a:solidFill>
+        <a:round/>
+      </a:ln>
+    </cs:spPr>
+  </cs:dropLine>
+  <cs:errorBar>
+    <cs:lnRef idx="0"/>
+    <cs:fillRef idx="0"/>
+    <cs:effectRef idx="0"/>
+    <cs:fontRef idx="minor">
+      <a:schemeClr val="tx1"/>
+    </cs:fontRef>
+    <cs:spPr>
+      <a:ln w="9525" cap="flat" cmpd="sng" algn="ctr">
+        <a:solidFill>
+          <a:schemeClr val="tx1">
+            <a:lumMod val="65000"/>
+            <a:lumOff val="35000"/>
+          </a:schemeClr>
+        </a:solidFill>
+        <a:round/>
+      </a:ln>
+    </cs:spPr>
+  </cs:errorBar>
+  <cs:floor>
+    <cs:lnRef idx="0"/>
+    <cs:fillRef idx="0"/>
+    <cs:effectRef idx="0"/>
+    <cs:fontRef idx="minor">
+      <a:schemeClr val="tx1"/>
+    </cs:fontRef>
+    <cs:spPr>
+      <a:noFill/>
+      <a:ln>
+        <a:noFill/>
+      </a:ln>
+    </cs:spPr>
+  </cs:floor>
+  <cs:gridlineMajor>
+    <cs:lnRef idx="0"/>
+    <cs:fillRef idx="0"/>
+    <cs:effectRef idx="0"/>
+    <cs:fontRef idx="minor">
+      <a:schemeClr val="tx1"/>
+    </cs:fontRef>
+    <cs:spPr>
+      <a:ln w="9525" cap="flat" cmpd="sng" algn="ctr">
+        <a:solidFill>
+          <a:schemeClr val="tx1">
+            <a:lumMod val="15000"/>
+            <a:lumOff val="85000"/>
+          </a:schemeClr>
+        </a:solidFill>
+        <a:round/>
+      </a:ln>
+    </cs:spPr>
+  </cs:gridlineMajor>
+  <cs:gridlineMinor>
+    <cs:lnRef idx="0"/>
+    <cs:fillRef idx="0"/>
+    <cs:effectRef idx="0"/>
+    <cs:fontRef idx="minor">
+      <a:schemeClr val="tx1"/>
+    </cs:fontRef>
+    <cs:spPr>
+      <a:ln w="9525" cap="flat" cmpd="sng" algn="ctr">
+        <a:solidFill>
+          <a:schemeClr val="tx1">
+            <a:lumMod val="5000"/>
+            <a:lumOff val="95000"/>
+          </a:schemeClr>
+        </a:solidFill>
+        <a:round/>
+      </a:ln>
+    </cs:spPr>
+  </cs:gridlineMinor>
+  <cs:hiLoLine>
+    <cs:lnRef idx="0"/>
+    <cs:fillRef idx="0"/>
+    <cs:effectRef idx="0"/>
+    <cs:fontRef idx="minor">
+      <a:schemeClr val="tx1"/>
+    </cs:fontRef>
+    <cs:spPr>
+      <a:ln w="9525" cap="flat" cmpd="sng" algn="ctr">
+        <a:solidFill>
+          <a:schemeClr val="tx1">
+            <a:lumMod val="75000"/>
+            <a:lumOff val="25000"/>
+          </a:schemeClr>
+        </a:solidFill>
+        <a:round/>
+      </a:ln>
+    </cs:spPr>
+  </cs:hiLoLine>
+  <cs:leaderLine>
+    <cs:lnRef idx="0"/>
+    <cs:fillRef idx="0"/>
+    <cs:effectRef idx="0"/>
+    <cs:fontRef idx="minor">
+      <a:schemeClr val="tx1"/>
+    </cs:fontRef>
+    <cs:spPr>
+      <a:ln w="9525" cap="flat" cmpd="sng" algn="ctr">
+        <a:solidFill>
+          <a:schemeClr val="tx1">
+            <a:lumMod val="35000"/>
+            <a:lumOff val="65000"/>
+          </a:schemeClr>
+        </a:solidFill>
+        <a:round/>
+      </a:ln>
+    </cs:spPr>
+  </cs:leaderLine>
+  <cs:legend>
+    <cs:lnRef idx="0"/>
+    <cs:fillRef idx="0"/>
+    <cs:effectRef idx="0"/>
+    <cs:fontRef idx="minor">
+      <a:schemeClr val="tx1">
+        <a:lumMod val="65000"/>
+        <a:lumOff val="35000"/>
+      </a:schemeClr>
+    </cs:fontRef>
+    <cs:defRPr sz="900" kern="1200"/>
+  </cs:legend>
+  <cs:plotArea mods="allowNoFillOverride allowNoLineOverride">
+    <cs:lnRef idx="0"/>
+    <cs:fillRef idx="0"/>
+    <cs:effectRef idx="0"/>
+    <cs:fontRef idx="minor">
+      <a:schemeClr val="tx1"/>
+    </cs:fontRef>
+  </cs:plotArea>
+  <cs:plotArea3D mods="allowNoFillOverride allowNoLineOverride">
+    <cs:lnRef idx="0"/>
+    <cs:fillRef idx="0"/>
+    <cs:effectRef idx="0"/>
+    <cs:fontRef idx="minor">
+      <a:schemeClr val="tx1"/>
+    </cs:fontRef>
+  </cs:plotArea3D>
+  <cs:seriesAxis>
+    <cs:lnRef idx="0"/>
+    <cs:fillRef idx="0"/>
+    <cs:effectRef idx="0"/>
+    <cs:fontRef idx="minor">
+      <a:schemeClr val="tx1">
+        <a:lumMod val="65000"/>
+        <a:lumOff val="35000"/>
+      </a:schemeClr>
+    </cs:fontRef>
+    <cs:defRPr sz="900" kern="1200"/>
+  </cs:seriesAxis>
+  <cs:seriesLine>
+    <cs:lnRef idx="0"/>
+    <cs:fillRef idx="0"/>
+    <cs:effectRef idx="0"/>
+    <cs:fontRef idx="minor">
+      <a:schemeClr val="tx1"/>
+    </cs:fontRef>
+    <cs:spPr>
+      <a:ln w="9525" cap="flat" cmpd="sng" algn="ctr">
+        <a:solidFill>
+          <a:schemeClr val="tx1">
+            <a:lumMod val="35000"/>
+            <a:lumOff val="65000"/>
+          </a:schemeClr>
+        </a:solidFill>
+        <a:round/>
+      </a:ln>
+    </cs:spPr>
+  </cs:seriesLine>
+  <cs:title>
+    <cs:lnRef idx="0"/>
+    <cs:fillRef idx="0"/>
+    <cs:effectRef idx="0"/>
+    <cs:fontRef idx="minor">
+      <a:schemeClr val="tx1">
+        <a:lumMod val="65000"/>
+        <a:lumOff val="35000"/>
+      </a:schemeClr>
+    </cs:fontRef>
+    <cs:defRPr sz="1400" b="0" kern="1200" spc="0" baseline="0"/>
+  </cs:title>
+  <cs:trendline>
+    <cs:lnRef idx="0">
+      <cs:styleClr val="auto"/>
+    </cs:lnRef>
+    <cs:fillRef idx="0"/>
+    <cs:effectRef idx="0"/>
+    <cs:fontRef idx="minor">
+      <a:schemeClr val="tx1"/>
+    </cs:fontRef>
+    <cs:spPr>
+      <a:ln w="19050" cap="rnd">
+        <a:solidFill>
+          <a:schemeClr val="phClr"/>
+        </a:solidFill>
+        <a:prstDash val="sysDot"/>
+      </a:ln>
+    </cs:spPr>
+  </cs:trendline>
+  <cs:trendlineLabel>
+    <cs:lnRef idx="0"/>
+    <cs:fillRef idx="0"/>
+    <cs:effectRef idx="0"/>
+    <cs:fontRef idx="minor">
+      <a:schemeClr val="tx1">
+        <a:lumMod val="65000"/>
+        <a:lumOff val="35000"/>
+      </a:schemeClr>
+    </cs:fontRef>
+    <cs:defRPr sz="900" kern="1200"/>
+  </cs:trendlineLabel>
+  <cs:upBar>
+    <cs:lnRef idx="0"/>
+    <cs:fillRef idx="0"/>
+    <cs:effectRef idx="0"/>
+    <cs:fontRef idx="minor">
+      <a:schemeClr val="dk1"/>
+    </cs:fontRef>
+    <cs:spPr>
+      <a:solidFill>
+        <a:schemeClr val="lt1"/>
+      </a:solidFill>
+      <a:ln w="9525">
+        <a:solidFill>
+          <a:schemeClr val="tx1">
+            <a:lumMod val="15000"/>
+            <a:lumOff val="85000"/>
+          </a:schemeClr>
+        </a:solidFill>
+      </a:ln>
+    </cs:spPr>
+  </cs:upBar>
+  <cs:valueAxis>
+    <cs:lnRef idx="0"/>
+    <cs:fillRef idx="0"/>
+    <cs:effectRef idx="0"/>
+    <cs:fontRef idx="minor">
+      <a:schemeClr val="tx1">
+        <a:lumMod val="65000"/>
+        <a:lumOff val="35000"/>
+      </a:schemeClr>
+    </cs:fontRef>
+    <cs:defRPr sz="900" kern="1200"/>
+  </cs:valueAxis>
+  <cs:wall>
+    <cs:lnRef idx="0"/>
+    <cs:fillRef idx="0"/>
+    <cs:effectRef idx="0"/>
+    <cs:fontRef idx="minor">
+      <a:schemeClr val="tx1"/>
+    </cs:fontRef>
+    <cs:spPr>
+      <a:noFill/>
+      <a:ln>
+        <a:noFill/>
+      </a:ln>
+    </cs:spPr>
+  </cs:wall>
+</cs:chartStyle>
+</file>
+
+<file path=ppt/charts/style9.xml><?xml version="1.0" encoding="utf-8"?>
+<cs:chartStyle xmlns:cs="http://schemas.microsoft.com/office/drawing/2012/chartStyle" xmlns:a="http://schemas.openxmlformats.org/drawingml/2006/main" id="227">
+  <cs:axisTitle>
+    <cs:lnRef idx="0"/>
+    <cs:fillRef idx="0"/>
+    <cs:effectRef idx="0"/>
+    <cs:fontRef idx="minor">
+      <a:schemeClr val="tx1">
+        <a:lumMod val="65000"/>
+        <a:lumOff val="35000"/>
+      </a:schemeClr>
+    </cs:fontRef>
+    <cs:defRPr sz="1000" kern="1200"/>
+  </cs:axisTitle>
+  <cs:categoryAxis>
+    <cs:lnRef idx="0"/>
+    <cs:fillRef idx="0"/>
+    <cs:effectRef idx="0"/>
+    <cs:fontRef idx="minor">
+      <a:schemeClr val="tx1">
+        <a:lumMod val="65000"/>
+        <a:lumOff val="35000"/>
+      </a:schemeClr>
+    </cs:fontRef>
+    <cs:spPr>
+      <a:ln w="9525" cap="flat" cmpd="sng" algn="ctr">
+        <a:solidFill>
+          <a:schemeClr val="tx1">
+            <a:lumMod val="15000"/>
+            <a:lumOff val="85000"/>
+          </a:schemeClr>
+        </a:solidFill>
+        <a:round/>
+      </a:ln>
+    </cs:spPr>
+    <cs:defRPr sz="900" kern="1200"/>
+  </cs:categoryAxis>
+  <cs:chartArea mods="allowNoFillOverride allowNoLineOverride">
+    <cs:lnRef idx="0"/>
+    <cs:fillRef idx="0"/>
+    <cs:effectRef idx="0"/>
+    <cs:fontRef idx="minor">
+      <a:schemeClr val="tx1"/>
+    </cs:fontRef>
+    <cs:spPr>
+      <a:solidFill>
+        <a:schemeClr val="bg1"/>
+      </a:solidFill>
+      <a:ln w="9525" cap="flat" cmpd="sng" algn="ctr">
+        <a:solidFill>
+          <a:schemeClr val="tx1">
+            <a:lumMod val="15000"/>
+            <a:lumOff val="85000"/>
+          </a:schemeClr>
+        </a:solidFill>
+        <a:round/>
+      </a:ln>
+    </cs:spPr>
+    <cs:defRPr sz="1000" kern="1200"/>
+  </cs:chartArea>
+  <cs:dataLabel>
+    <cs:lnRef idx="0"/>
+    <cs:fillRef idx="0"/>
+    <cs:effectRef idx="0"/>
+    <cs:fontRef idx="minor">
+      <a:schemeClr val="tx1">
+        <a:lumMod val="75000"/>
+        <a:lumOff val="25000"/>
+      </a:schemeClr>
+    </cs:fontRef>
+    <cs:defRPr sz="900" kern="1200"/>
+  </cs:dataLabel>
+  <cs:dataLabelCallout>
+    <cs:lnRef idx="0"/>
+    <cs:fillRef idx="0"/>
+    <cs:effectRef idx="0"/>
+    <cs:fontRef idx="minor">
+      <a:schemeClr val="dk1">
+        <a:lumMod val="65000"/>
+        <a:lumOff val="35000"/>
+      </a:schemeClr>
+    </cs:fontRef>
+    <cs:spPr>
+      <a:solidFill>
+        <a:schemeClr val="lt1"/>
+      </a:solidFill>
+      <a:ln>
+        <a:solidFill>
+          <a:schemeClr val="dk1">
+            <a:lumMod val="25000"/>
+            <a:lumOff val="75000"/>
+          </a:schemeClr>
+        </a:solidFill>
+      </a:ln>
+    </cs:spPr>
+    <cs:defRPr sz="900" kern="1200"/>
+    <cs:bodyPr rot="0" spcFirstLastPara="1" vertOverflow="clip" horzOverflow="clip" vert="horz" wrap="square" lIns="36576" tIns="18288" rIns="36576" bIns="18288" anchor="ctr" anchorCtr="1">
+      <a:spAutoFit/>
+    </cs:bodyPr>
+  </cs:dataLabelCallout>
+  <cs:dataPoint>
+    <cs:lnRef idx="0"/>
+    <cs:fillRef idx="1">
+      <cs:styleClr val="auto"/>
+    </cs:fillRef>
+    <cs:effectRef idx="0"/>
+    <cs:fontRef idx="minor">
+      <a:schemeClr val="tx1"/>
+    </cs:fontRef>
+    <cs:spPr>
+      <a:solidFill>
+        <a:schemeClr val="phClr"/>
+      </a:solidFill>
+    </cs:spPr>
+  </cs:dataPoint>
+  <cs:dataPoint3D>
+    <cs:lnRef idx="0"/>
+    <cs:fillRef idx="1">
+      <cs:styleClr val="auto"/>
+    </cs:fillRef>
+    <cs:effectRef idx="0"/>
+    <cs:fontRef idx="minor">
+      <a:schemeClr val="tx1"/>
+    </cs:fontRef>
+    <cs:spPr>
+      <a:solidFill>
+        <a:schemeClr val="phClr"/>
+      </a:solidFill>
+    </cs:spPr>
+  </cs:dataPoint3D>
+  <cs:dataPointLine>
+    <cs:lnRef idx="0">
+      <cs:styleClr val="auto"/>
+    </cs:lnRef>
+    <cs:fillRef idx="1"/>
+    <cs:effectRef idx="0"/>
+    <cs:fontRef idx="minor">
+      <a:schemeClr val="tx1"/>
+    </cs:fontRef>
+    <cs:spPr>
+      <a:ln w="28575" cap="rnd">
+        <a:solidFill>
+          <a:schemeClr val="phClr"/>
+        </a:solidFill>
+        <a:round/>
+      </a:ln>
+    </cs:spPr>
+  </cs:dataPointLine>
+  <cs:dataPointMarker>
+    <cs:lnRef idx="0">
+      <cs:styleClr val="auto"/>
+    </cs:lnRef>
+    <cs:fillRef idx="1">
+      <cs:styleClr val="auto"/>
+    </cs:fillRef>
+    <cs:effectRef idx="0"/>
+    <cs:fontRef idx="minor">
+      <a:schemeClr val="tx1"/>
+    </cs:fontRef>
+    <cs:spPr>
+      <a:solidFill>
+        <a:schemeClr val="phClr"/>
+      </a:solidFill>
       <a:ln w="9525">
         <a:solidFill>
           <a:schemeClr val="phClr"/>
@@ -10830,7 +17487,7 @@
           <a:p>
             <a:fld id="{81638023-F60A-4B21-BA4E-BD9AA67C04CD}" type="datetimeFigureOut">
               <a:rPr lang="en-US" smtClean="0"/>
-              <a:t>10/6/2025</a:t>
+              <a:t>11/14/2025</a:t>
             </a:fld>
             <a:endParaRPr lang="en-US"/>
           </a:p>
@@ -11038,7 +17695,7 @@
           <a:p>
             <a:fld id="{81638023-F60A-4B21-BA4E-BD9AA67C04CD}" type="datetimeFigureOut">
               <a:rPr lang="en-US" smtClean="0"/>
-              <a:t>10/6/2025</a:t>
+              <a:t>11/14/2025</a:t>
             </a:fld>
             <a:endParaRPr lang="en-US"/>
           </a:p>
@@ -11247,7 +17904,7 @@
           <a:p>
             <a:fld id="{81638023-F60A-4B21-BA4E-BD9AA67C04CD}" type="datetimeFigureOut">
               <a:rPr lang="en-US" smtClean="0"/>
-              <a:t>10/6/2025</a:t>
+              <a:t>11/14/2025</a:t>
             </a:fld>
             <a:endParaRPr lang="en-US"/>
           </a:p>
@@ -11562,7 +18219,7 @@
           <a:p>
             <a:fld id="{81638023-F60A-4B21-BA4E-BD9AA67C04CD}" type="datetimeFigureOut">
               <a:rPr lang="en-US" smtClean="0"/>
-              <a:t>10/6/2025</a:t>
+              <a:t>11/14/2025</a:t>
             </a:fld>
             <a:endParaRPr lang="en-US"/>
           </a:p>
@@ -11868,7 +18525,7 @@
           <a:p>
             <a:fld id="{81638023-F60A-4B21-BA4E-BD9AA67C04CD}" type="datetimeFigureOut">
               <a:rPr lang="en-US" smtClean="0"/>
-              <a:t>10/6/2025</a:t>
+              <a:t>11/14/2025</a:t>
             </a:fld>
             <a:endParaRPr lang="en-US"/>
           </a:p>
@@ -12316,7 +18973,7 @@
           <a:p>
             <a:fld id="{81638023-F60A-4B21-BA4E-BD9AA67C04CD}" type="datetimeFigureOut">
               <a:rPr lang="en-US" smtClean="0"/>
-              <a:t>10/6/2025</a:t>
+              <a:t>11/14/2025</a:t>
             </a:fld>
             <a:endParaRPr lang="en-US"/>
           </a:p>
@@ -12498,7 +19155,7 @@
           <a:p>
             <a:fld id="{81638023-F60A-4B21-BA4E-BD9AA67C04CD}" type="datetimeFigureOut">
               <a:rPr lang="en-US" smtClean="0"/>
-              <a:t>10/6/2025</a:t>
+              <a:t>11/14/2025</a:t>
             </a:fld>
             <a:endParaRPr lang="en-US"/>
           </a:p>
@@ -12647,7 +19304,7 @@
           <a:p>
             <a:fld id="{81638023-F60A-4B21-BA4E-BD9AA67C04CD}" type="datetimeFigureOut">
               <a:rPr lang="en-US" smtClean="0"/>
-              <a:t>10/6/2025</a:t>
+              <a:t>11/14/2025</a:t>
             </a:fld>
             <a:endParaRPr lang="en-US"/>
           </a:p>
@@ -12995,7 +19652,7 @@
           <a:p>
             <a:fld id="{81638023-F60A-4B21-BA4E-BD9AA67C04CD}" type="datetimeFigureOut">
               <a:rPr lang="en-US" smtClean="0"/>
-              <a:t>10/6/2025</a:t>
+              <a:t>11/14/2025</a:t>
             </a:fld>
             <a:endParaRPr lang="en-US"/>
           </a:p>
@@ -13323,7 +19980,7 @@
           <a:p>
             <a:fld id="{81638023-F60A-4B21-BA4E-BD9AA67C04CD}" type="datetimeFigureOut">
               <a:rPr lang="en-US" smtClean="0"/>
-              <a:t>10/6/2025</a:t>
+              <a:t>11/14/2025</a:t>
             </a:fld>
             <a:endParaRPr lang="en-US"/>
           </a:p>
@@ -13601,7 +20258,7 @@
           <a:p>
             <a:fld id="{81638023-F60A-4B21-BA4E-BD9AA67C04CD}" type="datetimeFigureOut">
               <a:rPr lang="en-US" smtClean="0"/>
-              <a:t>10/6/2025</a:t>
+              <a:t>11/14/2025</a:t>
             </a:fld>
             <a:endParaRPr lang="en-US"/>
           </a:p>
@@ -14272,6 +20929,106 @@
 </p:sld>
 </file>
 
+<file path=ppt/slides/slide10.xml><?xml version="1.0" encoding="utf-8"?>
+<p:sld xmlns:a="http://schemas.openxmlformats.org/drawingml/2006/main" xmlns:r="http://schemas.openxmlformats.org/officeDocument/2006/relationships" xmlns:p="http://schemas.openxmlformats.org/presentationml/2006/main">
+  <p:cSld>
+    <p:spTree>
+      <p:nvGrpSpPr>
+        <p:cNvPr id="1" name=""/>
+        <p:cNvGrpSpPr/>
+        <p:nvPr/>
+      </p:nvGrpSpPr>
+      <p:grpSpPr>
+        <a:xfrm>
+          <a:off x="0" y="0"/>
+          <a:ext cx="0" cy="0"/>
+          <a:chOff x="0" y="0"/>
+          <a:chExt cx="0" cy="0"/>
+        </a:xfrm>
+      </p:grpSpPr>
+      <p:sp>
+        <p:nvSpPr>
+          <p:cNvPr id="4" name="Title 1">
+            <a:extLst>
+              <a:ext uri="{FF2B5EF4-FFF2-40B4-BE49-F238E27FC236}">
+                <a16:creationId xmlns:a16="http://schemas.microsoft.com/office/drawing/2014/main" id="{805C12A9-AF8E-4EE1-ADBE-9EA501E3C35F}"/>
+              </a:ext>
+            </a:extLst>
+          </p:cNvPr>
+          <p:cNvSpPr>
+            <a:spLocks noGrp="1"/>
+          </p:cNvSpPr>
+          <p:nvPr>
+            <p:ph type="title"/>
+          </p:nvPr>
+        </p:nvSpPr>
+        <p:spPr>
+          <a:xfrm>
+            <a:off x="838200" y="365125"/>
+            <a:ext cx="10515600" cy="1325563"/>
+          </a:xfrm>
+        </p:spPr>
+        <p:txBody>
+          <a:bodyPr anchor="ctr">
+            <a:normAutofit/>
+          </a:bodyPr>
+          <a:lstStyle/>
+          <a:p>
+            <a:pPr>
+              <a:tabLst>
+                <a:tab pos="3544888" algn="l"/>
+              </a:tabLst>
+            </a:pPr>
+            <a:r>
+              <a:rPr lang="en-US" sz="2800" b="1" dirty="0"/>
+              <a:t>Service Members and Their Dependents With eGFR-based CKD Stages 3–5 Who Also have a Diagnosis Code for CKD in the Military Health System by CKD Stage, Age Standardized</a:t>
+            </a:r>
+          </a:p>
+        </p:txBody>
+      </p:sp>
+      <p:graphicFrame>
+        <p:nvGraphicFramePr>
+          <p:cNvPr id="7" name="Chart 6">
+            <a:extLst>
+              <a:ext uri="{FF2B5EF4-FFF2-40B4-BE49-F238E27FC236}">
+                <a16:creationId xmlns:a16="http://schemas.microsoft.com/office/drawing/2014/main" id="{94BAECCC-4E23-4096-965A-3C7A001E893E}"/>
+              </a:ext>
+            </a:extLst>
+          </p:cNvPr>
+          <p:cNvGraphicFramePr>
+            <a:graphicFrameLocks/>
+          </p:cNvGraphicFramePr>
+          <p:nvPr>
+            <p:extLst>
+              <p:ext uri="{D42A27DB-BD31-4B8C-83A1-F6EECF244321}">
+                <p14:modId xmlns:p14="http://schemas.microsoft.com/office/powerpoint/2010/main" val="551095212"/>
+              </p:ext>
+            </p:extLst>
+          </p:nvPr>
+        </p:nvGraphicFramePr>
+        <p:xfrm>
+          <a:off x="381000" y="1692937"/>
+          <a:ext cx="11430000" cy="4572000"/>
+        </p:xfrm>
+        <a:graphic>
+          <a:graphicData uri="http://schemas.openxmlformats.org/drawingml/2006/chart">
+            <c:chart xmlns:c="http://schemas.openxmlformats.org/drawingml/2006/chart" xmlns:r="http://schemas.openxmlformats.org/officeDocument/2006/relationships" r:id="rId2"/>
+          </a:graphicData>
+        </a:graphic>
+      </p:graphicFrame>
+    </p:spTree>
+    <p:extLst>
+      <p:ext uri="{BB962C8B-B14F-4D97-AF65-F5344CB8AC3E}">
+        <p14:creationId xmlns:p14="http://schemas.microsoft.com/office/powerpoint/2010/main" val="1567653783"/>
+      </p:ext>
+    </p:extLst>
+  </p:cSld>
+  <p:clrMapOvr>
+    <a:masterClrMapping/>
+  </p:clrMapOvr>
+</p:sld>
+</file>
+
 <file path=ppt/slides/slide2.xml><?xml version="1.0" encoding="utf-8"?>
 <p:sld xmlns:a="http://schemas.openxmlformats.org/drawingml/2006/main" xmlns:r="http://schemas.openxmlformats.org/officeDocument/2006/relationships" xmlns:p="http://schemas.openxmlformats.org/presentationml/2006/main">
   <p:cSld>
@@ -14814,7 +21571,7 @@
           <p:nvPr>
             <p:extLst>
               <p:ext uri="{D42A27DB-BD31-4B8C-83A1-F6EECF244321}">
-                <p14:modId xmlns:p14="http://schemas.microsoft.com/office/powerpoint/2010/main" val="3408052043"/>
+                <p14:modId xmlns:p14="http://schemas.microsoft.com/office/powerpoint/2010/main" val="1336775296"/>
               </p:ext>
             </p:extLst>
           </p:nvPr>
@@ -14914,7 +21671,7 @@
           <p:nvPr>
             <p:extLst>
               <p:ext uri="{D42A27DB-BD31-4B8C-83A1-F6EECF244321}">
-                <p14:modId xmlns:p14="http://schemas.microsoft.com/office/powerpoint/2010/main" val="2458755005"/>
+                <p14:modId xmlns:p14="http://schemas.microsoft.com/office/powerpoint/2010/main" val="174899493"/>
               </p:ext>
             </p:extLst>
           </p:nvPr>
@@ -14933,6 +21690,106 @@
     <p:extLst>
       <p:ext uri="{BB962C8B-B14F-4D97-AF65-F5344CB8AC3E}">
         <p14:creationId xmlns:p14="http://schemas.microsoft.com/office/powerpoint/2010/main" val="3650895920"/>
+      </p:ext>
+    </p:extLst>
+  </p:cSld>
+  <p:clrMapOvr>
+    <a:masterClrMapping/>
+  </p:clrMapOvr>
+</p:sld>
+</file>
+
+<file path=ppt/slides/slide9.xml><?xml version="1.0" encoding="utf-8"?>
+<p:sld xmlns:a="http://schemas.openxmlformats.org/drawingml/2006/main" xmlns:r="http://schemas.openxmlformats.org/officeDocument/2006/relationships" xmlns:p="http://schemas.openxmlformats.org/presentationml/2006/main">
+  <p:cSld>
+    <p:spTree>
+      <p:nvGrpSpPr>
+        <p:cNvPr id="1" name=""/>
+        <p:cNvGrpSpPr/>
+        <p:nvPr/>
+      </p:nvGrpSpPr>
+      <p:grpSpPr>
+        <a:xfrm>
+          <a:off x="0" y="0"/>
+          <a:ext cx="0" cy="0"/>
+          <a:chOff x="0" y="0"/>
+          <a:chExt cx="0" cy="0"/>
+        </a:xfrm>
+      </p:grpSpPr>
+      <p:sp>
+        <p:nvSpPr>
+          <p:cNvPr id="4" name="Title 1">
+            <a:extLst>
+              <a:ext uri="{FF2B5EF4-FFF2-40B4-BE49-F238E27FC236}">
+                <a16:creationId xmlns:a16="http://schemas.microsoft.com/office/drawing/2014/main" id="{805C12A9-AF8E-4EE1-ADBE-9EA501E3C35F}"/>
+              </a:ext>
+            </a:extLst>
+          </p:cNvPr>
+          <p:cNvSpPr>
+            <a:spLocks noGrp="1"/>
+          </p:cNvSpPr>
+          <p:nvPr>
+            <p:ph type="title"/>
+          </p:nvPr>
+        </p:nvSpPr>
+        <p:spPr>
+          <a:xfrm>
+            <a:off x="838200" y="365125"/>
+            <a:ext cx="10515600" cy="1325563"/>
+          </a:xfrm>
+        </p:spPr>
+        <p:txBody>
+          <a:bodyPr anchor="ctr">
+            <a:normAutofit/>
+          </a:bodyPr>
+          <a:lstStyle/>
+          <a:p>
+            <a:pPr>
+              <a:tabLst>
+                <a:tab pos="3544888" algn="l"/>
+              </a:tabLst>
+            </a:pPr>
+            <a:r>
+              <a:rPr lang="en-US" sz="2800" b="1" dirty="0"/>
+              <a:t>Service Members and Their Dependents With eGFR-based CKD Stages 3–5 Who Also have a Diagnosis Code for CKD in the Military Health System by CKD Stage, Crude</a:t>
+            </a:r>
+          </a:p>
+        </p:txBody>
+      </p:sp>
+      <p:graphicFrame>
+        <p:nvGraphicFramePr>
+          <p:cNvPr id="5" name="Chart 4">
+            <a:extLst>
+              <a:ext uri="{FF2B5EF4-FFF2-40B4-BE49-F238E27FC236}">
+                <a16:creationId xmlns:a16="http://schemas.microsoft.com/office/drawing/2014/main" id="{D1FAC857-23BE-3C47-4F25-63A238781EF5}"/>
+              </a:ext>
+            </a:extLst>
+          </p:cNvPr>
+          <p:cNvGraphicFramePr>
+            <a:graphicFrameLocks/>
+          </p:cNvGraphicFramePr>
+          <p:nvPr>
+            <p:extLst>
+              <p:ext uri="{D42A27DB-BD31-4B8C-83A1-F6EECF244321}">
+                <p14:modId xmlns:p14="http://schemas.microsoft.com/office/powerpoint/2010/main" val="3431693304"/>
+              </p:ext>
+            </p:extLst>
+          </p:nvPr>
+        </p:nvGraphicFramePr>
+        <p:xfrm>
+          <a:off x="381000" y="1690688"/>
+          <a:ext cx="11430000" cy="4572000"/>
+        </p:xfrm>
+        <a:graphic>
+          <a:graphicData uri="http://schemas.openxmlformats.org/drawingml/2006/chart">
+            <c:chart xmlns:c="http://schemas.openxmlformats.org/drawingml/2006/chart" xmlns:r="http://schemas.openxmlformats.org/officeDocument/2006/relationships" r:id="rId2"/>
+          </a:graphicData>
+        </a:graphic>
+      </p:graphicFrame>
+    </p:spTree>
+    <p:extLst>
+      <p:ext uri="{BB962C8B-B14F-4D97-AF65-F5344CB8AC3E}">
+        <p14:creationId xmlns:p14="http://schemas.microsoft.com/office/powerpoint/2010/main" val="3754275102"/>
       </p:ext>
     </p:extLst>
   </p:cSld>

--- a/CKDSurveillance/PPT/Q759.pptx
+++ b/CKDSurveillance/PPT/Q759.pptx
@@ -17487,7 +17487,7 @@
           <a:p>
             <a:fld id="{81638023-F60A-4B21-BA4E-BD9AA67C04CD}" type="datetimeFigureOut">
               <a:rPr lang="en-US" smtClean="0"/>
-              <a:t>11/14/2025</a:t>
+              <a:t>11/21/2025</a:t>
             </a:fld>
             <a:endParaRPr lang="en-US"/>
           </a:p>
@@ -17695,7 +17695,7 @@
           <a:p>
             <a:fld id="{81638023-F60A-4B21-BA4E-BD9AA67C04CD}" type="datetimeFigureOut">
               <a:rPr lang="en-US" smtClean="0"/>
-              <a:t>11/14/2025</a:t>
+              <a:t>11/21/2025</a:t>
             </a:fld>
             <a:endParaRPr lang="en-US"/>
           </a:p>
@@ -17904,7 +17904,7 @@
           <a:p>
             <a:fld id="{81638023-F60A-4B21-BA4E-BD9AA67C04CD}" type="datetimeFigureOut">
               <a:rPr lang="en-US" smtClean="0"/>
-              <a:t>11/14/2025</a:t>
+              <a:t>11/21/2025</a:t>
             </a:fld>
             <a:endParaRPr lang="en-US"/>
           </a:p>
@@ -18219,7 +18219,7 @@
           <a:p>
             <a:fld id="{81638023-F60A-4B21-BA4E-BD9AA67C04CD}" type="datetimeFigureOut">
               <a:rPr lang="en-US" smtClean="0"/>
-              <a:t>11/14/2025</a:t>
+              <a:t>11/21/2025</a:t>
             </a:fld>
             <a:endParaRPr lang="en-US"/>
           </a:p>
@@ -18525,7 +18525,7 @@
           <a:p>
             <a:fld id="{81638023-F60A-4B21-BA4E-BD9AA67C04CD}" type="datetimeFigureOut">
               <a:rPr lang="en-US" smtClean="0"/>
-              <a:t>11/14/2025</a:t>
+              <a:t>11/21/2025</a:t>
             </a:fld>
             <a:endParaRPr lang="en-US"/>
           </a:p>
@@ -18973,7 +18973,7 @@
           <a:p>
             <a:fld id="{81638023-F60A-4B21-BA4E-BD9AA67C04CD}" type="datetimeFigureOut">
               <a:rPr lang="en-US" smtClean="0"/>
-              <a:t>11/14/2025</a:t>
+              <a:t>11/21/2025</a:t>
             </a:fld>
             <a:endParaRPr lang="en-US"/>
           </a:p>
@@ -19155,7 +19155,7 @@
           <a:p>
             <a:fld id="{81638023-F60A-4B21-BA4E-BD9AA67C04CD}" type="datetimeFigureOut">
               <a:rPr lang="en-US" smtClean="0"/>
-              <a:t>11/14/2025</a:t>
+              <a:t>11/21/2025</a:t>
             </a:fld>
             <a:endParaRPr lang="en-US"/>
           </a:p>
@@ -19304,7 +19304,7 @@
           <a:p>
             <a:fld id="{81638023-F60A-4B21-BA4E-BD9AA67C04CD}" type="datetimeFigureOut">
               <a:rPr lang="en-US" smtClean="0"/>
-              <a:t>11/14/2025</a:t>
+              <a:t>11/21/2025</a:t>
             </a:fld>
             <a:endParaRPr lang="en-US"/>
           </a:p>
@@ -19652,7 +19652,7 @@
           <a:p>
             <a:fld id="{81638023-F60A-4B21-BA4E-BD9AA67C04CD}" type="datetimeFigureOut">
               <a:rPr lang="en-US" smtClean="0"/>
-              <a:t>11/14/2025</a:t>
+              <a:t>11/21/2025</a:t>
             </a:fld>
             <a:endParaRPr lang="en-US"/>
           </a:p>
@@ -19980,7 +19980,7 @@
           <a:p>
             <a:fld id="{81638023-F60A-4B21-BA4E-BD9AA67C04CD}" type="datetimeFigureOut">
               <a:rPr lang="en-US" smtClean="0"/>
-              <a:t>11/14/2025</a:t>
+              <a:t>11/21/2025</a:t>
             </a:fld>
             <a:endParaRPr lang="en-US"/>
           </a:p>
@@ -20258,7 +20258,7 @@
           <a:p>
             <a:fld id="{81638023-F60A-4B21-BA4E-BD9AA67C04CD}" type="datetimeFigureOut">
               <a:rPr lang="en-US" smtClean="0"/>
-              <a:t>11/14/2025</a:t>
+              <a:t>11/21/2025</a:t>
             </a:fld>
             <a:endParaRPr lang="en-US"/>
           </a:p>
@@ -20699,7 +20699,15 @@
           <a:p>
             <a:r>
               <a:rPr lang="en-US" sz="4000" b="1" dirty="0"/>
-              <a:t>Service Members and Their Dependents With eGFR-based CKD Stages 3–5 Who Also have a Diagnosis Code for CKD in the Military Health System </a:t>
+              <a:t>Service Members and Their Dependents with eGFR-based CKD Stages 3–5 who </a:t>
+            </a:r>
+            <a:r>
+              <a:rPr lang="en-US" sz="4000" dirty="0"/>
+              <a:t>a</a:t>
+            </a:r>
+            <a:r>
+              <a:rPr lang="en-US" sz="4000" b="1" dirty="0"/>
+              <a:t>lso have a Diagnosis Code for CKD in the Military Health System </a:t>
             </a:r>
           </a:p>
         </p:txBody>
@@ -20965,12 +20973,12 @@
         <p:spPr>
           <a:xfrm>
             <a:off x="838200" y="365125"/>
-            <a:ext cx="10515600" cy="1325563"/>
+            <a:ext cx="10972800" cy="1325563"/>
           </a:xfrm>
         </p:spPr>
         <p:txBody>
           <a:bodyPr anchor="ctr">
-            <a:normAutofit/>
+            <a:noAutofit/>
           </a:bodyPr>
           <a:lstStyle/>
           <a:p>
@@ -20980,8 +20988,16 @@
               </a:tabLst>
             </a:pPr>
             <a:r>
-              <a:rPr lang="en-US" sz="2800" b="1" dirty="0"/>
-              <a:t>Service Members and Their Dependents With eGFR-based CKD Stages 3–5 Who Also have a Diagnosis Code for CKD in the Military Health System by CKD Stage, Age Standardized</a:t>
+              <a:rPr lang="en-US" sz="3600" b="1" dirty="0"/>
+              <a:t>Service Members and Their Dependents with eGFR-based CKD Stages 3–5 who </a:t>
+            </a:r>
+            <a:r>
+              <a:rPr lang="en-US" sz="3600" dirty="0"/>
+              <a:t>a</a:t>
+            </a:r>
+            <a:r>
+              <a:rPr lang="en-US" sz="3600" b="1" dirty="0"/>
+              <a:t>lso have a Diagnosis Code for CKD in the Military Health System by CKD Stage, Age Standardized</a:t>
             </a:r>
           </a:p>
         </p:txBody>
@@ -21076,7 +21092,15 @@
           <a:p>
             <a:r>
               <a:rPr lang="en-US" sz="3600" b="1" dirty="0"/>
-              <a:t>Service Members and Their Dependents With eGFR-based CKD Stages 3–5 Who Also have a Diagnosis Code for CKD in the Military Health System, Crude</a:t>
+              <a:t>Service Members and Their Dependents with eGFR-based CKD Stages 3–5 who </a:t>
+            </a:r>
+            <a:r>
+              <a:rPr lang="en-US" sz="3600" dirty="0"/>
+              <a:t>a</a:t>
+            </a:r>
+            <a:r>
+              <a:rPr lang="en-US" sz="3600" b="1" dirty="0"/>
+              <a:t>lso have a Diagnosis Code for CKD in the Military Health System, Crude</a:t>
             </a:r>
           </a:p>
         </p:txBody>
@@ -21170,8 +21194,16 @@
           <a:lstStyle/>
           <a:p>
             <a:r>
-              <a:rPr lang="en-US" sz="3200" b="1" dirty="0"/>
-              <a:t>Service Members and Their Dependents With eGFR-based CKD Stages 3–5 Who Also have a Diagnosis Code for CKD in the Military Health System, Age Standardized</a:t>
+              <a:rPr lang="en-US" sz="3600" b="1" dirty="0"/>
+              <a:t>Service Members and Their Dependents with eGFR-based CKD Stages 3–5 who </a:t>
+            </a:r>
+            <a:r>
+              <a:rPr lang="en-US" sz="3600" dirty="0"/>
+              <a:t>a</a:t>
+            </a:r>
+            <a:r>
+              <a:rPr lang="en-US" sz="3600" b="1" dirty="0"/>
+              <a:t>lso have a Diagnosis Code for CKD in the Military Health System, Age Standardized</a:t>
             </a:r>
           </a:p>
         </p:txBody>
@@ -21266,7 +21298,15 @@
           <a:p>
             <a:r>
               <a:rPr lang="en-US" sz="3600" b="1" dirty="0"/>
-              <a:t>Service Members and Their Dependents With eGFR-based CKD Stages 3–5 Who Also have a Diagnosis Code for CKD in the Military Health System, by Age</a:t>
+              <a:t>Service Members and Their Dependents with eGFR-based CKD Stages 3–5 who </a:t>
+            </a:r>
+            <a:r>
+              <a:rPr lang="en-US" sz="3600" dirty="0"/>
+              <a:t>a</a:t>
+            </a:r>
+            <a:r>
+              <a:rPr lang="en-US" sz="3600" b="1" dirty="0"/>
+              <a:t>lso have a Diagnosis Code for CKD in the Military Health System, by Age</a:t>
             </a:r>
           </a:p>
         </p:txBody>
@@ -21361,7 +21401,15 @@
           <a:p>
             <a:r>
               <a:rPr lang="en-US" sz="3600" b="1" dirty="0"/>
-              <a:t>Service Members and Their Dependents With eGFR-based CKD Stages 3–5 Who Also have a Diagnosis Code for CKD in the Military Health System by Sex, Crude</a:t>
+              <a:t>Service Members and Their Dependents with eGFR-based CKD Stages 3–5 who </a:t>
+            </a:r>
+            <a:r>
+              <a:rPr lang="en-US" sz="3600" dirty="0"/>
+              <a:t>a</a:t>
+            </a:r>
+            <a:r>
+              <a:rPr lang="en-US" sz="3600" b="1" dirty="0"/>
+              <a:t>lso have a Diagnosis Code for CKD in the Military Health System by Sex, Crude</a:t>
             </a:r>
           </a:p>
         </p:txBody>
@@ -21456,7 +21504,15 @@
           <a:p>
             <a:r>
               <a:rPr lang="en-US" sz="3600" b="1" dirty="0"/>
-              <a:t>Service Members and Their Dependents With eGFR-based CKD Stages 3–5 Who Also have a Diagnosis Code for CKD in the Military Health System by Sex, Age Standardized</a:t>
+              <a:t>Service Members and Their Dependents with eGFR-based CKD Stages 3–5 who </a:t>
+            </a:r>
+            <a:r>
+              <a:rPr lang="en-US" sz="3600" dirty="0"/>
+              <a:t>a</a:t>
+            </a:r>
+            <a:r>
+              <a:rPr lang="en-US" sz="3600" b="1" dirty="0"/>
+              <a:t>lso have a Diagnosis Code for CKD in the Military Health System by Sex, Age Standardized</a:t>
             </a:r>
           </a:p>
         </p:txBody>
@@ -21551,7 +21607,15 @@
           <a:p>
             <a:r>
               <a:rPr lang="en-US" sz="3600" b="1" dirty="0"/>
-              <a:t>Service Members and Their Dependents With eGFR-based CKD Stages 3–5 Who Also have a Diagnosis Code for CKD in the Military Health System by Race/Ethnicity, Crude</a:t>
+              <a:t>Service Members and Their Dependents with eGFR-based CKD Stages 3–5 who </a:t>
+            </a:r>
+            <a:r>
+              <a:rPr lang="en-US" sz="3600" dirty="0"/>
+              <a:t>a</a:t>
+            </a:r>
+            <a:r>
+              <a:rPr lang="en-US" sz="3600" b="1" dirty="0"/>
+              <a:t>lso have a Diagnosis Code for CKD in the Military Health System by Race/Ethnicity, Crude</a:t>
             </a:r>
           </a:p>
         </p:txBody>
@@ -21651,7 +21715,15 @@
             </a:pPr>
             <a:r>
               <a:rPr lang="en-US" sz="3600" b="1" dirty="0"/>
-              <a:t>Service Members and Their Dependents With eGFR-based CKD Stages 3–5 Who Also have a Diagnosis Code for CKD in the Military Health System by Race/Ethnicity, Age Standardized</a:t>
+              <a:t>Service Members and Their Dependents with eGFR-based CKD Stages 3–5 who </a:t>
+            </a:r>
+            <a:r>
+              <a:rPr lang="en-US" sz="3600" dirty="0"/>
+              <a:t>a</a:t>
+            </a:r>
+            <a:r>
+              <a:rPr lang="en-US" sz="3600" b="1" dirty="0"/>
+              <a:t>lso have a Diagnosis Code for CKD in the Military Health System by Race/Ethnicity, Age Standardized</a:t>
             </a:r>
           </a:p>
         </p:txBody>
@@ -21735,12 +21807,12 @@
         <p:spPr>
           <a:xfrm>
             <a:off x="838200" y="365125"/>
-            <a:ext cx="10515600" cy="1325563"/>
+            <a:ext cx="10972800" cy="1325563"/>
           </a:xfrm>
         </p:spPr>
         <p:txBody>
           <a:bodyPr anchor="ctr">
-            <a:normAutofit/>
+            <a:noAutofit/>
           </a:bodyPr>
           <a:lstStyle/>
           <a:p>
@@ -21750,8 +21822,24 @@
               </a:tabLst>
             </a:pPr>
             <a:r>
-              <a:rPr lang="en-US" sz="2800" b="1" dirty="0"/>
-              <a:t>Service Members and Their Dependents With eGFR-based CKD Stages 3–5 Who Also have a Diagnosis Code for CKD in the Military Health System by CKD Stage, Crude</a:t>
+              <a:rPr lang="en-US" sz="3600" b="1" dirty="0"/>
+              <a:t>Service Members and Their Dependents </a:t>
+            </a:r>
+            <a:r>
+              <a:rPr lang="en-US" sz="3600" dirty="0"/>
+              <a:t>w</a:t>
+            </a:r>
+            <a:r>
+              <a:rPr lang="en-US" sz="3600" b="1" dirty="0"/>
+              <a:t>ith eGFR-based CKD Stages 3–5 who </a:t>
+            </a:r>
+            <a:r>
+              <a:rPr lang="en-US" sz="3600" dirty="0"/>
+              <a:t>a</a:t>
+            </a:r>
+            <a:r>
+              <a:rPr lang="en-US" sz="3600" b="1" dirty="0"/>
+              <a:t>lso have a Diagnosis Code for CKD in the Military Health System by CKD Stage, Crude</a:t>
             </a:r>
           </a:p>
         </p:txBody>

--- a/CKDSurveillance/PPT/Q759.pptx
+++ b/CKDSurveillance/PPT/Q759.pptx
@@ -2925,7 +2925,7 @@
               <c:strCache>
                 <c:ptCount val="1"/>
                 <c:pt idx="0">
-                  <c:v>Asian/Pacific Islander</c:v>
+                  <c:v>Asian American/Pacific Islander</c:v>
                 </c:pt>
               </c:strCache>
             </c:strRef>
@@ -3721,9 +3721,9 @@
           <c:xMode val="edge"/>
           <c:yMode val="edge"/>
           <c:x val="1.6666666666666666E-2"/>
-          <c:y val="0.89952559055118109"/>
+          <c:y val="0.85508114610673669"/>
           <c:w val="0.97555555555555551"/>
-          <c:h val="8.3807742782152236E-2"/>
+          <c:h val="0.14491885389326334"/>
         </c:manualLayout>
       </c:layout>
       <c:overlay val="0"/>
@@ -7743,7 +7743,7 @@
           <a:p>
             <a:fld id="{81638023-F60A-4B21-BA4E-BD9AA67C04CD}" type="datetimeFigureOut">
               <a:rPr lang="en-US" smtClean="0"/>
-              <a:t>12/9/2025</a:t>
+              <a:t>1/6/2026</a:t>
             </a:fld>
             <a:endParaRPr lang="en-US"/>
           </a:p>
@@ -7951,7 +7951,7 @@
           <a:p>
             <a:fld id="{81638023-F60A-4B21-BA4E-BD9AA67C04CD}" type="datetimeFigureOut">
               <a:rPr lang="en-US" smtClean="0"/>
-              <a:t>12/9/2025</a:t>
+              <a:t>1/6/2026</a:t>
             </a:fld>
             <a:endParaRPr lang="en-US"/>
           </a:p>
@@ -8160,7 +8160,7 @@
           <a:p>
             <a:fld id="{81638023-F60A-4B21-BA4E-BD9AA67C04CD}" type="datetimeFigureOut">
               <a:rPr lang="en-US" smtClean="0"/>
-              <a:t>12/9/2025</a:t>
+              <a:t>1/6/2026</a:t>
             </a:fld>
             <a:endParaRPr lang="en-US"/>
           </a:p>
@@ -8475,7 +8475,7 @@
           <a:p>
             <a:fld id="{81638023-F60A-4B21-BA4E-BD9AA67C04CD}" type="datetimeFigureOut">
               <a:rPr lang="en-US" smtClean="0"/>
-              <a:t>12/9/2025</a:t>
+              <a:t>1/6/2026</a:t>
             </a:fld>
             <a:endParaRPr lang="en-US"/>
           </a:p>
@@ -8781,7 +8781,7 @@
           <a:p>
             <a:fld id="{81638023-F60A-4B21-BA4E-BD9AA67C04CD}" type="datetimeFigureOut">
               <a:rPr lang="en-US" smtClean="0"/>
-              <a:t>12/9/2025</a:t>
+              <a:t>1/6/2026</a:t>
             </a:fld>
             <a:endParaRPr lang="en-US"/>
           </a:p>
@@ -9229,7 +9229,7 @@
           <a:p>
             <a:fld id="{81638023-F60A-4B21-BA4E-BD9AA67C04CD}" type="datetimeFigureOut">
               <a:rPr lang="en-US" smtClean="0"/>
-              <a:t>12/9/2025</a:t>
+              <a:t>1/6/2026</a:t>
             </a:fld>
             <a:endParaRPr lang="en-US"/>
           </a:p>
@@ -9411,7 +9411,7 @@
           <a:p>
             <a:fld id="{81638023-F60A-4B21-BA4E-BD9AA67C04CD}" type="datetimeFigureOut">
               <a:rPr lang="en-US" smtClean="0"/>
-              <a:t>12/9/2025</a:t>
+              <a:t>1/6/2026</a:t>
             </a:fld>
             <a:endParaRPr lang="en-US"/>
           </a:p>
@@ -9560,7 +9560,7 @@
           <a:p>
             <a:fld id="{81638023-F60A-4B21-BA4E-BD9AA67C04CD}" type="datetimeFigureOut">
               <a:rPr lang="en-US" smtClean="0"/>
-              <a:t>12/9/2025</a:t>
+              <a:t>1/6/2026</a:t>
             </a:fld>
             <a:endParaRPr lang="en-US"/>
           </a:p>
@@ -9908,7 +9908,7 @@
           <a:p>
             <a:fld id="{81638023-F60A-4B21-BA4E-BD9AA67C04CD}" type="datetimeFigureOut">
               <a:rPr lang="en-US" smtClean="0"/>
-              <a:t>12/9/2025</a:t>
+              <a:t>1/6/2026</a:t>
             </a:fld>
             <a:endParaRPr lang="en-US"/>
           </a:p>
@@ -10236,7 +10236,7 @@
           <a:p>
             <a:fld id="{81638023-F60A-4B21-BA4E-BD9AA67C04CD}" type="datetimeFigureOut">
               <a:rPr lang="en-US" smtClean="0"/>
-              <a:t>12/9/2025</a:t>
+              <a:t>1/6/2026</a:t>
             </a:fld>
             <a:endParaRPr lang="en-US"/>
           </a:p>
@@ -10514,7 +10514,7 @@
           <a:p>
             <a:fld id="{81638023-F60A-4B21-BA4E-BD9AA67C04CD}" type="datetimeFigureOut">
               <a:rPr lang="en-US" smtClean="0"/>
-              <a:t>12/9/2025</a:t>
+              <a:t>1/6/2026</a:t>
             </a:fld>
             <a:endParaRPr lang="en-US"/>
           </a:p>
@@ -11577,13 +11577,13 @@
           <p:nvPr>
             <p:extLst>
               <p:ext uri="{D42A27DB-BD31-4B8C-83A1-F6EECF244321}">
-                <p14:modId xmlns:p14="http://schemas.microsoft.com/office/powerpoint/2010/main" val="3303321239"/>
+                <p14:modId xmlns:p14="http://schemas.microsoft.com/office/powerpoint/2010/main" val="2077960319"/>
               </p:ext>
             </p:extLst>
           </p:nvPr>
         </p:nvGraphicFramePr>
         <p:xfrm>
-          <a:off x="381000" y="1692937"/>
+          <a:off x="381000" y="1465836"/>
           <a:ext cx="11430000" cy="4572000"/>
         </p:xfrm>
         <a:graphic>
